--- a/ppt/GundetiSachinReddy_X23432721_smart-waste-management.pptx
+++ b/ppt/GundetiSachinReddy_X23432721_smart-waste-management.pptx
@@ -1144,14 +1144,34 @@
       </p:grpSpPr>
       <p:sp>
         <p:nvSpPr>
-          <p:cNvPr id="2" name="Text 0"/>
-          <p:cNvSpPr/>
-          <p:nvPr/>
-        </p:nvSpPr>
-        <p:spPr>
-          <a:xfrm>
-            <a:off x="640080" y="914400"/>
-            <a:ext cx="10972800" cy="1280160"/>
+          <p:cNvPr id="2" name="Shape 0"/>
+          <p:cNvSpPr/>
+          <p:nvPr/>
+        </p:nvSpPr>
+        <p:spPr>
+          <a:xfrm>
+            <a:off x="0" y="0"/>
+            <a:ext cx="4663440" cy="6858000"/>
+          </a:xfrm>
+          <a:prstGeom prst="rect">
+            <a:avLst/>
+          </a:prstGeom>
+          <a:solidFill>
+            <a:srgbClr val="1E6B34"/>
+          </a:solidFill>
+          <a:ln/>
+        </p:spPr>
+      </p:sp>
+      <p:sp>
+        <p:nvSpPr>
+          <p:cNvPr id="3" name="Text 1"/>
+          <p:cNvSpPr/>
+          <p:nvPr/>
+        </p:nvSpPr>
+        <p:spPr>
+          <a:xfrm>
+            <a:off x="502920" y="1280160"/>
+            <a:ext cx="3749040" cy="2377440"/>
           </a:xfrm>
           <a:prstGeom prst="rect">
             <a:avLst/>
@@ -1163,11 +1183,11 @@
           <a:bodyPr wrap="square" rtlCol="0" anchor="t"/>
           <a:lstStyle/>
           <a:p>
-            <a:pPr algn="l" indent="0" marL="0">
-              <a:buNone/>
-            </a:pPr>
-            <a:r>
-              <a:rPr lang="en-US" sz="4000" b="1" dirty="0">
+            <a:pPr indent="0" marL="0">
+              <a:buNone/>
+            </a:pPr>
+            <a:r>
+              <a:rPr lang="en-US" sz="3400" b="1" dirty="0">
                 <a:solidFill>
                   <a:srgbClr val="FFFFFF"/>
                 </a:solidFill>
@@ -1177,20 +1197,20 @@
               </a:rPr>
               <a:t>Smart Waste Management</a:t>
             </a:r>
-            <a:endParaRPr lang="en-US" sz="4000" dirty="0"/>
-          </a:p>
-        </p:txBody>
-      </p:sp>
-      <p:sp>
-        <p:nvSpPr>
-          <p:cNvPr id="3" name="Text 1"/>
-          <p:cNvSpPr/>
-          <p:nvPr/>
-        </p:nvSpPr>
-        <p:spPr>
-          <a:xfrm>
-            <a:off x="658368" y="2148840"/>
-            <a:ext cx="10972800" cy="365760"/>
+            <a:endParaRPr lang="en-US" sz="3400" dirty="0"/>
+          </a:p>
+        </p:txBody>
+      </p:sp>
+      <p:sp>
+        <p:nvSpPr>
+          <p:cNvPr id="4" name="Text 2"/>
+          <p:cNvSpPr/>
+          <p:nvPr/>
+        </p:nvSpPr>
+        <p:spPr>
+          <a:xfrm>
+            <a:off x="521208" y="5394960"/>
+            <a:ext cx="3840480" cy="731520"/>
           </a:xfrm>
           <a:prstGeom prst="rect">
             <a:avLst/>
@@ -1206,9 +1226,9 @@
               <a:buNone/>
             </a:pPr>
             <a:r>
-              <a:rPr lang="en-US" sz="1600" dirty="0">
-                <a:solidFill>
-                  <a:srgbClr val="5E9A62"/>
+              <a:rPr lang="en-US" sz="1500" dirty="0">
+                <a:solidFill>
+                  <a:srgbClr val="D2E6CE"/>
                 </a:solidFill>
                 <a:latin typeface="Calibri" pitchFamily="34" charset="0"/>
                 <a:ea typeface="Calibri" pitchFamily="34" charset="-122"/>
@@ -1216,20 +1236,20 @@
               </a:rPr>
               <a:t>Gundeti Sachin Reddy   ·   X23432721</a:t>
             </a:r>
-            <a:endParaRPr lang="en-US" sz="1600" dirty="0"/>
-          </a:p>
-        </p:txBody>
-      </p:sp>
-      <p:sp>
-        <p:nvSpPr>
-          <p:cNvPr id="4" name="Text 2"/>
-          <p:cNvSpPr/>
-          <p:nvPr/>
-        </p:nvSpPr>
-        <p:spPr>
-          <a:xfrm>
-            <a:off x="658368" y="2697480"/>
-            <a:ext cx="10424160" cy="1371600"/>
+            <a:endParaRPr lang="en-US" sz="1500" dirty="0"/>
+          </a:p>
+        </p:txBody>
+      </p:sp>
+      <p:sp>
+        <p:nvSpPr>
+          <p:cNvPr id="5" name="Text 3"/>
+          <p:cNvSpPr/>
+          <p:nvPr/>
+        </p:nvSpPr>
+        <p:spPr>
+          <a:xfrm>
+            <a:off x="5120640" y="1371600"/>
+            <a:ext cx="6492240" cy="2011680"/>
           </a:xfrm>
           <a:prstGeom prst="rect">
             <a:avLst/>
@@ -1243,7 +1263,7 @@
           <a:p>
             <a:pPr indent="0" marL="0">
               <a:lnSpc>
-                <a:spcPct val="110000"/>
+                <a:spcPct val="112000"/>
               </a:lnSpc>
               <a:buNone/>
             </a:pPr>
@@ -1264,14 +1284,14 @@
       </p:sp>
       <p:sp>
         <p:nvSpPr>
-          <p:cNvPr id="5" name="Shape 3"/>
-          <p:cNvSpPr/>
-          <p:nvPr/>
-        </p:nvSpPr>
-        <p:spPr>
-          <a:xfrm>
-            <a:off x="658368" y="4206240"/>
-            <a:ext cx="2651760" cy="566928"/>
+          <p:cNvPr id="6" name="Shape 4"/>
+          <p:cNvSpPr/>
+          <p:nvPr/>
+        </p:nvSpPr>
+        <p:spPr>
+          <a:xfrm>
+            <a:off x="5120640" y="4023360"/>
+            <a:ext cx="2926080" cy="566928"/>
           </a:xfrm>
           <a:prstGeom prst="roundRect">
             <a:avLst>
@@ -1291,14 +1311,14 @@
       </p:sp>
       <p:sp>
         <p:nvSpPr>
-          <p:cNvPr id="6" name="Text 4"/>
-          <p:cNvSpPr/>
-          <p:nvPr/>
-        </p:nvSpPr>
-        <p:spPr>
-          <a:xfrm>
-            <a:off x="658368" y="4206240"/>
-            <a:ext cx="2651760" cy="566928"/>
+          <p:cNvPr id="7" name="Text 5"/>
+          <p:cNvSpPr/>
+          <p:nvPr/>
+        </p:nvSpPr>
+        <p:spPr>
+          <a:xfrm>
+            <a:off x="5120640" y="4023360"/>
+            <a:ext cx="2926080" cy="566928"/>
           </a:xfrm>
           <a:prstGeom prst="rect">
             <a:avLst/>
@@ -1314,7 +1334,7 @@
               <a:buNone/>
             </a:pPr>
             <a:r>
-              <a:rPr lang="en-US" sz="1400" b="1" dirty="0">
+              <a:rPr lang="en-US" sz="1350" b="1" dirty="0">
                 <a:solidFill>
                   <a:srgbClr val="D9A62E"/>
                 </a:solidFill>
@@ -1324,20 +1344,20 @@
               </a:rPr>
               <a:t>Overflow fill &gt; 85%</a:t>
             </a:r>
-            <a:endParaRPr lang="en-US" sz="1400" dirty="0"/>
-          </a:p>
-        </p:txBody>
-      </p:sp>
-      <p:sp>
-        <p:nvSpPr>
-          <p:cNvPr id="7" name="Shape 5"/>
-          <p:cNvSpPr/>
-          <p:nvPr/>
-        </p:nvSpPr>
-        <p:spPr>
-          <a:xfrm>
-            <a:off x="3538728" y="4206240"/>
-            <a:ext cx="2651760" cy="566928"/>
+            <a:endParaRPr lang="en-US" sz="1350" dirty="0"/>
+          </a:p>
+        </p:txBody>
+      </p:sp>
+      <p:sp>
+        <p:nvSpPr>
+          <p:cNvPr id="8" name="Shape 6"/>
+          <p:cNvSpPr/>
+          <p:nvPr/>
+        </p:nvSpPr>
+        <p:spPr>
+          <a:xfrm>
+            <a:off x="5120640" y="4709160"/>
+            <a:ext cx="2926080" cy="566928"/>
           </a:xfrm>
           <a:prstGeom prst="roundRect">
             <a:avLst>
@@ -1357,14 +1377,14 @@
       </p:sp>
       <p:sp>
         <p:nvSpPr>
-          <p:cNvPr id="8" name="Text 6"/>
-          <p:cNvSpPr/>
-          <p:nvPr/>
-        </p:nvSpPr>
-        <p:spPr>
-          <a:xfrm>
-            <a:off x="3538728" y="4206240"/>
-            <a:ext cx="2651760" cy="566928"/>
+          <p:cNvPr id="9" name="Text 7"/>
+          <p:cNvSpPr/>
+          <p:nvPr/>
+        </p:nvSpPr>
+        <p:spPr>
+          <a:xfrm>
+            <a:off x="5120640" y="4709160"/>
+            <a:ext cx="2926080" cy="566928"/>
           </a:xfrm>
           <a:prstGeom prst="rect">
             <a:avLst/>
@@ -1380,7 +1400,7 @@
               <a:buNone/>
             </a:pPr>
             <a:r>
-              <a:rPr lang="en-US" sz="1400" b="1" dirty="0">
+              <a:rPr lang="en-US" sz="1350" b="1" dirty="0">
                 <a:solidFill>
                   <a:srgbClr val="D9A62E"/>
                 </a:solidFill>
@@ -1390,20 +1410,20 @@
               </a:rPr>
               <a:t>Fire temp &gt; 55 °C</a:t>
             </a:r>
-            <a:endParaRPr lang="en-US" sz="1400" dirty="0"/>
-          </a:p>
-        </p:txBody>
-      </p:sp>
-      <p:sp>
-        <p:nvSpPr>
-          <p:cNvPr id="9" name="Shape 7"/>
-          <p:cNvSpPr/>
-          <p:nvPr/>
-        </p:nvSpPr>
-        <p:spPr>
-          <a:xfrm>
-            <a:off x="6419088" y="4206240"/>
-            <a:ext cx="2651760" cy="566928"/>
+            <a:endParaRPr lang="en-US" sz="1350" dirty="0"/>
+          </a:p>
+        </p:txBody>
+      </p:sp>
+      <p:sp>
+        <p:nvSpPr>
+          <p:cNvPr id="10" name="Shape 8"/>
+          <p:cNvSpPr/>
+          <p:nvPr/>
+        </p:nvSpPr>
+        <p:spPr>
+          <a:xfrm>
+            <a:off x="5120640" y="5394960"/>
+            <a:ext cx="2926080" cy="566928"/>
           </a:xfrm>
           <a:prstGeom prst="roundRect">
             <a:avLst>
@@ -1423,14 +1443,14 @@
       </p:sp>
       <p:sp>
         <p:nvSpPr>
-          <p:cNvPr id="10" name="Text 8"/>
-          <p:cNvSpPr/>
-          <p:nvPr/>
-        </p:nvSpPr>
-        <p:spPr>
-          <a:xfrm>
-            <a:off x="6419088" y="4206240"/>
-            <a:ext cx="2651760" cy="566928"/>
+          <p:cNvPr id="11" name="Text 9"/>
+          <p:cNvSpPr/>
+          <p:nvPr/>
+        </p:nvSpPr>
+        <p:spPr>
+          <a:xfrm>
+            <a:off x="5120640" y="5394960"/>
+            <a:ext cx="2926080" cy="566928"/>
           </a:xfrm>
           <a:prstGeom prst="rect">
             <a:avLst/>
@@ -1446,7 +1466,7 @@
               <a:buNone/>
             </a:pPr>
             <a:r>
-              <a:rPr lang="en-US" sz="1400" b="1" dirty="0">
+              <a:rPr lang="en-US" sz="1350" b="1" dirty="0">
                 <a:solidFill>
                   <a:srgbClr val="D9A62E"/>
                 </a:solidFill>
@@ -1456,20 +1476,20 @@
               </a:rPr>
               <a:t>Gas &gt; 400 ppm</a:t>
             </a:r>
-            <a:endParaRPr lang="en-US" sz="1400" dirty="0"/>
-          </a:p>
-        </p:txBody>
-      </p:sp>
-      <p:sp>
-        <p:nvSpPr>
-          <p:cNvPr id="11" name="Text 9"/>
-          <p:cNvSpPr/>
-          <p:nvPr/>
-        </p:nvSpPr>
-        <p:spPr>
-          <a:xfrm>
-            <a:off x="658368" y="6126480"/>
-            <a:ext cx="10972800" cy="365760"/>
+            <a:endParaRPr lang="en-US" sz="1350" dirty="0"/>
+          </a:p>
+        </p:txBody>
+      </p:sp>
+      <p:sp>
+        <p:nvSpPr>
+          <p:cNvPr id="12" name="Text 10"/>
+          <p:cNvSpPr/>
+          <p:nvPr/>
+        </p:nvSpPr>
+        <p:spPr>
+          <a:xfrm>
+            <a:off x="5120640" y="6172200"/>
+            <a:ext cx="6400800" cy="365760"/>
           </a:xfrm>
           <a:prstGeom prst="rect">
             <a:avLst/>
@@ -1485,7 +1505,7 @@
               <a:buNone/>
             </a:pPr>
             <a:r>
-              <a:rPr lang="en-US" sz="1300" dirty="0">
+              <a:rPr lang="en-US" sz="1250" dirty="0">
                 <a:solidFill>
                   <a:srgbClr val="5C6E58"/>
                 </a:solidFill>
@@ -1495,7 +1515,7 @@
               </a:rPr>
               <a:t>Fog &amp; Edge Computing (H9FECC)   ·   deployed live on AWS</a:t>
             </a:r>
-            <a:endParaRPr lang="en-US" sz="1300" dirty="0"/>
+            <a:endParaRPr lang="en-US" sz="1250" dirty="0"/>
           </a:p>
         </p:txBody>
       </p:sp>
@@ -1605,8 +1625,8 @@
         </p:nvSpPr>
         <p:spPr>
           <a:xfrm>
-            <a:off x="1325880" y="2670048"/>
-            <a:ext cx="201168" cy="201168"/>
+            <a:off x="1335024" y="2633472"/>
+            <a:ext cx="182880" cy="182880"/>
           </a:xfrm>
           <a:prstGeom prst="ellipse">
             <a:avLst/>
@@ -1625,8 +1645,8 @@
         </p:nvSpPr>
         <p:spPr>
           <a:xfrm>
-            <a:off x="594360" y="2926080"/>
-            <a:ext cx="1664208" cy="411480"/>
+            <a:off x="612648" y="2852928"/>
+            <a:ext cx="1627632" cy="365760"/>
           </a:xfrm>
           <a:prstGeom prst="rect">
             <a:avLst/>
@@ -1664,8 +1684,8 @@
         </p:nvSpPr>
         <p:spPr>
           <a:xfrm>
-            <a:off x="621792" y="3310128"/>
-            <a:ext cx="1609344" cy="457200"/>
+            <a:off x="640080" y="3200400"/>
+            <a:ext cx="1572768" cy="411480"/>
           </a:xfrm>
           <a:prstGeom prst="rect">
             <a:avLst/>
@@ -1754,8 +1774,8 @@
         </p:nvSpPr>
         <p:spPr>
           <a:xfrm>
-            <a:off x="3193633" y="2670048"/>
-            <a:ext cx="201168" cy="201168"/>
+            <a:off x="3202777" y="2633472"/>
+            <a:ext cx="182880" cy="182880"/>
           </a:xfrm>
           <a:prstGeom prst="ellipse">
             <a:avLst/>
@@ -1774,8 +1794,8 @@
         </p:nvSpPr>
         <p:spPr>
           <a:xfrm>
-            <a:off x="2462113" y="2926080"/>
-            <a:ext cx="1664208" cy="411480"/>
+            <a:off x="2480401" y="2852928"/>
+            <a:ext cx="1627632" cy="365760"/>
           </a:xfrm>
           <a:prstGeom prst="rect">
             <a:avLst/>
@@ -1813,8 +1833,8 @@
         </p:nvSpPr>
         <p:spPr>
           <a:xfrm>
-            <a:off x="2489545" y="3310128"/>
-            <a:ext cx="1609344" cy="457200"/>
+            <a:off x="2507833" y="3200400"/>
+            <a:ext cx="1572768" cy="411480"/>
           </a:xfrm>
           <a:prstGeom prst="rect">
             <a:avLst/>
@@ -1903,8 +1923,8 @@
         </p:nvSpPr>
         <p:spPr>
           <a:xfrm>
-            <a:off x="5061387" y="2670048"/>
-            <a:ext cx="201168" cy="201168"/>
+            <a:off x="5070531" y="2633472"/>
+            <a:ext cx="182880" cy="182880"/>
           </a:xfrm>
           <a:prstGeom prst="ellipse">
             <a:avLst/>
@@ -1923,8 +1943,8 @@
         </p:nvSpPr>
         <p:spPr>
           <a:xfrm>
-            <a:off x="4329867" y="2926080"/>
-            <a:ext cx="1664208" cy="411480"/>
+            <a:off x="4348155" y="2852928"/>
+            <a:ext cx="1627632" cy="365760"/>
           </a:xfrm>
           <a:prstGeom prst="rect">
             <a:avLst/>
@@ -1962,8 +1982,8 @@
         </p:nvSpPr>
         <p:spPr>
           <a:xfrm>
-            <a:off x="4357299" y="3310128"/>
-            <a:ext cx="1609344" cy="457200"/>
+            <a:off x="4375587" y="3200400"/>
+            <a:ext cx="1572768" cy="411480"/>
           </a:xfrm>
           <a:prstGeom prst="rect">
             <a:avLst/>
@@ -2052,8 +2072,8 @@
         </p:nvSpPr>
         <p:spPr>
           <a:xfrm>
-            <a:off x="6929140" y="2670048"/>
-            <a:ext cx="201168" cy="201168"/>
+            <a:off x="6938284" y="2633472"/>
+            <a:ext cx="182880" cy="182880"/>
           </a:xfrm>
           <a:prstGeom prst="ellipse">
             <a:avLst/>
@@ -2072,8 +2092,8 @@
         </p:nvSpPr>
         <p:spPr>
           <a:xfrm>
-            <a:off x="6197620" y="2926080"/>
-            <a:ext cx="1664208" cy="411480"/>
+            <a:off x="6215908" y="2852928"/>
+            <a:ext cx="1627632" cy="365760"/>
           </a:xfrm>
           <a:prstGeom prst="rect">
             <a:avLst/>
@@ -2111,8 +2131,8 @@
         </p:nvSpPr>
         <p:spPr>
           <a:xfrm>
-            <a:off x="6225052" y="3310128"/>
-            <a:ext cx="1609344" cy="457200"/>
+            <a:off x="6243340" y="3200400"/>
+            <a:ext cx="1572768" cy="411480"/>
           </a:xfrm>
           <a:prstGeom prst="rect">
             <a:avLst/>
@@ -2201,8 +2221,8 @@
         </p:nvSpPr>
         <p:spPr>
           <a:xfrm>
-            <a:off x="8796894" y="2670048"/>
-            <a:ext cx="201168" cy="201168"/>
+            <a:off x="8806038" y="2633472"/>
+            <a:ext cx="182880" cy="182880"/>
           </a:xfrm>
           <a:prstGeom prst="ellipse">
             <a:avLst/>
@@ -2221,8 +2241,8 @@
         </p:nvSpPr>
         <p:spPr>
           <a:xfrm>
-            <a:off x="8065374" y="2926080"/>
-            <a:ext cx="1664208" cy="411480"/>
+            <a:off x="8083662" y="2852928"/>
+            <a:ext cx="1627632" cy="365760"/>
           </a:xfrm>
           <a:prstGeom prst="rect">
             <a:avLst/>
@@ -2260,8 +2280,8 @@
         </p:nvSpPr>
         <p:spPr>
           <a:xfrm>
-            <a:off x="8092806" y="3310128"/>
-            <a:ext cx="1609344" cy="457200"/>
+            <a:off x="8111094" y="3200400"/>
+            <a:ext cx="1572768" cy="411480"/>
           </a:xfrm>
           <a:prstGeom prst="rect">
             <a:avLst/>
@@ -2350,8 +2370,8 @@
         </p:nvSpPr>
         <p:spPr>
           <a:xfrm>
-            <a:off x="10664647" y="2670048"/>
-            <a:ext cx="201168" cy="201168"/>
+            <a:off x="10673791" y="2633472"/>
+            <a:ext cx="182880" cy="182880"/>
           </a:xfrm>
           <a:prstGeom prst="ellipse">
             <a:avLst/>
@@ -2370,8 +2390,8 @@
         </p:nvSpPr>
         <p:spPr>
           <a:xfrm>
-            <a:off x="9933127" y="2926080"/>
-            <a:ext cx="1664208" cy="411480"/>
+            <a:off x="9951415" y="2852928"/>
+            <a:ext cx="1627632" cy="365760"/>
           </a:xfrm>
           <a:prstGeom prst="rect">
             <a:avLst/>
@@ -2409,8 +2429,8 @@
         </p:nvSpPr>
         <p:spPr>
           <a:xfrm>
-            <a:off x="9960559" y="3310128"/>
-            <a:ext cx="1609344" cy="457200"/>
+            <a:off x="9978847" y="3200400"/>
+            <a:ext cx="1572768" cy="411480"/>
           </a:xfrm>
           <a:prstGeom prst="rect">
             <a:avLst/>
@@ -2526,8 +2546,8 @@
         </p:nvSpPr>
         <p:spPr>
           <a:xfrm>
-            <a:off x="640080" y="5212080"/>
-            <a:ext cx="10972800" cy="640080"/>
+            <a:off x="640080" y="5257800"/>
+            <a:ext cx="10972800" cy="731520"/>
           </a:xfrm>
           <a:prstGeom prst="rect">
             <a:avLst/>
@@ -2759,7 +2779,7 @@
                 <a:ea typeface="Calibri" pitchFamily="34" charset="-122"/>
                 <a:cs typeface="Calibri" pitchFamily="34" charset="-120"/>
               </a:rPr>
-              <a:t>Pipeline health, all green</a:t>
+              <a:t>Two districts, four hazard signals</a:t>
             </a:r>
             <a:endParaRPr lang="en-US" sz="1800" dirty="0"/>
           </a:p>
@@ -2798,7 +2818,7 @@
                 <a:ea typeface="Calibri" pitchFamily="34" charset="-122"/>
                 <a:cs typeface="Calibri" pitchFamily="34" charset="-120"/>
               </a:rPr>
-              <a:t>Four of four checks green, with the freshest reading just 0.136 s old.</a:t>
+              <a:t>Fill level, internal temperature, gas and lid activity live per bin, so the busiest bin is always surfaced first.</a:t>
             </a:r>
             <a:endParaRPr lang="en-US" sz="1350" dirty="0"/>
           </a:p>
@@ -2896,7 +2916,7 @@
                 <a:ea typeface="Calibri" pitchFamily="34" charset="-122"/>
                 <a:cs typeface="Calibri" pitchFamily="34" charset="-120"/>
               </a:rPr>
-              <a:t>Genuinely live data</a:t>
+              <a:t>Four hazard rules firing live</a:t>
             </a:r>
             <a:endParaRPr lang="en-US" sz="1800" dirty="0"/>
           </a:p>
@@ -2935,7 +2955,7 @@
                 <a:ea typeface="Calibri" pitchFamily="34" charset="-122"/>
                 <a:cs typeface="Calibri" pitchFamily="34" charset="-120"/>
               </a:rPr>
-              <a:t>Two health polls fifteen seconds apart show stored items climbing 4,083 to 4,093 — live data, not a cache.</a:t>
+              <a:t>Overflow above 85% fill, fire risk above 55 C, gas above 400 ppm and tampering each raise on the window they appear.</a:t>
             </a:r>
             <a:endParaRPr lang="en-US" sz="1350" dirty="0"/>
           </a:p>
@@ -3033,7 +3053,7 @@
                 <a:ea typeface="Calibri" pitchFamily="34" charset="-122"/>
                 <a:cs typeface="Calibri" pitchFamily="34" charset="-120"/>
               </a:rPr>
-              <a:t>Tested and scales</a:t>
+              <a:t>Genuinely live, not a cache</a:t>
             </a:r>
             <a:endParaRPr lang="en-US" sz="1800" dirty="0"/>
           </a:p>
@@ -3072,7 +3092,7 @@
                 <a:ea typeface="Calibri" pitchFamily="34" charset="-122"/>
                 <a:cs typeface="Calibri" pitchFamily="34" charset="-120"/>
               </a:rPr>
-              <a:t>115 automated tests pass across all four modules; a 300-message burst sent at ~49 msg/s and absorbed by Lambda before the follow-up check.</a:t>
+              <a:t>Two health polls fifteen seconds apart show the stored count climbing 4,083 to 4,093 — live data.</a:t>
             </a:r>
             <a:endParaRPr lang="en-US" sz="1350" dirty="0"/>
           </a:p>
@@ -3157,24 +3177,24 @@
         </p:nvSpPr>
         <p:spPr>
           <a:xfrm>
-            <a:off x="640080" y="640080"/>
-            <a:ext cx="10972800" cy="640080"/>
-          </a:xfrm>
-          <a:prstGeom prst="rect">
-            <a:avLst/>
-          </a:prstGeom>
-          <a:noFill/>
-          <a:ln/>
-        </p:spPr>
-        <p:txBody>
-          <a:bodyPr wrap="square" rtlCol="0" anchor="ctr"/>
+            <a:off x="640080" y="594360"/>
+            <a:ext cx="10972800" cy="822960"/>
+          </a:xfrm>
+          <a:prstGeom prst="rect">
+            <a:avLst/>
+          </a:prstGeom>
+          <a:noFill/>
+          <a:ln/>
+        </p:spPr>
+        <p:txBody>
+          <a:bodyPr wrap="square" rtlCol="0" anchor="t"/>
           <a:lstStyle/>
           <a:p>
             <a:pPr indent="0" marL="0">
               <a:buNone/>
             </a:pPr>
             <a:r>
-              <a:rPr lang="en-US" sz="3000" b="1" dirty="0">
+              <a:rPr lang="en-US" sz="2800" b="1" dirty="0">
                 <a:solidFill>
                   <a:srgbClr val="FFFFFF"/>
                 </a:solidFill>
@@ -3184,7 +3204,7 @@
               </a:rPr>
               <a:t>Hardest Part — what only the real cloud revealed</a:t>
             </a:r>
-            <a:endParaRPr lang="en-US" sz="3000" dirty="0"/>
+            <a:endParaRPr lang="en-US" sz="2800" dirty="0"/>
           </a:p>
         </p:txBody>
       </p:sp>

--- a/ppt/GundetiSachinReddy_X23432721_smart-waste-management.pptx
+++ b/ppt/GundetiSachinReddy_X23432721_smart-waste-management.pptx
@@ -3151,7 +3151,7 @@
     <p:bg>
       <p:bgPr>
         <a:solidFill>
-          <a:srgbClr val="14261A"/>
+          <a:srgbClr val="FFFFFF"/>
         </a:solidFill>
       </p:bgPr>
     </p:bg>
@@ -3177,7 +3177,7 @@
         </p:nvSpPr>
         <p:spPr>
           <a:xfrm>
-            <a:off x="640080" y="594360"/>
+            <a:off x="640080" y="502920"/>
             <a:ext cx="10972800" cy="822960"/>
           </a:xfrm>
           <a:prstGeom prst="rect">
@@ -3196,7 +3196,7 @@
             <a:r>
               <a:rPr lang="en-US" sz="2800" b="1" dirty="0">
                 <a:solidFill>
-                  <a:srgbClr val="FFFFFF"/>
+                  <a:srgbClr val="152619"/>
                 </a:solidFill>
                 <a:latin typeface="Century Schoolbook" pitchFamily="34" charset="0"/>
                 <a:ea typeface="Century Schoolbook" pitchFamily="34" charset="-122"/>
@@ -3225,9 +3225,9 @@
             </a:avLst>
           </a:prstGeom>
           <a:solidFill>
-            <a:srgbClr val="1F3A28"/>
-          </a:solidFill>
-          <a:ln w="15875">
+            <a:srgbClr val="EEF4EC"/>
+          </a:solidFill>
+          <a:ln w="19050">
             <a:solidFill>
               <a:srgbClr val="D9A62E"/>
             </a:solidFill>
@@ -3304,7 +3304,7 @@
             <a:r>
               <a:rPr lang="en-US" sz="1300" dirty="0">
                 <a:solidFill>
-                  <a:srgbClr val="D2E6CE"/>
+                  <a:srgbClr val="152619"/>
                 </a:solidFill>
                 <a:latin typeface="Calibri" pitchFamily="34" charset="0"/>
                 <a:ea typeface="Calibri" pitchFamily="34" charset="-122"/>
@@ -3333,11 +3333,11 @@
             </a:avLst>
           </a:prstGeom>
           <a:solidFill>
-            <a:srgbClr val="1F3A28"/>
-          </a:solidFill>
-          <a:ln w="15875">
+            <a:srgbClr val="EEF4EC"/>
+          </a:solidFill>
+          <a:ln w="19050">
             <a:solidFill>
-              <a:srgbClr val="5E9A62"/>
+              <a:srgbClr val="2E8C46"/>
             </a:solidFill>
             <a:prstDash val="solid"/>
           </a:ln>
@@ -3370,7 +3370,7 @@
             <a:r>
               <a:rPr lang="en-US" sz="1900" b="1" dirty="0">
                 <a:solidFill>
-                  <a:srgbClr val="5E9A62"/>
+                  <a:srgbClr val="2E8C46"/>
                 </a:solidFill>
                 <a:latin typeface="Century Schoolbook" pitchFamily="34" charset="0"/>
                 <a:ea typeface="Century Schoolbook" pitchFamily="34" charset="-122"/>
@@ -3412,7 +3412,7 @@
             <a:r>
               <a:rPr lang="en-US" sz="1300" dirty="0">
                 <a:solidFill>
-                  <a:srgbClr val="D2E6CE"/>
+                  <a:srgbClr val="152619"/>
                 </a:solidFill>
                 <a:latin typeface="Calibri" pitchFamily="34" charset="0"/>
                 <a:ea typeface="Calibri" pitchFamily="34" charset="-122"/>

--- a/ppt/GundetiSachinReddy_X23432721_smart-waste-management.pptx
+++ b/ppt/GundetiSachinReddy_X23432721_smart-waste-management.pptx
@@ -1144,34 +1144,83 @@
       </p:grpSpPr>
       <p:sp>
         <p:nvSpPr>
-          <p:cNvPr id="2" name="Shape 0"/>
-          <p:cNvSpPr/>
-          <p:nvPr/>
-        </p:nvSpPr>
-        <p:spPr>
-          <a:xfrm>
-            <a:off x="0" y="0"/>
-            <a:ext cx="4663440" cy="6858000"/>
-          </a:xfrm>
-          <a:prstGeom prst="rect">
-            <a:avLst/>
-          </a:prstGeom>
-          <a:solidFill>
-            <a:srgbClr val="1E6B34"/>
-          </a:solidFill>
-          <a:ln/>
-        </p:spPr>
-      </p:sp>
-      <p:sp>
-        <p:nvSpPr>
-          <p:cNvPr id="3" name="Text 1"/>
-          <p:cNvSpPr/>
-          <p:nvPr/>
-        </p:nvSpPr>
-        <p:spPr>
-          <a:xfrm>
-            <a:off x="502920" y="1280160"/>
-            <a:ext cx="3749040" cy="2377440"/>
+          <p:cNvPr id="2" name="Text 0"/>
+          <p:cNvSpPr/>
+          <p:nvPr/>
+        </p:nvSpPr>
+        <p:spPr>
+          <a:xfrm>
+            <a:off x="658368" y="777240"/>
+            <a:ext cx="10607040" cy="1280160"/>
+          </a:xfrm>
+          <a:prstGeom prst="rect">
+            <a:avLst/>
+          </a:prstGeom>
+          <a:noFill/>
+          <a:ln/>
+        </p:spPr>
+        <p:txBody>
+          <a:bodyPr wrap="square" rtlCol="0" anchor="ctr"/>
+          <a:lstStyle/>
+          <a:p>
+            <a:pPr indent="0" marL="0">
+              <a:lnSpc>
+                <a:spcPct val="108000"/>
+              </a:lnSpc>
+              <a:buNone/>
+            </a:pPr>
+            <a:r>
+              <a:rPr lang="en-US" sz="1800" dirty="0">
+                <a:solidFill>
+                  <a:srgbClr val="D2E6CE"/>
+                </a:solidFill>
+                <a:latin typeface="Calibri" pitchFamily="34" charset="0"/>
+                <a:ea typeface="Calibri" pitchFamily="34" charset="-122"/>
+                <a:cs typeface="Calibri" pitchFamily="34" charset="-120"/>
+              </a:rPr>
+              <a:t>Municipal collection runs on a fixed calendar, not on what is inside each bin — trucks roll to bins that are not yet full, while overflow, fire or gas build-up stays invisible until the next visit.</a:t>
+            </a:r>
+            <a:endParaRPr lang="en-US" sz="1800" dirty="0"/>
+          </a:p>
+        </p:txBody>
+      </p:sp>
+      <p:sp>
+        <p:nvSpPr>
+          <p:cNvPr id="3" name="Shape 1"/>
+          <p:cNvSpPr/>
+          <p:nvPr/>
+        </p:nvSpPr>
+        <p:spPr>
+          <a:xfrm>
+            <a:off x="1097280" y="2377440"/>
+            <a:ext cx="9966960" cy="2011680"/>
+          </a:xfrm>
+          <a:prstGeom prst="roundRect">
+            <a:avLst>
+              <a:gd name="adj" fmla="val 5455"/>
+            </a:avLst>
+          </a:prstGeom>
+          <a:solidFill>
+            <a:srgbClr val="1B3322"/>
+          </a:solidFill>
+          <a:ln w="15875">
+            <a:solidFill>
+              <a:srgbClr val="D9A62E"/>
+            </a:solidFill>
+            <a:prstDash val="solid"/>
+          </a:ln>
+        </p:spPr>
+      </p:sp>
+      <p:sp>
+        <p:nvSpPr>
+          <p:cNvPr id="4" name="Text 2"/>
+          <p:cNvSpPr/>
+          <p:nvPr/>
+        </p:nvSpPr>
+        <p:spPr>
+          <a:xfrm>
+            <a:off x="1463040" y="2651760"/>
+            <a:ext cx="9235440" cy="1005840"/>
           </a:xfrm>
           <a:prstGeom prst="rect">
             <a:avLst/>
@@ -1187,7 +1236,7 @@
               <a:buNone/>
             </a:pPr>
             <a:r>
-              <a:rPr lang="en-US" sz="3400" b="1" dirty="0">
+              <a:rPr lang="en-US" sz="3600" b="1" dirty="0">
                 <a:solidFill>
                   <a:srgbClr val="FFFFFF"/>
                 </a:solidFill>
@@ -1197,20 +1246,20 @@
               </a:rPr>
               <a:t>Smart Waste Management</a:t>
             </a:r>
-            <a:endParaRPr lang="en-US" sz="3400" dirty="0"/>
-          </a:p>
-        </p:txBody>
-      </p:sp>
-      <p:sp>
-        <p:nvSpPr>
-          <p:cNvPr id="4" name="Text 2"/>
-          <p:cNvSpPr/>
-          <p:nvPr/>
-        </p:nvSpPr>
-        <p:spPr>
-          <a:xfrm>
-            <a:off x="521208" y="5394960"/>
-            <a:ext cx="3840480" cy="731520"/>
+            <a:endParaRPr lang="en-US" sz="3600" dirty="0"/>
+          </a:p>
+        </p:txBody>
+      </p:sp>
+      <p:sp>
+        <p:nvSpPr>
+          <p:cNvPr id="5" name="Text 3"/>
+          <p:cNvSpPr/>
+          <p:nvPr/>
+        </p:nvSpPr>
+        <p:spPr>
+          <a:xfrm>
+            <a:off x="1481328" y="3703320"/>
+            <a:ext cx="9144000" cy="457200"/>
           </a:xfrm>
           <a:prstGeom prst="rect">
             <a:avLst/>
@@ -1228,7 +1277,7 @@
             <a:r>
               <a:rPr lang="en-US" sz="1500" dirty="0">
                 <a:solidFill>
-                  <a:srgbClr val="D2E6CE"/>
+                  <a:srgbClr val="5E9A62"/>
                 </a:solidFill>
                 <a:latin typeface="Calibri" pitchFamily="34" charset="0"/>
                 <a:ea typeface="Calibri" pitchFamily="34" charset="-122"/>
@@ -1242,56 +1291,14 @@
       </p:sp>
       <p:sp>
         <p:nvSpPr>
-          <p:cNvPr id="5" name="Text 3"/>
-          <p:cNvSpPr/>
-          <p:nvPr/>
-        </p:nvSpPr>
-        <p:spPr>
-          <a:xfrm>
-            <a:off x="5120640" y="1371600"/>
-            <a:ext cx="6492240" cy="2011680"/>
-          </a:xfrm>
-          <a:prstGeom prst="rect">
-            <a:avLst/>
-          </a:prstGeom>
-          <a:noFill/>
-          <a:ln/>
-        </p:spPr>
-        <p:txBody>
-          <a:bodyPr wrap="square" rtlCol="0" anchor="ctr"/>
-          <a:lstStyle/>
-          <a:p>
-            <a:pPr indent="0" marL="0">
-              <a:lnSpc>
-                <a:spcPct val="112000"/>
-              </a:lnSpc>
-              <a:buNone/>
-            </a:pPr>
-            <a:r>
-              <a:rPr lang="en-US" sz="2000" dirty="0">
-                <a:solidFill>
-                  <a:srgbClr val="D2E6CE"/>
-                </a:solidFill>
-                <a:latin typeface="Calibri" pitchFamily="34" charset="0"/>
-                <a:ea typeface="Calibri" pitchFamily="34" charset="-122"/>
-                <a:cs typeface="Calibri" pitchFamily="34" charset="-120"/>
-              </a:rPr>
-              <a:t>Municipal collection runs on a fixed calendar, not on what is inside each bin — trucks roll to bins that are not yet full, while overflow, fire or gas build-up stays invisible until the next visit.</a:t>
-            </a:r>
-            <a:endParaRPr lang="en-US" sz="2000" dirty="0"/>
-          </a:p>
-        </p:txBody>
-      </p:sp>
-      <p:sp>
-        <p:nvSpPr>
           <p:cNvPr id="6" name="Shape 4"/>
           <p:cNvSpPr/>
           <p:nvPr/>
         </p:nvSpPr>
         <p:spPr>
           <a:xfrm>
-            <a:off x="5120640" y="4023360"/>
-            <a:ext cx="2926080" cy="566928"/>
+            <a:off x="1097280" y="4709160"/>
+            <a:ext cx="2651760" cy="566928"/>
           </a:xfrm>
           <a:prstGeom prst="roundRect">
             <a:avLst>
@@ -1317,8 +1324,8 @@
         </p:nvSpPr>
         <p:spPr>
           <a:xfrm>
-            <a:off x="5120640" y="4023360"/>
-            <a:ext cx="2926080" cy="566928"/>
+            <a:off x="1097280" y="4709160"/>
+            <a:ext cx="2651760" cy="566928"/>
           </a:xfrm>
           <a:prstGeom prst="rect">
             <a:avLst/>
@@ -1356,8 +1363,8 @@
         </p:nvSpPr>
         <p:spPr>
           <a:xfrm>
-            <a:off x="5120640" y="4709160"/>
-            <a:ext cx="2926080" cy="566928"/>
+            <a:off x="3977640" y="4709160"/>
+            <a:ext cx="2651760" cy="566928"/>
           </a:xfrm>
           <a:prstGeom prst="roundRect">
             <a:avLst>
@@ -1383,8 +1390,8 @@
         </p:nvSpPr>
         <p:spPr>
           <a:xfrm>
-            <a:off x="5120640" y="4709160"/>
-            <a:ext cx="2926080" cy="566928"/>
+            <a:off x="3977640" y="4709160"/>
+            <a:ext cx="2651760" cy="566928"/>
           </a:xfrm>
           <a:prstGeom prst="rect">
             <a:avLst/>
@@ -1422,8 +1429,8 @@
         </p:nvSpPr>
         <p:spPr>
           <a:xfrm>
-            <a:off x="5120640" y="5394960"/>
-            <a:ext cx="2926080" cy="566928"/>
+            <a:off x="6858000" y="4709160"/>
+            <a:ext cx="2651760" cy="566928"/>
           </a:xfrm>
           <a:prstGeom prst="roundRect">
             <a:avLst>
@@ -1449,8 +1456,8 @@
         </p:nvSpPr>
         <p:spPr>
           <a:xfrm>
-            <a:off x="5120640" y="5394960"/>
-            <a:ext cx="2926080" cy="566928"/>
+            <a:off x="6858000" y="4709160"/>
+            <a:ext cx="2651760" cy="566928"/>
           </a:xfrm>
           <a:prstGeom prst="rect">
             <a:avLst/>
@@ -1488,8 +1495,8 @@
         </p:nvSpPr>
         <p:spPr>
           <a:xfrm>
-            <a:off x="5120640" y="6172200"/>
-            <a:ext cx="6400800" cy="365760"/>
+            <a:off x="658368" y="6355080"/>
+            <a:ext cx="10972800" cy="320040"/>
           </a:xfrm>
           <a:prstGeom prst="rect">
             <a:avLst/>
@@ -1598,12 +1605,12 @@
         </p:nvSpPr>
         <p:spPr>
           <a:xfrm>
-            <a:off x="640080" y="2468880"/>
-            <a:ext cx="1572768" cy="1371600"/>
+            <a:off x="640080" y="1874520"/>
+            <a:ext cx="2286000" cy="1280160"/>
           </a:xfrm>
           <a:prstGeom prst="roundRect">
             <a:avLst>
-              <a:gd name="adj" fmla="val 6667"/>
+              <a:gd name="adj" fmla="val 7143"/>
             </a:avLst>
           </a:prstGeom>
           <a:solidFill>
@@ -1625,7 +1632,7 @@
         </p:nvSpPr>
         <p:spPr>
           <a:xfrm>
-            <a:off x="1335024" y="2633472"/>
+            <a:off x="1691640" y="2039112"/>
             <a:ext cx="182880" cy="182880"/>
           </a:xfrm>
           <a:prstGeom prst="ellipse">
@@ -1645,8 +1652,8 @@
         </p:nvSpPr>
         <p:spPr>
           <a:xfrm>
-            <a:off x="612648" y="2852928"/>
-            <a:ext cx="1627632" cy="365760"/>
+            <a:off x="612648" y="2258568"/>
+            <a:ext cx="2340864" cy="365760"/>
           </a:xfrm>
           <a:prstGeom prst="rect">
             <a:avLst/>
@@ -1684,8 +1691,8 @@
         </p:nvSpPr>
         <p:spPr>
           <a:xfrm>
-            <a:off x="640080" y="3200400"/>
-            <a:ext cx="1572768" cy="411480"/>
+            <a:off x="640080" y="2606040"/>
+            <a:ext cx="2286000" cy="411480"/>
           </a:xfrm>
           <a:prstGeom prst="rect">
             <a:avLst/>
@@ -1723,8 +1730,733 @@
         </p:nvSpPr>
         <p:spPr>
           <a:xfrm>
-            <a:off x="2231136" y="3154680"/>
-            <a:ext cx="258409" cy="0"/>
+            <a:off x="2944368" y="2514600"/>
+            <a:ext cx="1975104" cy="0"/>
+          </a:xfrm>
+          <a:prstGeom prst="line">
+            <a:avLst/>
+          </a:prstGeom>
+          <a:noFill/>
+          <a:ln w="25400">
+            <a:solidFill>
+              <a:srgbClr val="5E9A62"/>
+            </a:solidFill>
+            <a:prstDash val="solid"/>
+            <a:headEnd type="none"/>
+            <a:tailEnd type="triangle"/>
+          </a:ln>
+        </p:spPr>
+      </p:sp>
+      <p:sp>
+        <p:nvSpPr>
+          <p:cNvPr id="8" name="Shape 6"/>
+          <p:cNvSpPr/>
+          <p:nvPr/>
+        </p:nvSpPr>
+        <p:spPr>
+          <a:xfrm>
+            <a:off x="4937760" y="1874520"/>
+            <a:ext cx="2286000" cy="1280160"/>
+          </a:xfrm>
+          <a:prstGeom prst="roundRect">
+            <a:avLst>
+              <a:gd name="adj" fmla="val 7143"/>
+            </a:avLst>
+          </a:prstGeom>
+          <a:solidFill>
+            <a:srgbClr val="EEF4EC"/>
+          </a:solidFill>
+          <a:ln w="19050">
+            <a:solidFill>
+              <a:srgbClr val="5E9A62"/>
+            </a:solidFill>
+            <a:prstDash val="solid"/>
+          </a:ln>
+        </p:spPr>
+      </p:sp>
+      <p:sp>
+        <p:nvSpPr>
+          <p:cNvPr id="9" name="Shape 7"/>
+          <p:cNvSpPr/>
+          <p:nvPr/>
+        </p:nvSpPr>
+        <p:spPr>
+          <a:xfrm>
+            <a:off x="5989320" y="2039112"/>
+            <a:ext cx="182880" cy="182880"/>
+          </a:xfrm>
+          <a:prstGeom prst="ellipse">
+            <a:avLst/>
+          </a:prstGeom>
+          <a:solidFill>
+            <a:srgbClr val="5E9A62"/>
+          </a:solidFill>
+          <a:ln/>
+        </p:spPr>
+      </p:sp>
+      <p:sp>
+        <p:nvSpPr>
+          <p:cNvPr id="10" name="Text 8"/>
+          <p:cNvSpPr/>
+          <p:nvPr/>
+        </p:nvSpPr>
+        <p:spPr>
+          <a:xfrm>
+            <a:off x="4910328" y="2258568"/>
+            <a:ext cx="2340864" cy="365760"/>
+          </a:xfrm>
+          <a:prstGeom prst="rect">
+            <a:avLst/>
+          </a:prstGeom>
+          <a:noFill/>
+          <a:ln/>
+        </p:spPr>
+        <p:txBody>
+          <a:bodyPr wrap="square" lIns="0" tIns="0" rIns="0" bIns="0" rtlCol="0" anchor="ctr"/>
+          <a:lstStyle/>
+          <a:p>
+            <a:pPr algn="ctr" indent="0" marL="0">
+              <a:buNone/>
+            </a:pPr>
+            <a:r>
+              <a:rPr lang="en-US" sz="1450" b="1" dirty="0">
+                <a:solidFill>
+                  <a:srgbClr val="152619"/>
+                </a:solidFill>
+                <a:latin typeface="Calibri" pitchFamily="34" charset="0"/>
+                <a:ea typeface="Calibri" pitchFamily="34" charset="-122"/>
+                <a:cs typeface="Calibri" pitchFamily="34" charset="-120"/>
+              </a:rPr>
+              <a:t>Fog node (EC2)</a:t>
+            </a:r>
+            <a:endParaRPr lang="en-US" sz="1450" dirty="0"/>
+          </a:p>
+        </p:txBody>
+      </p:sp>
+      <p:sp>
+        <p:nvSpPr>
+          <p:cNvPr id="11" name="Text 9"/>
+          <p:cNvSpPr/>
+          <p:nvPr/>
+        </p:nvSpPr>
+        <p:spPr>
+          <a:xfrm>
+            <a:off x="4937760" y="2606040"/>
+            <a:ext cx="2286000" cy="411480"/>
+          </a:xfrm>
+          <a:prstGeom prst="rect">
+            <a:avLst/>
+          </a:prstGeom>
+          <a:noFill/>
+          <a:ln/>
+        </p:spPr>
+        <p:txBody>
+          <a:bodyPr wrap="square" lIns="0" tIns="0" rIns="0" bIns="0" rtlCol="0" anchor="t"/>
+          <a:lstStyle/>
+          <a:p>
+            <a:pPr algn="ctr" indent="0" marL="0">
+              <a:buNone/>
+            </a:pPr>
+            <a:r>
+              <a:rPr lang="en-US" sz="1050" dirty="0">
+                <a:solidFill>
+                  <a:srgbClr val="5C6E58"/>
+                </a:solidFill>
+                <a:latin typeface="Calibri" pitchFamily="34" charset="0"/>
+                <a:ea typeface="Calibri" pitchFamily="34" charset="-122"/>
+                <a:cs typeface="Calibri" pitchFamily="34" charset="-120"/>
+              </a:rPr>
+              <a:t>windows · hazard alerts</a:t>
+            </a:r>
+            <a:endParaRPr lang="en-US" sz="1050" dirty="0"/>
+          </a:p>
+        </p:txBody>
+      </p:sp>
+      <p:sp>
+        <p:nvSpPr>
+          <p:cNvPr id="12" name="Shape 10"/>
+          <p:cNvSpPr/>
+          <p:nvPr/>
+        </p:nvSpPr>
+        <p:spPr>
+          <a:xfrm>
+            <a:off x="7242048" y="2514600"/>
+            <a:ext cx="1975104" cy="0"/>
+          </a:xfrm>
+          <a:prstGeom prst="line">
+            <a:avLst/>
+          </a:prstGeom>
+          <a:noFill/>
+          <a:ln w="25400">
+            <a:solidFill>
+              <a:srgbClr val="5E9A62"/>
+            </a:solidFill>
+            <a:prstDash val="solid"/>
+            <a:headEnd type="none"/>
+            <a:tailEnd type="triangle"/>
+          </a:ln>
+        </p:spPr>
+      </p:sp>
+      <p:sp>
+        <p:nvSpPr>
+          <p:cNvPr id="13" name="Shape 11"/>
+          <p:cNvSpPr/>
+          <p:nvPr/>
+        </p:nvSpPr>
+        <p:spPr>
+          <a:xfrm>
+            <a:off x="9235440" y="1874520"/>
+            <a:ext cx="2286000" cy="1280160"/>
+          </a:xfrm>
+          <a:prstGeom prst="roundRect">
+            <a:avLst>
+              <a:gd name="adj" fmla="val 7143"/>
+            </a:avLst>
+          </a:prstGeom>
+          <a:solidFill>
+            <a:srgbClr val="EEF4EC"/>
+          </a:solidFill>
+          <a:ln w="19050">
+            <a:solidFill>
+              <a:srgbClr val="1E6B34"/>
+            </a:solidFill>
+            <a:prstDash val="solid"/>
+          </a:ln>
+        </p:spPr>
+      </p:sp>
+      <p:sp>
+        <p:nvSpPr>
+          <p:cNvPr id="14" name="Shape 12"/>
+          <p:cNvSpPr/>
+          <p:nvPr/>
+        </p:nvSpPr>
+        <p:spPr>
+          <a:xfrm>
+            <a:off x="10287000" y="2039112"/>
+            <a:ext cx="182880" cy="182880"/>
+          </a:xfrm>
+          <a:prstGeom prst="ellipse">
+            <a:avLst/>
+          </a:prstGeom>
+          <a:solidFill>
+            <a:srgbClr val="1E6B34"/>
+          </a:solidFill>
+          <a:ln/>
+        </p:spPr>
+      </p:sp>
+      <p:sp>
+        <p:nvSpPr>
+          <p:cNvPr id="15" name="Text 13"/>
+          <p:cNvSpPr/>
+          <p:nvPr/>
+        </p:nvSpPr>
+        <p:spPr>
+          <a:xfrm>
+            <a:off x="9208008" y="2258568"/>
+            <a:ext cx="2340864" cy="365760"/>
+          </a:xfrm>
+          <a:prstGeom prst="rect">
+            <a:avLst/>
+          </a:prstGeom>
+          <a:noFill/>
+          <a:ln/>
+        </p:spPr>
+        <p:txBody>
+          <a:bodyPr wrap="square" lIns="0" tIns="0" rIns="0" bIns="0" rtlCol="0" anchor="ctr"/>
+          <a:lstStyle/>
+          <a:p>
+            <a:pPr algn="ctr" indent="0" marL="0">
+              <a:buNone/>
+            </a:pPr>
+            <a:r>
+              <a:rPr lang="en-US" sz="1450" b="1" dirty="0">
+                <a:solidFill>
+                  <a:srgbClr val="152619"/>
+                </a:solidFill>
+                <a:latin typeface="Calibri" pitchFamily="34" charset="0"/>
+                <a:ea typeface="Calibri" pitchFamily="34" charset="-122"/>
+                <a:cs typeface="Calibri" pitchFamily="34" charset="-120"/>
+              </a:rPr>
+              <a:t>Amazon SQS</a:t>
+            </a:r>
+            <a:endParaRPr lang="en-US" sz="1450" dirty="0"/>
+          </a:p>
+        </p:txBody>
+      </p:sp>
+      <p:sp>
+        <p:nvSpPr>
+          <p:cNvPr id="16" name="Text 14"/>
+          <p:cNvSpPr/>
+          <p:nvPr/>
+        </p:nvSpPr>
+        <p:spPr>
+          <a:xfrm>
+            <a:off x="9235440" y="2606040"/>
+            <a:ext cx="2286000" cy="411480"/>
+          </a:xfrm>
+          <a:prstGeom prst="rect">
+            <a:avLst/>
+          </a:prstGeom>
+          <a:noFill/>
+          <a:ln/>
+        </p:spPr>
+        <p:txBody>
+          <a:bodyPr wrap="square" lIns="0" tIns="0" rIns="0" bIns="0" rtlCol="0" anchor="t"/>
+          <a:lstStyle/>
+          <a:p>
+            <a:pPr algn="ctr" indent="0" marL="0">
+              <a:buNone/>
+            </a:pPr>
+            <a:r>
+              <a:rPr lang="en-US" sz="1050" dirty="0">
+                <a:solidFill>
+                  <a:srgbClr val="5C6E58"/>
+                </a:solidFill>
+                <a:latin typeface="Calibri" pitchFamily="34" charset="0"/>
+                <a:ea typeface="Calibri" pitchFamily="34" charset="-122"/>
+                <a:cs typeface="Calibri" pitchFamily="34" charset="-120"/>
+              </a:rPr>
+              <a:t>1 summary / window</a:t>
+            </a:r>
+            <a:endParaRPr lang="en-US" sz="1050" dirty="0"/>
+          </a:p>
+        </p:txBody>
+      </p:sp>
+      <p:sp>
+        <p:nvSpPr>
+          <p:cNvPr id="17" name="Shape 15"/>
+          <p:cNvSpPr/>
+          <p:nvPr/>
+        </p:nvSpPr>
+        <p:spPr>
+          <a:xfrm>
+            <a:off x="9235440" y="3520440"/>
+            <a:ext cx="2286000" cy="1280160"/>
+          </a:xfrm>
+          <a:prstGeom prst="roundRect">
+            <a:avLst>
+              <a:gd name="adj" fmla="val 7143"/>
+            </a:avLst>
+          </a:prstGeom>
+          <a:solidFill>
+            <a:srgbClr val="EEF4EC"/>
+          </a:solidFill>
+          <a:ln w="19050">
+            <a:solidFill>
+              <a:srgbClr val="1E6B34"/>
+            </a:solidFill>
+            <a:prstDash val="solid"/>
+          </a:ln>
+        </p:spPr>
+      </p:sp>
+      <p:sp>
+        <p:nvSpPr>
+          <p:cNvPr id="18" name="Shape 16"/>
+          <p:cNvSpPr/>
+          <p:nvPr/>
+        </p:nvSpPr>
+        <p:spPr>
+          <a:xfrm>
+            <a:off x="10287000" y="3685032"/>
+            <a:ext cx="182880" cy="182880"/>
+          </a:xfrm>
+          <a:prstGeom prst="ellipse">
+            <a:avLst/>
+          </a:prstGeom>
+          <a:solidFill>
+            <a:srgbClr val="1E6B34"/>
+          </a:solidFill>
+          <a:ln/>
+        </p:spPr>
+      </p:sp>
+      <p:sp>
+        <p:nvSpPr>
+          <p:cNvPr id="19" name="Text 17"/>
+          <p:cNvSpPr/>
+          <p:nvPr/>
+        </p:nvSpPr>
+        <p:spPr>
+          <a:xfrm>
+            <a:off x="9208008" y="3904488"/>
+            <a:ext cx="2340864" cy="365760"/>
+          </a:xfrm>
+          <a:prstGeom prst="rect">
+            <a:avLst/>
+          </a:prstGeom>
+          <a:noFill/>
+          <a:ln/>
+        </p:spPr>
+        <p:txBody>
+          <a:bodyPr wrap="square" lIns="0" tIns="0" rIns="0" bIns="0" rtlCol="0" anchor="ctr"/>
+          <a:lstStyle/>
+          <a:p>
+            <a:pPr algn="ctr" indent="0" marL="0">
+              <a:buNone/>
+            </a:pPr>
+            <a:r>
+              <a:rPr lang="en-US" sz="1450" b="1" dirty="0">
+                <a:solidFill>
+                  <a:srgbClr val="152619"/>
+                </a:solidFill>
+                <a:latin typeface="Calibri" pitchFamily="34" charset="0"/>
+                <a:ea typeface="Calibri" pitchFamily="34" charset="-122"/>
+                <a:cs typeface="Calibri" pitchFamily="34" charset="-120"/>
+              </a:rPr>
+              <a:t>AWS Lambda</a:t>
+            </a:r>
+            <a:endParaRPr lang="en-US" sz="1450" dirty="0"/>
+          </a:p>
+        </p:txBody>
+      </p:sp>
+      <p:sp>
+        <p:nvSpPr>
+          <p:cNvPr id="20" name="Text 18"/>
+          <p:cNvSpPr/>
+          <p:nvPr/>
+        </p:nvSpPr>
+        <p:spPr>
+          <a:xfrm>
+            <a:off x="9235440" y="4251960"/>
+            <a:ext cx="2286000" cy="411480"/>
+          </a:xfrm>
+          <a:prstGeom prst="rect">
+            <a:avLst/>
+          </a:prstGeom>
+          <a:noFill/>
+          <a:ln/>
+        </p:spPr>
+        <p:txBody>
+          <a:bodyPr wrap="square" lIns="0" tIns="0" rIns="0" bIns="0" rtlCol="0" anchor="t"/>
+          <a:lstStyle/>
+          <a:p>
+            <a:pPr algn="ctr" indent="0" marL="0">
+              <a:buNone/>
+            </a:pPr>
+            <a:r>
+              <a:rPr lang="en-US" sz="1050" dirty="0">
+                <a:solidFill>
+                  <a:srgbClr val="5C6E58"/>
+                </a:solidFill>
+                <a:latin typeface="Calibri" pitchFamily="34" charset="0"/>
+                <a:ea typeface="Calibri" pitchFamily="34" charset="-122"/>
+                <a:cs typeface="Calibri" pitchFamily="34" charset="-120"/>
+              </a:rPr>
+              <a:t>java17 ingest</a:t>
+            </a:r>
+            <a:endParaRPr lang="en-US" sz="1050" dirty="0"/>
+          </a:p>
+        </p:txBody>
+      </p:sp>
+      <p:sp>
+        <p:nvSpPr>
+          <p:cNvPr id="21" name="Shape 19"/>
+          <p:cNvSpPr/>
+          <p:nvPr/>
+        </p:nvSpPr>
+        <p:spPr>
+          <a:xfrm>
+            <a:off x="7242048" y="4160520"/>
+            <a:ext cx="1975104" cy="0"/>
+          </a:xfrm>
+          <a:prstGeom prst="line">
+            <a:avLst/>
+          </a:prstGeom>
+          <a:noFill/>
+          <a:ln w="25400">
+            <a:solidFill>
+              <a:srgbClr val="5E9A62"/>
+            </a:solidFill>
+            <a:prstDash val="solid"/>
+            <a:headEnd type="triangle"/>
+            <a:tailEnd type="oval"/>
+          </a:ln>
+        </p:spPr>
+      </p:sp>
+      <p:sp>
+        <p:nvSpPr>
+          <p:cNvPr id="22" name="Shape 20"/>
+          <p:cNvSpPr/>
+          <p:nvPr/>
+        </p:nvSpPr>
+        <p:spPr>
+          <a:xfrm>
+            <a:off x="4937760" y="3520440"/>
+            <a:ext cx="2286000" cy="1280160"/>
+          </a:xfrm>
+          <a:prstGeom prst="roundRect">
+            <a:avLst>
+              <a:gd name="adj" fmla="val 7143"/>
+            </a:avLst>
+          </a:prstGeom>
+          <a:solidFill>
+            <a:srgbClr val="EEF4EC"/>
+          </a:solidFill>
+          <a:ln w="19050">
+            <a:solidFill>
+              <a:srgbClr val="1E6B34"/>
+            </a:solidFill>
+            <a:prstDash val="solid"/>
+          </a:ln>
+        </p:spPr>
+      </p:sp>
+      <p:sp>
+        <p:nvSpPr>
+          <p:cNvPr id="23" name="Shape 21"/>
+          <p:cNvSpPr/>
+          <p:nvPr/>
+        </p:nvSpPr>
+        <p:spPr>
+          <a:xfrm>
+            <a:off x="5989320" y="3685032"/>
+            <a:ext cx="182880" cy="182880"/>
+          </a:xfrm>
+          <a:prstGeom prst="ellipse">
+            <a:avLst/>
+          </a:prstGeom>
+          <a:solidFill>
+            <a:srgbClr val="1E6B34"/>
+          </a:solidFill>
+          <a:ln/>
+        </p:spPr>
+      </p:sp>
+      <p:sp>
+        <p:nvSpPr>
+          <p:cNvPr id="24" name="Text 22"/>
+          <p:cNvSpPr/>
+          <p:nvPr/>
+        </p:nvSpPr>
+        <p:spPr>
+          <a:xfrm>
+            <a:off x="4910328" y="3904488"/>
+            <a:ext cx="2340864" cy="365760"/>
+          </a:xfrm>
+          <a:prstGeom prst="rect">
+            <a:avLst/>
+          </a:prstGeom>
+          <a:noFill/>
+          <a:ln/>
+        </p:spPr>
+        <p:txBody>
+          <a:bodyPr wrap="square" lIns="0" tIns="0" rIns="0" bIns="0" rtlCol="0" anchor="ctr"/>
+          <a:lstStyle/>
+          <a:p>
+            <a:pPr algn="ctr" indent="0" marL="0">
+              <a:buNone/>
+            </a:pPr>
+            <a:r>
+              <a:rPr lang="en-US" sz="1450" b="1" dirty="0">
+                <a:solidFill>
+                  <a:srgbClr val="152619"/>
+                </a:solidFill>
+                <a:latin typeface="Calibri" pitchFamily="34" charset="0"/>
+                <a:ea typeface="Calibri" pitchFamily="34" charset="-122"/>
+                <a:cs typeface="Calibri" pitchFamily="34" charset="-120"/>
+              </a:rPr>
+              <a:t>DynamoDB</a:t>
+            </a:r>
+            <a:endParaRPr lang="en-US" sz="1450" dirty="0"/>
+          </a:p>
+        </p:txBody>
+      </p:sp>
+      <p:sp>
+        <p:nvSpPr>
+          <p:cNvPr id="25" name="Text 23"/>
+          <p:cNvSpPr/>
+          <p:nvPr/>
+        </p:nvSpPr>
+        <p:spPr>
+          <a:xfrm>
+            <a:off x="4937760" y="4251960"/>
+            <a:ext cx="2286000" cy="411480"/>
+          </a:xfrm>
+          <a:prstGeom prst="rect">
+            <a:avLst/>
+          </a:prstGeom>
+          <a:noFill/>
+          <a:ln/>
+        </p:spPr>
+        <p:txBody>
+          <a:bodyPr wrap="square" lIns="0" tIns="0" rIns="0" bIns="0" rtlCol="0" anchor="t"/>
+          <a:lstStyle/>
+          <a:p>
+            <a:pPr algn="ctr" indent="0" marL="0">
+              <a:buNone/>
+            </a:pPr>
+            <a:r>
+              <a:rPr lang="en-US" sz="1050" dirty="0">
+                <a:solidFill>
+                  <a:srgbClr val="5C6E58"/>
+                </a:solidFill>
+                <a:latin typeface="Calibri" pitchFamily="34" charset="0"/>
+                <a:ea typeface="Calibri" pitchFamily="34" charset="-122"/>
+                <a:cs typeface="Calibri" pitchFamily="34" charset="-120"/>
+              </a:rPr>
+              <a:t>by type · time · district</a:t>
+            </a:r>
+            <a:endParaRPr lang="en-US" sz="1050" dirty="0"/>
+          </a:p>
+        </p:txBody>
+      </p:sp>
+      <p:sp>
+        <p:nvSpPr>
+          <p:cNvPr id="26" name="Shape 24"/>
+          <p:cNvSpPr/>
+          <p:nvPr/>
+        </p:nvSpPr>
+        <p:spPr>
+          <a:xfrm>
+            <a:off x="2944368" y="4160520"/>
+            <a:ext cx="1975104" cy="0"/>
+          </a:xfrm>
+          <a:prstGeom prst="line">
+            <a:avLst/>
+          </a:prstGeom>
+          <a:noFill/>
+          <a:ln w="25400">
+            <a:solidFill>
+              <a:srgbClr val="5E9A62"/>
+            </a:solidFill>
+            <a:prstDash val="solid"/>
+            <a:headEnd type="triangle"/>
+            <a:tailEnd type="oval"/>
+          </a:ln>
+        </p:spPr>
+      </p:sp>
+      <p:sp>
+        <p:nvSpPr>
+          <p:cNvPr id="27" name="Shape 25"/>
+          <p:cNvSpPr/>
+          <p:nvPr/>
+        </p:nvSpPr>
+        <p:spPr>
+          <a:xfrm>
+            <a:off x="640080" y="3520440"/>
+            <a:ext cx="2286000" cy="1280160"/>
+          </a:xfrm>
+          <a:prstGeom prst="roundRect">
+            <a:avLst>
+              <a:gd name="adj" fmla="val 7143"/>
+            </a:avLst>
+          </a:prstGeom>
+          <a:solidFill>
+            <a:srgbClr val="EEF4EC"/>
+          </a:solidFill>
+          <a:ln w="19050">
+            <a:solidFill>
+              <a:srgbClr val="2E8C46"/>
+            </a:solidFill>
+            <a:prstDash val="solid"/>
+          </a:ln>
+        </p:spPr>
+      </p:sp>
+      <p:sp>
+        <p:nvSpPr>
+          <p:cNvPr id="28" name="Shape 26"/>
+          <p:cNvSpPr/>
+          <p:nvPr/>
+        </p:nvSpPr>
+        <p:spPr>
+          <a:xfrm>
+            <a:off x="1691640" y="3685032"/>
+            <a:ext cx="182880" cy="182880"/>
+          </a:xfrm>
+          <a:prstGeom prst="ellipse">
+            <a:avLst/>
+          </a:prstGeom>
+          <a:solidFill>
+            <a:srgbClr val="2E8C46"/>
+          </a:solidFill>
+          <a:ln/>
+        </p:spPr>
+      </p:sp>
+      <p:sp>
+        <p:nvSpPr>
+          <p:cNvPr id="29" name="Text 27"/>
+          <p:cNvSpPr/>
+          <p:nvPr/>
+        </p:nvSpPr>
+        <p:spPr>
+          <a:xfrm>
+            <a:off x="612648" y="3904488"/>
+            <a:ext cx="2340864" cy="365760"/>
+          </a:xfrm>
+          <a:prstGeom prst="rect">
+            <a:avLst/>
+          </a:prstGeom>
+          <a:noFill/>
+          <a:ln/>
+        </p:spPr>
+        <p:txBody>
+          <a:bodyPr wrap="square" lIns="0" tIns="0" rIns="0" bIns="0" rtlCol="0" anchor="ctr"/>
+          <a:lstStyle/>
+          <a:p>
+            <a:pPr algn="ctr" indent="0" marL="0">
+              <a:buNone/>
+            </a:pPr>
+            <a:r>
+              <a:rPr lang="en-US" sz="1450" b="1" dirty="0">
+                <a:solidFill>
+                  <a:srgbClr val="152619"/>
+                </a:solidFill>
+                <a:latin typeface="Calibri" pitchFamily="34" charset="0"/>
+                <a:ea typeface="Calibri" pitchFamily="34" charset="-122"/>
+                <a:cs typeface="Calibri" pitchFamily="34" charset="-120"/>
+              </a:rPr>
+              <a:t>API GW + S3</a:t>
+            </a:r>
+            <a:endParaRPr lang="en-US" sz="1450" dirty="0"/>
+          </a:p>
+        </p:txBody>
+      </p:sp>
+      <p:sp>
+        <p:nvSpPr>
+          <p:cNvPr id="30" name="Text 28"/>
+          <p:cNvSpPr/>
+          <p:nvPr/>
+        </p:nvSpPr>
+        <p:spPr>
+          <a:xfrm>
+            <a:off x="640080" y="4251960"/>
+            <a:ext cx="2286000" cy="411480"/>
+          </a:xfrm>
+          <a:prstGeom prst="rect">
+            <a:avLst/>
+          </a:prstGeom>
+          <a:noFill/>
+          <a:ln/>
+        </p:spPr>
+        <p:txBody>
+          <a:bodyPr wrap="square" lIns="0" tIns="0" rIns="0" bIns="0" rtlCol="0" anchor="t"/>
+          <a:lstStyle/>
+          <a:p>
+            <a:pPr algn="ctr" indent="0" marL="0">
+              <a:buNone/>
+            </a:pPr>
+            <a:r>
+              <a:rPr lang="en-US" sz="1050" dirty="0">
+                <a:solidFill>
+                  <a:srgbClr val="5C6E58"/>
+                </a:solidFill>
+                <a:latin typeface="Calibri" pitchFamily="34" charset="0"/>
+                <a:ea typeface="Calibri" pitchFamily="34" charset="-122"/>
+                <a:cs typeface="Calibri" pitchFamily="34" charset="-120"/>
+              </a:rPr>
+              <a:t>live dashboard</a:t>
+            </a:r>
+            <a:endParaRPr lang="en-US" sz="1050" dirty="0"/>
+          </a:p>
+        </p:txBody>
+      </p:sp>
+      <p:sp>
+        <p:nvSpPr>
+          <p:cNvPr id="31" name="Shape 29"/>
+          <p:cNvSpPr/>
+          <p:nvPr/>
+        </p:nvSpPr>
+        <p:spPr>
+          <a:xfrm>
+            <a:off x="10378440" y="3154680"/>
+            <a:ext cx="0" cy="365760"/>
           </a:xfrm>
           <a:prstGeom prst="line">
             <a:avLst/>
@@ -1741,806 +2473,7 @@
       </p:sp>
       <p:sp>
         <p:nvSpPr>
-          <p:cNvPr id="8" name="Shape 6"/>
-          <p:cNvSpPr/>
-          <p:nvPr/>
-        </p:nvSpPr>
-        <p:spPr>
-          <a:xfrm>
-            <a:off x="2507833" y="2468880"/>
-            <a:ext cx="1572768" cy="1371600"/>
-          </a:xfrm>
-          <a:prstGeom prst="roundRect">
-            <a:avLst>
-              <a:gd name="adj" fmla="val 6667"/>
-            </a:avLst>
-          </a:prstGeom>
-          <a:solidFill>
-            <a:srgbClr val="EEF4EC"/>
-          </a:solidFill>
-          <a:ln w="19050">
-            <a:solidFill>
-              <a:srgbClr val="5E9A62"/>
-            </a:solidFill>
-            <a:prstDash val="solid"/>
-          </a:ln>
-        </p:spPr>
-      </p:sp>
-      <p:sp>
-        <p:nvSpPr>
-          <p:cNvPr id="9" name="Shape 7"/>
-          <p:cNvSpPr/>
-          <p:nvPr/>
-        </p:nvSpPr>
-        <p:spPr>
-          <a:xfrm>
-            <a:off x="3202777" y="2633472"/>
-            <a:ext cx="182880" cy="182880"/>
-          </a:xfrm>
-          <a:prstGeom prst="ellipse">
-            <a:avLst/>
-          </a:prstGeom>
-          <a:solidFill>
-            <a:srgbClr val="5E9A62"/>
-          </a:solidFill>
-          <a:ln/>
-        </p:spPr>
-      </p:sp>
-      <p:sp>
-        <p:nvSpPr>
-          <p:cNvPr id="10" name="Text 8"/>
-          <p:cNvSpPr/>
-          <p:nvPr/>
-        </p:nvSpPr>
-        <p:spPr>
-          <a:xfrm>
-            <a:off x="2480401" y="2852928"/>
-            <a:ext cx="1627632" cy="365760"/>
-          </a:xfrm>
-          <a:prstGeom prst="rect">
-            <a:avLst/>
-          </a:prstGeom>
-          <a:noFill/>
-          <a:ln/>
-        </p:spPr>
-        <p:txBody>
-          <a:bodyPr wrap="square" lIns="0" tIns="0" rIns="0" bIns="0" rtlCol="0" anchor="ctr"/>
-          <a:lstStyle/>
-          <a:p>
-            <a:pPr algn="ctr" indent="0" marL="0">
-              <a:buNone/>
-            </a:pPr>
-            <a:r>
-              <a:rPr lang="en-US" sz="1450" b="1" dirty="0">
-                <a:solidFill>
-                  <a:srgbClr val="152619"/>
-                </a:solidFill>
-                <a:latin typeface="Calibri" pitchFamily="34" charset="0"/>
-                <a:ea typeface="Calibri" pitchFamily="34" charset="-122"/>
-                <a:cs typeface="Calibri" pitchFamily="34" charset="-120"/>
-              </a:rPr>
-              <a:t>Fog node (EC2)</a:t>
-            </a:r>
-            <a:endParaRPr lang="en-US" sz="1450" dirty="0"/>
-          </a:p>
-        </p:txBody>
-      </p:sp>
-      <p:sp>
-        <p:nvSpPr>
-          <p:cNvPr id="11" name="Text 9"/>
-          <p:cNvSpPr/>
-          <p:nvPr/>
-        </p:nvSpPr>
-        <p:spPr>
-          <a:xfrm>
-            <a:off x="2507833" y="3200400"/>
-            <a:ext cx="1572768" cy="411480"/>
-          </a:xfrm>
-          <a:prstGeom prst="rect">
-            <a:avLst/>
-          </a:prstGeom>
-          <a:noFill/>
-          <a:ln/>
-        </p:spPr>
-        <p:txBody>
-          <a:bodyPr wrap="square" lIns="0" tIns="0" rIns="0" bIns="0" rtlCol="0" anchor="t"/>
-          <a:lstStyle/>
-          <a:p>
-            <a:pPr algn="ctr" indent="0" marL="0">
-              <a:buNone/>
-            </a:pPr>
-            <a:r>
-              <a:rPr lang="en-US" sz="1050" dirty="0">
-                <a:solidFill>
-                  <a:srgbClr val="5C6E58"/>
-                </a:solidFill>
-                <a:latin typeface="Calibri" pitchFamily="34" charset="0"/>
-                <a:ea typeface="Calibri" pitchFamily="34" charset="-122"/>
-                <a:cs typeface="Calibri" pitchFamily="34" charset="-120"/>
-              </a:rPr>
-              <a:t>windows · hazard alerts</a:t>
-            </a:r>
-            <a:endParaRPr lang="en-US" sz="1050" dirty="0"/>
-          </a:p>
-        </p:txBody>
-      </p:sp>
-      <p:sp>
-        <p:nvSpPr>
-          <p:cNvPr id="12" name="Shape 10"/>
-          <p:cNvSpPr/>
-          <p:nvPr/>
-        </p:nvSpPr>
-        <p:spPr>
-          <a:xfrm>
-            <a:off x="4098889" y="3154680"/>
-            <a:ext cx="258409" cy="0"/>
-          </a:xfrm>
-          <a:prstGeom prst="line">
-            <a:avLst/>
-          </a:prstGeom>
-          <a:noFill/>
-          <a:ln w="25400">
-            <a:solidFill>
-              <a:srgbClr val="5E9A62"/>
-            </a:solidFill>
-            <a:prstDash val="solid"/>
-            <a:tailEnd type="triangle"/>
-          </a:ln>
-        </p:spPr>
-      </p:sp>
-      <p:sp>
-        <p:nvSpPr>
-          <p:cNvPr id="13" name="Shape 11"/>
-          <p:cNvSpPr/>
-          <p:nvPr/>
-        </p:nvSpPr>
-        <p:spPr>
-          <a:xfrm>
-            <a:off x="4375587" y="2468880"/>
-            <a:ext cx="1572768" cy="1371600"/>
-          </a:xfrm>
-          <a:prstGeom prst="roundRect">
-            <a:avLst>
-              <a:gd name="adj" fmla="val 6667"/>
-            </a:avLst>
-          </a:prstGeom>
-          <a:solidFill>
-            <a:srgbClr val="EEF4EC"/>
-          </a:solidFill>
-          <a:ln w="19050">
-            <a:solidFill>
-              <a:srgbClr val="1E6B34"/>
-            </a:solidFill>
-            <a:prstDash val="solid"/>
-          </a:ln>
-        </p:spPr>
-      </p:sp>
-      <p:sp>
-        <p:nvSpPr>
-          <p:cNvPr id="14" name="Shape 12"/>
-          <p:cNvSpPr/>
-          <p:nvPr/>
-        </p:nvSpPr>
-        <p:spPr>
-          <a:xfrm>
-            <a:off x="5070531" y="2633472"/>
-            <a:ext cx="182880" cy="182880"/>
-          </a:xfrm>
-          <a:prstGeom prst="ellipse">
-            <a:avLst/>
-          </a:prstGeom>
-          <a:solidFill>
-            <a:srgbClr val="1E6B34"/>
-          </a:solidFill>
-          <a:ln/>
-        </p:spPr>
-      </p:sp>
-      <p:sp>
-        <p:nvSpPr>
-          <p:cNvPr id="15" name="Text 13"/>
-          <p:cNvSpPr/>
-          <p:nvPr/>
-        </p:nvSpPr>
-        <p:spPr>
-          <a:xfrm>
-            <a:off x="4348155" y="2852928"/>
-            <a:ext cx="1627632" cy="365760"/>
-          </a:xfrm>
-          <a:prstGeom prst="rect">
-            <a:avLst/>
-          </a:prstGeom>
-          <a:noFill/>
-          <a:ln/>
-        </p:spPr>
-        <p:txBody>
-          <a:bodyPr wrap="square" lIns="0" tIns="0" rIns="0" bIns="0" rtlCol="0" anchor="ctr"/>
-          <a:lstStyle/>
-          <a:p>
-            <a:pPr algn="ctr" indent="0" marL="0">
-              <a:buNone/>
-            </a:pPr>
-            <a:r>
-              <a:rPr lang="en-US" sz="1450" b="1" dirty="0">
-                <a:solidFill>
-                  <a:srgbClr val="152619"/>
-                </a:solidFill>
-                <a:latin typeface="Calibri" pitchFamily="34" charset="0"/>
-                <a:ea typeface="Calibri" pitchFamily="34" charset="-122"/>
-                <a:cs typeface="Calibri" pitchFamily="34" charset="-120"/>
-              </a:rPr>
-              <a:t>Amazon SQS</a:t>
-            </a:r>
-            <a:endParaRPr lang="en-US" sz="1450" dirty="0"/>
-          </a:p>
-        </p:txBody>
-      </p:sp>
-      <p:sp>
-        <p:nvSpPr>
-          <p:cNvPr id="16" name="Text 14"/>
-          <p:cNvSpPr/>
-          <p:nvPr/>
-        </p:nvSpPr>
-        <p:spPr>
-          <a:xfrm>
-            <a:off x="4375587" y="3200400"/>
-            <a:ext cx="1572768" cy="411480"/>
-          </a:xfrm>
-          <a:prstGeom prst="rect">
-            <a:avLst/>
-          </a:prstGeom>
-          <a:noFill/>
-          <a:ln/>
-        </p:spPr>
-        <p:txBody>
-          <a:bodyPr wrap="square" lIns="0" tIns="0" rIns="0" bIns="0" rtlCol="0" anchor="t"/>
-          <a:lstStyle/>
-          <a:p>
-            <a:pPr algn="ctr" indent="0" marL="0">
-              <a:buNone/>
-            </a:pPr>
-            <a:r>
-              <a:rPr lang="en-US" sz="1050" dirty="0">
-                <a:solidFill>
-                  <a:srgbClr val="5C6E58"/>
-                </a:solidFill>
-                <a:latin typeface="Calibri" pitchFamily="34" charset="0"/>
-                <a:ea typeface="Calibri" pitchFamily="34" charset="-122"/>
-                <a:cs typeface="Calibri" pitchFamily="34" charset="-120"/>
-              </a:rPr>
-              <a:t>1 summary / window</a:t>
-            </a:r>
-            <a:endParaRPr lang="en-US" sz="1050" dirty="0"/>
-          </a:p>
-        </p:txBody>
-      </p:sp>
-      <p:sp>
-        <p:nvSpPr>
-          <p:cNvPr id="17" name="Shape 15"/>
-          <p:cNvSpPr/>
-          <p:nvPr/>
-        </p:nvSpPr>
-        <p:spPr>
-          <a:xfrm>
-            <a:off x="5966643" y="3154680"/>
-            <a:ext cx="258409" cy="0"/>
-          </a:xfrm>
-          <a:prstGeom prst="line">
-            <a:avLst/>
-          </a:prstGeom>
-          <a:noFill/>
-          <a:ln w="25400">
-            <a:solidFill>
-              <a:srgbClr val="5E9A62"/>
-            </a:solidFill>
-            <a:prstDash val="solid"/>
-            <a:tailEnd type="triangle"/>
-          </a:ln>
-        </p:spPr>
-      </p:sp>
-      <p:sp>
-        <p:nvSpPr>
-          <p:cNvPr id="18" name="Shape 16"/>
-          <p:cNvSpPr/>
-          <p:nvPr/>
-        </p:nvSpPr>
-        <p:spPr>
-          <a:xfrm>
-            <a:off x="6243340" y="2468880"/>
-            <a:ext cx="1572768" cy="1371600"/>
-          </a:xfrm>
-          <a:prstGeom prst="roundRect">
-            <a:avLst>
-              <a:gd name="adj" fmla="val 6667"/>
-            </a:avLst>
-          </a:prstGeom>
-          <a:solidFill>
-            <a:srgbClr val="EEF4EC"/>
-          </a:solidFill>
-          <a:ln w="19050">
-            <a:solidFill>
-              <a:srgbClr val="1E6B34"/>
-            </a:solidFill>
-            <a:prstDash val="solid"/>
-          </a:ln>
-        </p:spPr>
-      </p:sp>
-      <p:sp>
-        <p:nvSpPr>
-          <p:cNvPr id="19" name="Shape 17"/>
-          <p:cNvSpPr/>
-          <p:nvPr/>
-        </p:nvSpPr>
-        <p:spPr>
-          <a:xfrm>
-            <a:off x="6938284" y="2633472"/>
-            <a:ext cx="182880" cy="182880"/>
-          </a:xfrm>
-          <a:prstGeom prst="ellipse">
-            <a:avLst/>
-          </a:prstGeom>
-          <a:solidFill>
-            <a:srgbClr val="1E6B34"/>
-          </a:solidFill>
-          <a:ln/>
-        </p:spPr>
-      </p:sp>
-      <p:sp>
-        <p:nvSpPr>
-          <p:cNvPr id="20" name="Text 18"/>
-          <p:cNvSpPr/>
-          <p:nvPr/>
-        </p:nvSpPr>
-        <p:spPr>
-          <a:xfrm>
-            <a:off x="6215908" y="2852928"/>
-            <a:ext cx="1627632" cy="365760"/>
-          </a:xfrm>
-          <a:prstGeom prst="rect">
-            <a:avLst/>
-          </a:prstGeom>
-          <a:noFill/>
-          <a:ln/>
-        </p:spPr>
-        <p:txBody>
-          <a:bodyPr wrap="square" lIns="0" tIns="0" rIns="0" bIns="0" rtlCol="0" anchor="ctr"/>
-          <a:lstStyle/>
-          <a:p>
-            <a:pPr algn="ctr" indent="0" marL="0">
-              <a:buNone/>
-            </a:pPr>
-            <a:r>
-              <a:rPr lang="en-US" sz="1450" b="1" dirty="0">
-                <a:solidFill>
-                  <a:srgbClr val="152619"/>
-                </a:solidFill>
-                <a:latin typeface="Calibri" pitchFamily="34" charset="0"/>
-                <a:ea typeface="Calibri" pitchFamily="34" charset="-122"/>
-                <a:cs typeface="Calibri" pitchFamily="34" charset="-120"/>
-              </a:rPr>
-              <a:t>AWS Lambda</a:t>
-            </a:r>
-            <a:endParaRPr lang="en-US" sz="1450" dirty="0"/>
-          </a:p>
-        </p:txBody>
-      </p:sp>
-      <p:sp>
-        <p:nvSpPr>
-          <p:cNvPr id="21" name="Text 19"/>
-          <p:cNvSpPr/>
-          <p:nvPr/>
-        </p:nvSpPr>
-        <p:spPr>
-          <a:xfrm>
-            <a:off x="6243340" y="3200400"/>
-            <a:ext cx="1572768" cy="411480"/>
-          </a:xfrm>
-          <a:prstGeom prst="rect">
-            <a:avLst/>
-          </a:prstGeom>
-          <a:noFill/>
-          <a:ln/>
-        </p:spPr>
-        <p:txBody>
-          <a:bodyPr wrap="square" lIns="0" tIns="0" rIns="0" bIns="0" rtlCol="0" anchor="t"/>
-          <a:lstStyle/>
-          <a:p>
-            <a:pPr algn="ctr" indent="0" marL="0">
-              <a:buNone/>
-            </a:pPr>
-            <a:r>
-              <a:rPr lang="en-US" sz="1050" dirty="0">
-                <a:solidFill>
-                  <a:srgbClr val="5C6E58"/>
-                </a:solidFill>
-                <a:latin typeface="Calibri" pitchFamily="34" charset="0"/>
-                <a:ea typeface="Calibri" pitchFamily="34" charset="-122"/>
-                <a:cs typeface="Calibri" pitchFamily="34" charset="-120"/>
-              </a:rPr>
-              <a:t>java17 ingest</a:t>
-            </a:r>
-            <a:endParaRPr lang="en-US" sz="1050" dirty="0"/>
-          </a:p>
-        </p:txBody>
-      </p:sp>
-      <p:sp>
-        <p:nvSpPr>
-          <p:cNvPr id="22" name="Shape 20"/>
-          <p:cNvSpPr/>
-          <p:nvPr/>
-        </p:nvSpPr>
-        <p:spPr>
-          <a:xfrm>
-            <a:off x="7834396" y="3154680"/>
-            <a:ext cx="258409" cy="0"/>
-          </a:xfrm>
-          <a:prstGeom prst="line">
-            <a:avLst/>
-          </a:prstGeom>
-          <a:noFill/>
-          <a:ln w="25400">
-            <a:solidFill>
-              <a:srgbClr val="5E9A62"/>
-            </a:solidFill>
-            <a:prstDash val="solid"/>
-            <a:tailEnd type="triangle"/>
-          </a:ln>
-        </p:spPr>
-      </p:sp>
-      <p:sp>
-        <p:nvSpPr>
-          <p:cNvPr id="23" name="Shape 21"/>
-          <p:cNvSpPr/>
-          <p:nvPr/>
-        </p:nvSpPr>
-        <p:spPr>
-          <a:xfrm>
-            <a:off x="8111094" y="2468880"/>
-            <a:ext cx="1572768" cy="1371600"/>
-          </a:xfrm>
-          <a:prstGeom prst="roundRect">
-            <a:avLst>
-              <a:gd name="adj" fmla="val 6667"/>
-            </a:avLst>
-          </a:prstGeom>
-          <a:solidFill>
-            <a:srgbClr val="EEF4EC"/>
-          </a:solidFill>
-          <a:ln w="19050">
-            <a:solidFill>
-              <a:srgbClr val="1E6B34"/>
-            </a:solidFill>
-            <a:prstDash val="solid"/>
-          </a:ln>
-        </p:spPr>
-      </p:sp>
-      <p:sp>
-        <p:nvSpPr>
-          <p:cNvPr id="24" name="Shape 22"/>
-          <p:cNvSpPr/>
-          <p:nvPr/>
-        </p:nvSpPr>
-        <p:spPr>
-          <a:xfrm>
-            <a:off x="8806038" y="2633472"/>
-            <a:ext cx="182880" cy="182880"/>
-          </a:xfrm>
-          <a:prstGeom prst="ellipse">
-            <a:avLst/>
-          </a:prstGeom>
-          <a:solidFill>
-            <a:srgbClr val="1E6B34"/>
-          </a:solidFill>
-          <a:ln/>
-        </p:spPr>
-      </p:sp>
-      <p:sp>
-        <p:nvSpPr>
-          <p:cNvPr id="25" name="Text 23"/>
-          <p:cNvSpPr/>
-          <p:nvPr/>
-        </p:nvSpPr>
-        <p:spPr>
-          <a:xfrm>
-            <a:off x="8083662" y="2852928"/>
-            <a:ext cx="1627632" cy="365760"/>
-          </a:xfrm>
-          <a:prstGeom prst="rect">
-            <a:avLst/>
-          </a:prstGeom>
-          <a:noFill/>
-          <a:ln/>
-        </p:spPr>
-        <p:txBody>
-          <a:bodyPr wrap="square" lIns="0" tIns="0" rIns="0" bIns="0" rtlCol="0" anchor="ctr"/>
-          <a:lstStyle/>
-          <a:p>
-            <a:pPr algn="ctr" indent="0" marL="0">
-              <a:buNone/>
-            </a:pPr>
-            <a:r>
-              <a:rPr lang="en-US" sz="1450" b="1" dirty="0">
-                <a:solidFill>
-                  <a:srgbClr val="152619"/>
-                </a:solidFill>
-                <a:latin typeface="Calibri" pitchFamily="34" charset="0"/>
-                <a:ea typeface="Calibri" pitchFamily="34" charset="-122"/>
-                <a:cs typeface="Calibri" pitchFamily="34" charset="-120"/>
-              </a:rPr>
-              <a:t>DynamoDB</a:t>
-            </a:r>
-            <a:endParaRPr lang="en-US" sz="1450" dirty="0"/>
-          </a:p>
-        </p:txBody>
-      </p:sp>
-      <p:sp>
-        <p:nvSpPr>
-          <p:cNvPr id="26" name="Text 24"/>
-          <p:cNvSpPr/>
-          <p:nvPr/>
-        </p:nvSpPr>
-        <p:spPr>
-          <a:xfrm>
-            <a:off x="8111094" y="3200400"/>
-            <a:ext cx="1572768" cy="411480"/>
-          </a:xfrm>
-          <a:prstGeom prst="rect">
-            <a:avLst/>
-          </a:prstGeom>
-          <a:noFill/>
-          <a:ln/>
-        </p:spPr>
-        <p:txBody>
-          <a:bodyPr wrap="square" lIns="0" tIns="0" rIns="0" bIns="0" rtlCol="0" anchor="t"/>
-          <a:lstStyle/>
-          <a:p>
-            <a:pPr algn="ctr" indent="0" marL="0">
-              <a:buNone/>
-            </a:pPr>
-            <a:r>
-              <a:rPr lang="en-US" sz="1050" dirty="0">
-                <a:solidFill>
-                  <a:srgbClr val="5C6E58"/>
-                </a:solidFill>
-                <a:latin typeface="Calibri" pitchFamily="34" charset="0"/>
-                <a:ea typeface="Calibri" pitchFamily="34" charset="-122"/>
-                <a:cs typeface="Calibri" pitchFamily="34" charset="-120"/>
-              </a:rPr>
-              <a:t>by type · time · district</a:t>
-            </a:r>
-            <a:endParaRPr lang="en-US" sz="1050" dirty="0"/>
-          </a:p>
-        </p:txBody>
-      </p:sp>
-      <p:sp>
-        <p:nvSpPr>
-          <p:cNvPr id="27" name="Shape 25"/>
-          <p:cNvSpPr/>
-          <p:nvPr/>
-        </p:nvSpPr>
-        <p:spPr>
-          <a:xfrm>
-            <a:off x="9702150" y="3154680"/>
-            <a:ext cx="258409" cy="0"/>
-          </a:xfrm>
-          <a:prstGeom prst="line">
-            <a:avLst/>
-          </a:prstGeom>
-          <a:noFill/>
-          <a:ln w="25400">
-            <a:solidFill>
-              <a:srgbClr val="5E9A62"/>
-            </a:solidFill>
-            <a:prstDash val="solid"/>
-            <a:tailEnd type="triangle"/>
-          </a:ln>
-        </p:spPr>
-      </p:sp>
-      <p:sp>
-        <p:nvSpPr>
-          <p:cNvPr id="28" name="Shape 26"/>
-          <p:cNvSpPr/>
-          <p:nvPr/>
-        </p:nvSpPr>
-        <p:spPr>
-          <a:xfrm>
-            <a:off x="9978847" y="2468880"/>
-            <a:ext cx="1572768" cy="1371600"/>
-          </a:xfrm>
-          <a:prstGeom prst="roundRect">
-            <a:avLst>
-              <a:gd name="adj" fmla="val 6667"/>
-            </a:avLst>
-          </a:prstGeom>
-          <a:solidFill>
-            <a:srgbClr val="EEF4EC"/>
-          </a:solidFill>
-          <a:ln w="19050">
-            <a:solidFill>
-              <a:srgbClr val="2E8C46"/>
-            </a:solidFill>
-            <a:prstDash val="solid"/>
-          </a:ln>
-        </p:spPr>
-      </p:sp>
-      <p:sp>
-        <p:nvSpPr>
-          <p:cNvPr id="29" name="Shape 27"/>
-          <p:cNvSpPr/>
-          <p:nvPr/>
-        </p:nvSpPr>
-        <p:spPr>
-          <a:xfrm>
-            <a:off x="10673791" y="2633472"/>
-            <a:ext cx="182880" cy="182880"/>
-          </a:xfrm>
-          <a:prstGeom prst="ellipse">
-            <a:avLst/>
-          </a:prstGeom>
-          <a:solidFill>
-            <a:srgbClr val="2E8C46"/>
-          </a:solidFill>
-          <a:ln/>
-        </p:spPr>
-      </p:sp>
-      <p:sp>
-        <p:nvSpPr>
-          <p:cNvPr id="30" name="Text 28"/>
-          <p:cNvSpPr/>
-          <p:nvPr/>
-        </p:nvSpPr>
-        <p:spPr>
-          <a:xfrm>
-            <a:off x="9951415" y="2852928"/>
-            <a:ext cx="1627632" cy="365760"/>
-          </a:xfrm>
-          <a:prstGeom prst="rect">
-            <a:avLst/>
-          </a:prstGeom>
-          <a:noFill/>
-          <a:ln/>
-        </p:spPr>
-        <p:txBody>
-          <a:bodyPr wrap="square" lIns="0" tIns="0" rIns="0" bIns="0" rtlCol="0" anchor="ctr"/>
-          <a:lstStyle/>
-          <a:p>
-            <a:pPr algn="ctr" indent="0" marL="0">
-              <a:buNone/>
-            </a:pPr>
-            <a:r>
-              <a:rPr lang="en-US" sz="1450" b="1" dirty="0">
-                <a:solidFill>
-                  <a:srgbClr val="152619"/>
-                </a:solidFill>
-                <a:latin typeface="Calibri" pitchFamily="34" charset="0"/>
-                <a:ea typeface="Calibri" pitchFamily="34" charset="-122"/>
-                <a:cs typeface="Calibri" pitchFamily="34" charset="-120"/>
-              </a:rPr>
-              <a:t>API GW + S3</a:t>
-            </a:r>
-            <a:endParaRPr lang="en-US" sz="1450" dirty="0"/>
-          </a:p>
-        </p:txBody>
-      </p:sp>
-      <p:sp>
-        <p:nvSpPr>
-          <p:cNvPr id="31" name="Text 29"/>
-          <p:cNvSpPr/>
-          <p:nvPr/>
-        </p:nvSpPr>
-        <p:spPr>
-          <a:xfrm>
-            <a:off x="9978847" y="3200400"/>
-            <a:ext cx="1572768" cy="411480"/>
-          </a:xfrm>
-          <a:prstGeom prst="rect">
-            <a:avLst/>
-          </a:prstGeom>
-          <a:noFill/>
-          <a:ln/>
-        </p:spPr>
-        <p:txBody>
-          <a:bodyPr wrap="square" lIns="0" tIns="0" rIns="0" bIns="0" rtlCol="0" anchor="t"/>
-          <a:lstStyle/>
-          <a:p>
-            <a:pPr algn="ctr" indent="0" marL="0">
-              <a:buNone/>
-            </a:pPr>
-            <a:r>
-              <a:rPr lang="en-US" sz="1050" dirty="0">
-                <a:solidFill>
-                  <a:srgbClr val="5C6E58"/>
-                </a:solidFill>
-                <a:latin typeface="Calibri" pitchFamily="34" charset="0"/>
-                <a:ea typeface="Calibri" pitchFamily="34" charset="-122"/>
-                <a:cs typeface="Calibri" pitchFamily="34" charset="-120"/>
-              </a:rPr>
-              <a:t>live dashboard</a:t>
-            </a:r>
-            <a:endParaRPr lang="en-US" sz="1050" dirty="0"/>
-          </a:p>
-        </p:txBody>
-      </p:sp>
-      <p:sp>
-        <p:nvSpPr>
           <p:cNvPr id="32" name="Text 30"/>
-          <p:cNvSpPr/>
-          <p:nvPr/>
-        </p:nvSpPr>
-        <p:spPr>
-          <a:xfrm>
-            <a:off x="640080" y="3977640"/>
-            <a:ext cx="3440521" cy="274320"/>
-          </a:xfrm>
-          <a:prstGeom prst="rect">
-            <a:avLst/>
-          </a:prstGeom>
-          <a:noFill/>
-          <a:ln/>
-        </p:spPr>
-        <p:txBody>
-          <a:bodyPr wrap="square" rtlCol="0" anchor="ctr"/>
-          <a:lstStyle/>
-          <a:p>
-            <a:pPr algn="ctr" indent="0" marL="0">
-              <a:buNone/>
-            </a:pPr>
-            <a:r>
-              <a:rPr lang="en-US" sz="1100" b="1" spc="200" kern="0" dirty="0">
-                <a:solidFill>
-                  <a:srgbClr val="5E9A62"/>
-                </a:solidFill>
-                <a:latin typeface="Calibri" pitchFamily="34" charset="0"/>
-                <a:ea typeface="Calibri" pitchFamily="34" charset="-122"/>
-                <a:cs typeface="Calibri" pitchFamily="34" charset="-120"/>
-              </a:rPr>
-              <a:t>EDGE</a:t>
-            </a:r>
-            <a:endParaRPr lang="en-US" sz="1100" dirty="0"/>
-          </a:p>
-        </p:txBody>
-      </p:sp>
-      <p:sp>
-        <p:nvSpPr>
-          <p:cNvPr id="33" name="Text 31"/>
-          <p:cNvSpPr/>
-          <p:nvPr/>
-        </p:nvSpPr>
-        <p:spPr>
-          <a:xfrm>
-            <a:off x="4375587" y="3977640"/>
-            <a:ext cx="7176028" cy="274320"/>
-          </a:xfrm>
-          <a:prstGeom prst="rect">
-            <a:avLst/>
-          </a:prstGeom>
-          <a:noFill/>
-          <a:ln/>
-        </p:spPr>
-        <p:txBody>
-          <a:bodyPr wrap="square" rtlCol="0" anchor="ctr"/>
-          <a:lstStyle/>
-          <a:p>
-            <a:pPr algn="ctr" indent="0" marL="0">
-              <a:buNone/>
-            </a:pPr>
-            <a:r>
-              <a:rPr lang="en-US" sz="1100" b="1" spc="200" kern="0" dirty="0">
-                <a:solidFill>
-                  <a:srgbClr val="1E6B34"/>
-                </a:solidFill>
-                <a:latin typeface="Calibri" pitchFamily="34" charset="0"/>
-                <a:ea typeface="Calibri" pitchFamily="34" charset="-122"/>
-                <a:cs typeface="Calibri" pitchFamily="34" charset="-120"/>
-              </a:rPr>
-              <a:t>CLOUD</a:t>
-            </a:r>
-            <a:endParaRPr lang="en-US" sz="1100" dirty="0"/>
-          </a:p>
-        </p:txBody>
-      </p:sp>
-      <p:sp>
-        <p:nvSpPr>
-          <p:cNvPr id="34" name="Text 32"/>
           <p:cNvSpPr/>
           <p:nvPr/>
         </p:nvSpPr>
@@ -3210,24 +3143,59 @@
       </p:sp>
       <p:sp>
         <p:nvSpPr>
-          <p:cNvPr id="3" name="Shape 1"/>
-          <p:cNvSpPr/>
-          <p:nvPr/>
-        </p:nvSpPr>
-        <p:spPr>
-          <a:xfrm>
-            <a:off x="731520" y="1920240"/>
-            <a:ext cx="10698480" cy="1965960"/>
-          </a:xfrm>
-          <a:prstGeom prst="roundRect">
-            <a:avLst>
-              <a:gd name="adj" fmla="val 4651"/>
-            </a:avLst>
-          </a:prstGeom>
-          <a:solidFill>
-            <a:srgbClr val="EEF4EC"/>
-          </a:solidFill>
-          <a:ln w="19050">
+          <p:cNvPr id="3" name="Text 1"/>
+          <p:cNvSpPr/>
+          <p:nvPr/>
+        </p:nvSpPr>
+        <p:spPr>
+          <a:xfrm>
+            <a:off x="731520" y="1965960"/>
+            <a:ext cx="2377440" cy="548640"/>
+          </a:xfrm>
+          <a:prstGeom prst="rect">
+            <a:avLst/>
+          </a:prstGeom>
+          <a:noFill/>
+          <a:ln/>
+        </p:spPr>
+        <p:txBody>
+          <a:bodyPr wrap="square" lIns="0" tIns="0" rIns="0" bIns="0" rtlCol="0" anchor="ctr"/>
+          <a:lstStyle/>
+          <a:p>
+            <a:pPr indent="0" marL="0">
+              <a:buNone/>
+            </a:pPr>
+            <a:r>
+              <a:rPr lang="en-US" sz="2300" b="1" dirty="0">
+                <a:solidFill>
+                  <a:srgbClr val="D9A62E"/>
+                </a:solidFill>
+                <a:latin typeface="Century Schoolbook" pitchFamily="34" charset="0"/>
+                <a:ea typeface="Century Schoolbook" pitchFamily="34" charset="-122"/>
+                <a:cs typeface="Century Schoolbook" pitchFamily="34" charset="-120"/>
+              </a:rPr>
+              <a:t>Problem</a:t>
+            </a:r>
+            <a:endParaRPr lang="en-US" sz="2300" dirty="0"/>
+          </a:p>
+        </p:txBody>
+      </p:sp>
+      <p:sp>
+        <p:nvSpPr>
+          <p:cNvPr id="4" name="Shape 2"/>
+          <p:cNvSpPr/>
+          <p:nvPr/>
+        </p:nvSpPr>
+        <p:spPr>
+          <a:xfrm>
+            <a:off x="3200400" y="1920240"/>
+            <a:ext cx="0" cy="1783080"/>
+          </a:xfrm>
+          <a:prstGeom prst="line">
+            <a:avLst/>
+          </a:prstGeom>
+          <a:noFill/>
+          <a:ln w="31750">
             <a:solidFill>
               <a:srgbClr val="D9A62E"/>
             </a:solidFill>
@@ -3237,14 +3205,14 @@
       </p:sp>
       <p:sp>
         <p:nvSpPr>
-          <p:cNvPr id="4" name="Text 2"/>
-          <p:cNvSpPr/>
-          <p:nvPr/>
-        </p:nvSpPr>
-        <p:spPr>
-          <a:xfrm>
-            <a:off x="1005840" y="2103120"/>
-            <a:ext cx="3657600" cy="457200"/>
+          <p:cNvPr id="5" name="Text 3"/>
+          <p:cNvSpPr/>
+          <p:nvPr/>
+        </p:nvSpPr>
+        <p:spPr>
+          <a:xfrm>
+            <a:off x="3474720" y="1920240"/>
+            <a:ext cx="7955280" cy="1920240"/>
           </a:xfrm>
           <a:prstGeom prst="rect">
             <a:avLst/>
@@ -3257,85 +3225,81 @@
           <a:lstStyle/>
           <a:p>
             <a:pPr indent="0" marL="0">
-              <a:buNone/>
-            </a:pPr>
-            <a:r>
-              <a:rPr lang="en-US" sz="1900" b="1" dirty="0">
-                <a:solidFill>
-                  <a:srgbClr val="D9A62E"/>
+              <a:lnSpc>
+                <a:spcPct val="112000"/>
+              </a:lnSpc>
+              <a:buNone/>
+            </a:pPr>
+            <a:r>
+              <a:rPr lang="en-US" sz="1450" dirty="0">
+                <a:solidFill>
+                  <a:srgbClr val="152619"/>
+                </a:solidFill>
+                <a:latin typeface="Calibri" pitchFamily="34" charset="0"/>
+                <a:ea typeface="Calibri" pitchFamily="34" charset="-122"/>
+                <a:cs typeface="Calibri" pitchFamily="34" charset="-120"/>
+              </a:rPr>
+              <a:t>On the first real deployment, every DynamoDB and SQS call failed authentication across fog, processor and dashboard, while CloudFront and public Lambda Function URLs were blocked outright in the academy account. All 115 tests and the full emulator run passed cleanly, so nothing pointed at the code — the client swapped in hardcoded emulator credentials whenever an access-key variable was present, and real AWS always sets that variable.</a:t>
+            </a:r>
+            <a:endParaRPr lang="en-US" sz="1450" dirty="0"/>
+          </a:p>
+        </p:txBody>
+      </p:sp>
+      <p:sp>
+        <p:nvSpPr>
+          <p:cNvPr id="6" name="Text 4"/>
+          <p:cNvSpPr/>
+          <p:nvPr/>
+        </p:nvSpPr>
+        <p:spPr>
+          <a:xfrm>
+            <a:off x="731520" y="4114800"/>
+            <a:ext cx="2377440" cy="548640"/>
+          </a:xfrm>
+          <a:prstGeom prst="rect">
+            <a:avLst/>
+          </a:prstGeom>
+          <a:noFill/>
+          <a:ln/>
+        </p:spPr>
+        <p:txBody>
+          <a:bodyPr wrap="square" lIns="0" tIns="0" rIns="0" bIns="0" rtlCol="0" anchor="ctr"/>
+          <a:lstStyle/>
+          <a:p>
+            <a:pPr indent="0" marL="0">
+              <a:buNone/>
+            </a:pPr>
+            <a:r>
+              <a:rPr lang="en-US" sz="2300" b="1" dirty="0">
+                <a:solidFill>
+                  <a:srgbClr val="2E8C46"/>
                 </a:solidFill>
                 <a:latin typeface="Century Schoolbook" pitchFamily="34" charset="0"/>
                 <a:ea typeface="Century Schoolbook" pitchFamily="34" charset="-122"/>
                 <a:cs typeface="Century Schoolbook" pitchFamily="34" charset="-120"/>
               </a:rPr>
-              <a:t>Problem</a:t>
-            </a:r>
-            <a:endParaRPr lang="en-US" sz="1900" dirty="0"/>
-          </a:p>
-        </p:txBody>
-      </p:sp>
-      <p:sp>
-        <p:nvSpPr>
-          <p:cNvPr id="5" name="Text 3"/>
-          <p:cNvSpPr/>
-          <p:nvPr/>
-        </p:nvSpPr>
-        <p:spPr>
-          <a:xfrm>
-            <a:off x="1005840" y="2578608"/>
-            <a:ext cx="9966960" cy="1188720"/>
-          </a:xfrm>
-          <a:prstGeom prst="rect">
-            <a:avLst/>
-          </a:prstGeom>
-          <a:noFill/>
-          <a:ln/>
-        </p:spPr>
-        <p:txBody>
-          <a:bodyPr wrap="square" lIns="0" tIns="0" rIns="0" bIns="0" rtlCol="0" anchor="ctr"/>
-          <a:lstStyle/>
-          <a:p>
-            <a:pPr indent="0" marL="0">
-              <a:lnSpc>
-                <a:spcPct val="105000"/>
-              </a:lnSpc>
-              <a:buNone/>
-            </a:pPr>
-            <a:r>
-              <a:rPr lang="en-US" sz="1300" dirty="0">
-                <a:solidFill>
-                  <a:srgbClr val="152619"/>
-                </a:solidFill>
-                <a:latin typeface="Calibri" pitchFamily="34" charset="0"/>
-                <a:ea typeface="Calibri" pitchFamily="34" charset="-122"/>
-                <a:cs typeface="Calibri" pitchFamily="34" charset="-120"/>
-              </a:rPr>
-              <a:t>On the first real deployment, every DynamoDB and SQS call failed authentication across fog, processor and dashboard, while CloudFront and public Lambda Function URLs were blocked outright in the academy account. All 115 tests and the full emulator run passed cleanly, so nothing pointed at the code — the client swapped in hardcoded emulator credentials whenever an access-key variable was present, and real AWS always sets that variable.</a:t>
-            </a:r>
-            <a:endParaRPr lang="en-US" sz="1300" dirty="0"/>
-          </a:p>
-        </p:txBody>
-      </p:sp>
-      <p:sp>
-        <p:nvSpPr>
-          <p:cNvPr id="6" name="Shape 4"/>
-          <p:cNvSpPr/>
-          <p:nvPr/>
-        </p:nvSpPr>
-        <p:spPr>
-          <a:xfrm>
-            <a:off x="731520" y="4041648"/>
-            <a:ext cx="10698480" cy="1965960"/>
-          </a:xfrm>
-          <a:prstGeom prst="roundRect">
-            <a:avLst>
-              <a:gd name="adj" fmla="val 4651"/>
-            </a:avLst>
-          </a:prstGeom>
-          <a:solidFill>
-            <a:srgbClr val="EEF4EC"/>
-          </a:solidFill>
-          <a:ln w="19050">
+              <a:t>Solution</a:t>
+            </a:r>
+            <a:endParaRPr lang="en-US" sz="2300" dirty="0"/>
+          </a:p>
+        </p:txBody>
+      </p:sp>
+      <p:sp>
+        <p:nvSpPr>
+          <p:cNvPr id="7" name="Shape 5"/>
+          <p:cNvSpPr/>
+          <p:nvPr/>
+        </p:nvSpPr>
+        <p:spPr>
+          <a:xfrm>
+            <a:off x="3200400" y="4069080"/>
+            <a:ext cx="0" cy="1783080"/>
+          </a:xfrm>
+          <a:prstGeom prst="line">
+            <a:avLst/>
+          </a:prstGeom>
+          <a:noFill/>
+          <a:ln w="31750">
             <a:solidFill>
               <a:srgbClr val="2E8C46"/>
             </a:solidFill>
@@ -3345,53 +3309,14 @@
       </p:sp>
       <p:sp>
         <p:nvSpPr>
-          <p:cNvPr id="7" name="Text 5"/>
-          <p:cNvSpPr/>
-          <p:nvPr/>
-        </p:nvSpPr>
-        <p:spPr>
-          <a:xfrm>
-            <a:off x="1005840" y="4224528"/>
-            <a:ext cx="3657600" cy="457200"/>
-          </a:xfrm>
-          <a:prstGeom prst="rect">
-            <a:avLst/>
-          </a:prstGeom>
-          <a:noFill/>
-          <a:ln/>
-        </p:spPr>
-        <p:txBody>
-          <a:bodyPr wrap="square" lIns="0" tIns="0" rIns="0" bIns="0" rtlCol="0" anchor="ctr"/>
-          <a:lstStyle/>
-          <a:p>
-            <a:pPr indent="0" marL="0">
-              <a:buNone/>
-            </a:pPr>
-            <a:r>
-              <a:rPr lang="en-US" sz="1900" b="1" dirty="0">
-                <a:solidFill>
-                  <a:srgbClr val="2E8C46"/>
-                </a:solidFill>
-                <a:latin typeface="Century Schoolbook" pitchFamily="34" charset="0"/>
-                <a:ea typeface="Century Schoolbook" pitchFamily="34" charset="-122"/>
-                <a:cs typeface="Century Schoolbook" pitchFamily="34" charset="-120"/>
-              </a:rPr>
-              <a:t>Solution</a:t>
-            </a:r>
-            <a:endParaRPr lang="en-US" sz="1900" dirty="0"/>
-          </a:p>
-        </p:txBody>
-      </p:sp>
-      <p:sp>
-        <p:nvSpPr>
           <p:cNvPr id="8" name="Text 6"/>
           <p:cNvSpPr/>
           <p:nvPr/>
         </p:nvSpPr>
         <p:spPr>
           <a:xfrm>
-            <a:off x="1005840" y="4700016"/>
-            <a:ext cx="9966960" cy="1188720"/>
+            <a:off x="3474720" y="4069080"/>
+            <a:ext cx="7955280" cy="1920240"/>
           </a:xfrm>
           <a:prstGeom prst="rect">
             <a:avLst/>
@@ -3405,12 +3330,12 @@
           <a:p>
             <a:pPr indent="0" marL="0">
               <a:lnSpc>
-                <a:spcPct val="105000"/>
+                <a:spcPct val="112000"/>
               </a:lnSpc>
               <a:buNone/>
             </a:pPr>
             <a:r>
-              <a:rPr lang="en-US" sz="1300" dirty="0">
+              <a:rPr lang="en-US" sz="1450" dirty="0">
                 <a:solidFill>
                   <a:srgbClr val="152619"/>
                 </a:solidFill>
@@ -3420,7 +3345,7 @@
               </a:rPr>
               <a:t>Gate emulator credentials on the one truly local signal — the explicit LocalStack endpoint override — and serve the API through API Gateway with the frontend from S3 over HTTPS, around the account blocks. Every fix was re-verified live: a real DynamoDB write and a real 200 through the gateway.</a:t>
             </a:r>
-            <a:endParaRPr lang="en-US" sz="1300" dirty="0"/>
+            <a:endParaRPr lang="en-US" sz="1450" dirty="0"/>
           </a:p>
         </p:txBody>
       </p:sp>

--- a/ppt/GundetiSachinReddy_X23432721_smart-waste-management.pptx
+++ b/ppt/GundetiSachinReddy_X23432721_smart-waste-management.pptx
@@ -2628,8 +2628,35 @@
         </p:nvSpPr>
         <p:spPr>
           <a:xfrm>
-            <a:off x="731520" y="1965960"/>
-            <a:ext cx="685800" cy="685800"/>
+            <a:off x="640080" y="1874520"/>
+            <a:ext cx="3502152" cy="3977640"/>
+          </a:xfrm>
+          <a:prstGeom prst="roundRect">
+            <a:avLst>
+              <a:gd name="adj" fmla="val 2611"/>
+            </a:avLst>
+          </a:prstGeom>
+          <a:solidFill>
+            <a:srgbClr val="EEF4EC"/>
+          </a:solidFill>
+          <a:ln w="15240">
+            <a:solidFill>
+              <a:srgbClr val="2E8C46"/>
+            </a:solidFill>
+            <a:prstDash val="solid"/>
+          </a:ln>
+        </p:spPr>
+      </p:sp>
+      <p:sp>
+        <p:nvSpPr>
+          <p:cNvPr id="5" name="Shape 3"/>
+          <p:cNvSpPr/>
+          <p:nvPr/>
+        </p:nvSpPr>
+        <p:spPr>
+          <a:xfrm>
+            <a:off x="914400" y="2148840"/>
+            <a:ext cx="603504" cy="603504"/>
           </a:xfrm>
           <a:prstGeom prst="ellipse">
             <a:avLst/>
@@ -2642,14 +2669,14 @@
       </p:sp>
       <p:sp>
         <p:nvSpPr>
-          <p:cNvPr id="5" name="Text 3"/>
-          <p:cNvSpPr/>
-          <p:nvPr/>
-        </p:nvSpPr>
-        <p:spPr>
-          <a:xfrm>
-            <a:off x="731520" y="1965960"/>
-            <a:ext cx="685800" cy="685800"/>
+          <p:cNvPr id="6" name="Text 4"/>
+          <p:cNvSpPr/>
+          <p:nvPr/>
+        </p:nvSpPr>
+        <p:spPr>
+          <a:xfrm>
+            <a:off x="914400" y="2148840"/>
+            <a:ext cx="603504" cy="603504"/>
           </a:xfrm>
           <a:prstGeom prst="rect">
             <a:avLst/>
@@ -2665,7 +2692,7 @@
               <a:buNone/>
             </a:pPr>
             <a:r>
-              <a:rPr lang="en-US" sz="2600" b="1" dirty="0">
+              <a:rPr lang="en-US" sz="2200" b="1" dirty="0">
                 <a:solidFill>
                   <a:srgbClr val="FFFFFF"/>
                 </a:solidFill>
@@ -2675,20 +2702,20 @@
               </a:rPr>
               <a:t>1</a:t>
             </a:r>
-            <a:endParaRPr lang="en-US" sz="2600" dirty="0"/>
-          </a:p>
-        </p:txBody>
-      </p:sp>
-      <p:sp>
-        <p:nvSpPr>
-          <p:cNvPr id="6" name="Text 4"/>
-          <p:cNvSpPr/>
-          <p:nvPr/>
-        </p:nvSpPr>
-        <p:spPr>
-          <a:xfrm>
-            <a:off x="1691640" y="1920240"/>
-            <a:ext cx="9875520" cy="411480"/>
+            <a:endParaRPr lang="en-US" sz="2200" dirty="0"/>
+          </a:p>
+        </p:txBody>
+      </p:sp>
+      <p:sp>
+        <p:nvSpPr>
+          <p:cNvPr id="7" name="Text 5"/>
+          <p:cNvSpPr/>
+          <p:nvPr/>
+        </p:nvSpPr>
+        <p:spPr>
+          <a:xfrm>
+            <a:off x="914400" y="2898648"/>
+            <a:ext cx="2953512" cy="777240"/>
           </a:xfrm>
           <a:prstGeom prst="rect">
             <a:avLst/>
@@ -2704,7 +2731,7 @@
               <a:buNone/>
             </a:pPr>
             <a:r>
-              <a:rPr lang="en-US" sz="1800" b="1" dirty="0">
+              <a:rPr lang="en-US" sz="1600" b="1" dirty="0">
                 <a:solidFill>
                   <a:srgbClr val="152619"/>
                 </a:solidFill>
@@ -2714,20 +2741,20 @@
               </a:rPr>
               <a:t>Two districts, four hazard signals</a:t>
             </a:r>
-            <a:endParaRPr lang="en-US" sz="1800" dirty="0"/>
-          </a:p>
-        </p:txBody>
-      </p:sp>
-      <p:sp>
-        <p:nvSpPr>
-          <p:cNvPr id="7" name="Text 5"/>
-          <p:cNvSpPr/>
-          <p:nvPr/>
-        </p:nvSpPr>
-        <p:spPr>
-          <a:xfrm>
-            <a:off x="1691640" y="2340864"/>
-            <a:ext cx="9875520" cy="640080"/>
+            <a:endParaRPr lang="en-US" sz="1600" dirty="0"/>
+          </a:p>
+        </p:txBody>
+      </p:sp>
+      <p:sp>
+        <p:nvSpPr>
+          <p:cNvPr id="8" name="Text 6"/>
+          <p:cNvSpPr/>
+          <p:nvPr/>
+        </p:nvSpPr>
+        <p:spPr>
+          <a:xfrm>
+            <a:off x="914400" y="3657600"/>
+            <a:ext cx="2953512" cy="2011680"/>
           </a:xfrm>
           <a:prstGeom prst="rect">
             <a:avLst/>
@@ -2740,10 +2767,13 @@
           <a:lstStyle/>
           <a:p>
             <a:pPr indent="0" marL="0">
+              <a:lnSpc>
+                <a:spcPct val="106000"/>
+              </a:lnSpc>
               <a:buNone/>
             </a:pPr>
             <a:r>
-              <a:rPr lang="en-US" sz="1350" dirty="0">
+              <a:rPr lang="en-US" sz="1250" dirty="0">
                 <a:solidFill>
                   <a:srgbClr val="5C6E58"/>
                 </a:solidFill>
@@ -2753,20 +2783,47 @@
               </a:rPr>
               <a:t>Fill level, internal temperature, gas and lid activity live per bin, so the busiest bin is always surfaced first.</a:t>
             </a:r>
-            <a:endParaRPr lang="en-US" sz="1350" dirty="0"/>
-          </a:p>
-        </p:txBody>
-      </p:sp>
-      <p:sp>
-        <p:nvSpPr>
-          <p:cNvPr id="8" name="Shape 6"/>
-          <p:cNvSpPr/>
-          <p:nvPr/>
-        </p:nvSpPr>
-        <p:spPr>
-          <a:xfrm>
-            <a:off x="731520" y="3383280"/>
-            <a:ext cx="685800" cy="685800"/>
+            <a:endParaRPr lang="en-US" sz="1250" dirty="0"/>
+          </a:p>
+        </p:txBody>
+      </p:sp>
+      <p:sp>
+        <p:nvSpPr>
+          <p:cNvPr id="9" name="Shape 7"/>
+          <p:cNvSpPr/>
+          <p:nvPr/>
+        </p:nvSpPr>
+        <p:spPr>
+          <a:xfrm>
+            <a:off x="4416552" y="1874520"/>
+            <a:ext cx="3502152" cy="3977640"/>
+          </a:xfrm>
+          <a:prstGeom prst="roundRect">
+            <a:avLst>
+              <a:gd name="adj" fmla="val 2611"/>
+            </a:avLst>
+          </a:prstGeom>
+          <a:solidFill>
+            <a:srgbClr val="EEF4EC"/>
+          </a:solidFill>
+          <a:ln w="15240">
+            <a:solidFill>
+              <a:srgbClr val="2E8C46"/>
+            </a:solidFill>
+            <a:prstDash val="solid"/>
+          </a:ln>
+        </p:spPr>
+      </p:sp>
+      <p:sp>
+        <p:nvSpPr>
+          <p:cNvPr id="10" name="Shape 8"/>
+          <p:cNvSpPr/>
+          <p:nvPr/>
+        </p:nvSpPr>
+        <p:spPr>
+          <a:xfrm>
+            <a:off x="4690872" y="2148840"/>
+            <a:ext cx="603504" cy="603504"/>
           </a:xfrm>
           <a:prstGeom prst="ellipse">
             <a:avLst/>
@@ -2779,14 +2836,14 @@
       </p:sp>
       <p:sp>
         <p:nvSpPr>
-          <p:cNvPr id="9" name="Text 7"/>
-          <p:cNvSpPr/>
-          <p:nvPr/>
-        </p:nvSpPr>
-        <p:spPr>
-          <a:xfrm>
-            <a:off x="731520" y="3383280"/>
-            <a:ext cx="685800" cy="685800"/>
+          <p:cNvPr id="11" name="Text 9"/>
+          <p:cNvSpPr/>
+          <p:nvPr/>
+        </p:nvSpPr>
+        <p:spPr>
+          <a:xfrm>
+            <a:off x="4690872" y="2148840"/>
+            <a:ext cx="603504" cy="603504"/>
           </a:xfrm>
           <a:prstGeom prst="rect">
             <a:avLst/>
@@ -2802,7 +2859,7 @@
               <a:buNone/>
             </a:pPr>
             <a:r>
-              <a:rPr lang="en-US" sz="2600" b="1" dirty="0">
+              <a:rPr lang="en-US" sz="2200" b="1" dirty="0">
                 <a:solidFill>
                   <a:srgbClr val="FFFFFF"/>
                 </a:solidFill>
@@ -2812,20 +2869,20 @@
               </a:rPr>
               <a:t>2</a:t>
             </a:r>
-            <a:endParaRPr lang="en-US" sz="2600" dirty="0"/>
-          </a:p>
-        </p:txBody>
-      </p:sp>
-      <p:sp>
-        <p:nvSpPr>
-          <p:cNvPr id="10" name="Text 8"/>
-          <p:cNvSpPr/>
-          <p:nvPr/>
-        </p:nvSpPr>
-        <p:spPr>
-          <a:xfrm>
-            <a:off x="1691640" y="3337560"/>
-            <a:ext cx="9875520" cy="411480"/>
+            <a:endParaRPr lang="en-US" sz="2200" dirty="0"/>
+          </a:p>
+        </p:txBody>
+      </p:sp>
+      <p:sp>
+        <p:nvSpPr>
+          <p:cNvPr id="12" name="Text 10"/>
+          <p:cNvSpPr/>
+          <p:nvPr/>
+        </p:nvSpPr>
+        <p:spPr>
+          <a:xfrm>
+            <a:off x="4690872" y="2898648"/>
+            <a:ext cx="2953512" cy="777240"/>
           </a:xfrm>
           <a:prstGeom prst="rect">
             <a:avLst/>
@@ -2841,7 +2898,7 @@
               <a:buNone/>
             </a:pPr>
             <a:r>
-              <a:rPr lang="en-US" sz="1800" b="1" dirty="0">
+              <a:rPr lang="en-US" sz="1600" b="1" dirty="0">
                 <a:solidFill>
                   <a:srgbClr val="152619"/>
                 </a:solidFill>
@@ -2851,20 +2908,20 @@
               </a:rPr>
               <a:t>Four hazard rules firing live</a:t>
             </a:r>
-            <a:endParaRPr lang="en-US" sz="1800" dirty="0"/>
-          </a:p>
-        </p:txBody>
-      </p:sp>
-      <p:sp>
-        <p:nvSpPr>
-          <p:cNvPr id="11" name="Text 9"/>
-          <p:cNvSpPr/>
-          <p:nvPr/>
-        </p:nvSpPr>
-        <p:spPr>
-          <a:xfrm>
-            <a:off x="1691640" y="3758184"/>
-            <a:ext cx="9875520" cy="640080"/>
+            <a:endParaRPr lang="en-US" sz="1600" dirty="0"/>
+          </a:p>
+        </p:txBody>
+      </p:sp>
+      <p:sp>
+        <p:nvSpPr>
+          <p:cNvPr id="13" name="Text 11"/>
+          <p:cNvSpPr/>
+          <p:nvPr/>
+        </p:nvSpPr>
+        <p:spPr>
+          <a:xfrm>
+            <a:off x="4690872" y="3657600"/>
+            <a:ext cx="2953512" cy="2011680"/>
           </a:xfrm>
           <a:prstGeom prst="rect">
             <a:avLst/>
@@ -2877,10 +2934,13 @@
           <a:lstStyle/>
           <a:p>
             <a:pPr indent="0" marL="0">
+              <a:lnSpc>
+                <a:spcPct val="106000"/>
+              </a:lnSpc>
               <a:buNone/>
             </a:pPr>
             <a:r>
-              <a:rPr lang="en-US" sz="1350" dirty="0">
+              <a:rPr lang="en-US" sz="1250" dirty="0">
                 <a:solidFill>
                   <a:srgbClr val="5C6E58"/>
                 </a:solidFill>
@@ -2890,20 +2950,47 @@
               </a:rPr>
               <a:t>Overflow above 85% fill, fire risk above 55 C, gas above 400 ppm and tampering each raise on the window they appear.</a:t>
             </a:r>
-            <a:endParaRPr lang="en-US" sz="1350" dirty="0"/>
-          </a:p>
-        </p:txBody>
-      </p:sp>
-      <p:sp>
-        <p:nvSpPr>
-          <p:cNvPr id="12" name="Shape 10"/>
-          <p:cNvSpPr/>
-          <p:nvPr/>
-        </p:nvSpPr>
-        <p:spPr>
-          <a:xfrm>
-            <a:off x="731520" y="4800600"/>
-            <a:ext cx="685800" cy="685800"/>
+            <a:endParaRPr lang="en-US" sz="1250" dirty="0"/>
+          </a:p>
+        </p:txBody>
+      </p:sp>
+      <p:sp>
+        <p:nvSpPr>
+          <p:cNvPr id="14" name="Shape 12"/>
+          <p:cNvSpPr/>
+          <p:nvPr/>
+        </p:nvSpPr>
+        <p:spPr>
+          <a:xfrm>
+            <a:off x="8193024" y="1874520"/>
+            <a:ext cx="3502152" cy="3977640"/>
+          </a:xfrm>
+          <a:prstGeom prst="roundRect">
+            <a:avLst>
+              <a:gd name="adj" fmla="val 2611"/>
+            </a:avLst>
+          </a:prstGeom>
+          <a:solidFill>
+            <a:srgbClr val="EEF4EC"/>
+          </a:solidFill>
+          <a:ln w="15240">
+            <a:solidFill>
+              <a:srgbClr val="2E8C46"/>
+            </a:solidFill>
+            <a:prstDash val="solid"/>
+          </a:ln>
+        </p:spPr>
+      </p:sp>
+      <p:sp>
+        <p:nvSpPr>
+          <p:cNvPr id="15" name="Shape 13"/>
+          <p:cNvSpPr/>
+          <p:nvPr/>
+        </p:nvSpPr>
+        <p:spPr>
+          <a:xfrm>
+            <a:off x="8467344" y="2148840"/>
+            <a:ext cx="603504" cy="603504"/>
           </a:xfrm>
           <a:prstGeom prst="ellipse">
             <a:avLst/>
@@ -2916,14 +3003,14 @@
       </p:sp>
       <p:sp>
         <p:nvSpPr>
-          <p:cNvPr id="13" name="Text 11"/>
-          <p:cNvSpPr/>
-          <p:nvPr/>
-        </p:nvSpPr>
-        <p:spPr>
-          <a:xfrm>
-            <a:off x="731520" y="4800600"/>
-            <a:ext cx="685800" cy="685800"/>
+          <p:cNvPr id="16" name="Text 14"/>
+          <p:cNvSpPr/>
+          <p:nvPr/>
+        </p:nvSpPr>
+        <p:spPr>
+          <a:xfrm>
+            <a:off x="8467344" y="2148840"/>
+            <a:ext cx="603504" cy="603504"/>
           </a:xfrm>
           <a:prstGeom prst="rect">
             <a:avLst/>
@@ -2939,7 +3026,7 @@
               <a:buNone/>
             </a:pPr>
             <a:r>
-              <a:rPr lang="en-US" sz="2600" b="1" dirty="0">
+              <a:rPr lang="en-US" sz="2200" b="1" dirty="0">
                 <a:solidFill>
                   <a:srgbClr val="FFFFFF"/>
                 </a:solidFill>
@@ -2949,20 +3036,20 @@
               </a:rPr>
               <a:t>3</a:t>
             </a:r>
-            <a:endParaRPr lang="en-US" sz="2600" dirty="0"/>
-          </a:p>
-        </p:txBody>
-      </p:sp>
-      <p:sp>
-        <p:nvSpPr>
-          <p:cNvPr id="14" name="Text 12"/>
-          <p:cNvSpPr/>
-          <p:nvPr/>
-        </p:nvSpPr>
-        <p:spPr>
-          <a:xfrm>
-            <a:off x="1691640" y="4754880"/>
-            <a:ext cx="9875520" cy="411480"/>
+            <a:endParaRPr lang="en-US" sz="2200" dirty="0"/>
+          </a:p>
+        </p:txBody>
+      </p:sp>
+      <p:sp>
+        <p:nvSpPr>
+          <p:cNvPr id="17" name="Text 15"/>
+          <p:cNvSpPr/>
+          <p:nvPr/>
+        </p:nvSpPr>
+        <p:spPr>
+          <a:xfrm>
+            <a:off x="8467344" y="2898648"/>
+            <a:ext cx="2953512" cy="777240"/>
           </a:xfrm>
           <a:prstGeom prst="rect">
             <a:avLst/>
@@ -2978,7 +3065,7 @@
               <a:buNone/>
             </a:pPr>
             <a:r>
-              <a:rPr lang="en-US" sz="1800" b="1" dirty="0">
+              <a:rPr lang="en-US" sz="1600" b="1" dirty="0">
                 <a:solidFill>
                   <a:srgbClr val="152619"/>
                 </a:solidFill>
@@ -2988,20 +3075,20 @@
               </a:rPr>
               <a:t>Genuinely live, not a cache</a:t>
             </a:r>
-            <a:endParaRPr lang="en-US" sz="1800" dirty="0"/>
-          </a:p>
-        </p:txBody>
-      </p:sp>
-      <p:sp>
-        <p:nvSpPr>
-          <p:cNvPr id="15" name="Text 13"/>
-          <p:cNvSpPr/>
-          <p:nvPr/>
-        </p:nvSpPr>
-        <p:spPr>
-          <a:xfrm>
-            <a:off x="1691640" y="5175504"/>
-            <a:ext cx="9875520" cy="640080"/>
+            <a:endParaRPr lang="en-US" sz="1600" dirty="0"/>
+          </a:p>
+        </p:txBody>
+      </p:sp>
+      <p:sp>
+        <p:nvSpPr>
+          <p:cNvPr id="18" name="Text 16"/>
+          <p:cNvSpPr/>
+          <p:nvPr/>
+        </p:nvSpPr>
+        <p:spPr>
+          <a:xfrm>
+            <a:off x="8467344" y="3657600"/>
+            <a:ext cx="2953512" cy="2011680"/>
           </a:xfrm>
           <a:prstGeom prst="rect">
             <a:avLst/>
@@ -3014,10 +3101,13 @@
           <a:lstStyle/>
           <a:p>
             <a:pPr indent="0" marL="0">
+              <a:lnSpc>
+                <a:spcPct val="106000"/>
+              </a:lnSpc>
               <a:buNone/>
             </a:pPr>
             <a:r>
-              <a:rPr lang="en-US" sz="1350" dirty="0">
+              <a:rPr lang="en-US" sz="1250" dirty="0">
                 <a:solidFill>
                   <a:srgbClr val="5C6E58"/>
                 </a:solidFill>
@@ -3027,46 +3117,7 @@
               </a:rPr>
               <a:t>Two health polls fifteen seconds apart show the stored count climbing 4,083 to 4,093 — live data.</a:t>
             </a:r>
-            <a:endParaRPr lang="en-US" sz="1350" dirty="0"/>
-          </a:p>
-        </p:txBody>
-      </p:sp>
-      <p:sp>
-        <p:nvSpPr>
-          <p:cNvPr id="16" name="Text 14"/>
-          <p:cNvSpPr/>
-          <p:nvPr/>
-        </p:nvSpPr>
-        <p:spPr>
-          <a:xfrm>
-            <a:off x="640080" y="6263640"/>
-            <a:ext cx="10972800" cy="365760"/>
-          </a:xfrm>
-          <a:prstGeom prst="rect">
-            <a:avLst/>
-          </a:prstGeom>
-          <a:noFill/>
-          <a:ln/>
-        </p:spPr>
-        <p:txBody>
-          <a:bodyPr wrap="square" rtlCol="0" anchor="ctr"/>
-          <a:lstStyle/>
-          <a:p>
-            <a:pPr indent="0" marL="0">
-              <a:buNone/>
-            </a:pPr>
-            <a:r>
-              <a:rPr lang="en-US" sz="1300" i="1" dirty="0">
-                <a:solidFill>
-                  <a:srgbClr val="5E9A62"/>
-                </a:solidFill>
-                <a:latin typeface="Calibri" pitchFamily="34" charset="0"/>
-                <a:ea typeface="Calibri" pitchFamily="34" charset="-122"/>
-                <a:cs typeface="Calibri" pitchFamily="34" charset="-120"/>
-              </a:rPr>
-              <a:t>Switch to the live dashboard here — backup video ready.</a:t>
-            </a:r>
-            <a:endParaRPr lang="en-US" sz="1300" dirty="0"/>
+            <a:endParaRPr lang="en-US" sz="1250" dirty="0"/>
           </a:p>
         </p:txBody>
       </p:sp>
@@ -3143,14 +3194,41 @@
       </p:sp>
       <p:sp>
         <p:nvSpPr>
-          <p:cNvPr id="3" name="Text 1"/>
-          <p:cNvSpPr/>
-          <p:nvPr/>
-        </p:nvSpPr>
-        <p:spPr>
-          <a:xfrm>
-            <a:off x="731520" y="1965960"/>
-            <a:ext cx="2377440" cy="548640"/>
+          <p:cNvPr id="3" name="Shape 1"/>
+          <p:cNvSpPr/>
+          <p:nvPr/>
+        </p:nvSpPr>
+        <p:spPr>
+          <a:xfrm>
+            <a:off x="731520" y="1920240"/>
+            <a:ext cx="10698480" cy="1965960"/>
+          </a:xfrm>
+          <a:prstGeom prst="roundRect">
+            <a:avLst>
+              <a:gd name="adj" fmla="val 4651"/>
+            </a:avLst>
+          </a:prstGeom>
+          <a:solidFill>
+            <a:srgbClr val="EEF4EC"/>
+          </a:solidFill>
+          <a:ln w="19050">
+            <a:solidFill>
+              <a:srgbClr val="D9A62E"/>
+            </a:solidFill>
+            <a:prstDash val="solid"/>
+          </a:ln>
+        </p:spPr>
+      </p:sp>
+      <p:sp>
+        <p:nvSpPr>
+          <p:cNvPr id="4" name="Text 2"/>
+          <p:cNvSpPr/>
+          <p:nvPr/>
+        </p:nvSpPr>
+        <p:spPr>
+          <a:xfrm>
+            <a:off x="1005840" y="2103120"/>
+            <a:ext cx="3657600" cy="457200"/>
           </a:xfrm>
           <a:prstGeom prst="rect">
             <a:avLst/>
@@ -3166,7 +3244,7 @@
               <a:buNone/>
             </a:pPr>
             <a:r>
-              <a:rPr lang="en-US" sz="2300" b="1" dirty="0">
+              <a:rPr lang="en-US" sz="1900" b="1" dirty="0">
                 <a:solidFill>
                   <a:srgbClr val="D9A62E"/>
                 </a:solidFill>
@@ -3176,32 +3254,9 @@
               </a:rPr>
               <a:t>Problem</a:t>
             </a:r>
-            <a:endParaRPr lang="en-US" sz="2300" dirty="0"/>
-          </a:p>
-        </p:txBody>
-      </p:sp>
-      <p:sp>
-        <p:nvSpPr>
-          <p:cNvPr id="4" name="Shape 2"/>
-          <p:cNvSpPr/>
-          <p:nvPr/>
-        </p:nvSpPr>
-        <p:spPr>
-          <a:xfrm>
-            <a:off x="3200400" y="1920240"/>
-            <a:ext cx="0" cy="1783080"/>
-          </a:xfrm>
-          <a:prstGeom prst="line">
-            <a:avLst/>
-          </a:prstGeom>
-          <a:noFill/>
-          <a:ln w="31750">
-            <a:solidFill>
-              <a:srgbClr val="D9A62E"/>
-            </a:solidFill>
-            <a:prstDash val="solid"/>
-          </a:ln>
-        </p:spPr>
+            <a:endParaRPr lang="en-US" sz="1900" dirty="0"/>
+          </a:p>
+        </p:txBody>
       </p:sp>
       <p:sp>
         <p:nvSpPr>
@@ -3211,8 +3266,8 @@
         </p:nvSpPr>
         <p:spPr>
           <a:xfrm>
-            <a:off x="3474720" y="1920240"/>
-            <a:ext cx="7955280" cy="1920240"/>
+            <a:off x="1005840" y="2578608"/>
+            <a:ext cx="9966960" cy="1188720"/>
           </a:xfrm>
           <a:prstGeom prst="rect">
             <a:avLst/>
@@ -3226,12 +3281,12 @@
           <a:p>
             <a:pPr indent="0" marL="0">
               <a:lnSpc>
-                <a:spcPct val="112000"/>
+                <a:spcPct val="105000"/>
               </a:lnSpc>
               <a:buNone/>
             </a:pPr>
             <a:r>
-              <a:rPr lang="en-US" sz="1450" dirty="0">
+              <a:rPr lang="en-US" sz="1300" dirty="0">
                 <a:solidFill>
                   <a:srgbClr val="152619"/>
                 </a:solidFill>
@@ -3241,20 +3296,47 @@
               </a:rPr>
               <a:t>On the first real deployment, every DynamoDB and SQS call failed authentication across fog, processor and dashboard, while CloudFront and public Lambda Function URLs were blocked outright in the academy account. All 115 tests and the full emulator run passed cleanly, so nothing pointed at the code — the client swapped in hardcoded emulator credentials whenever an access-key variable was present, and real AWS always sets that variable.</a:t>
             </a:r>
-            <a:endParaRPr lang="en-US" sz="1450" dirty="0"/>
-          </a:p>
-        </p:txBody>
-      </p:sp>
-      <p:sp>
-        <p:nvSpPr>
-          <p:cNvPr id="6" name="Text 4"/>
-          <p:cNvSpPr/>
-          <p:nvPr/>
-        </p:nvSpPr>
-        <p:spPr>
-          <a:xfrm>
-            <a:off x="731520" y="4114800"/>
-            <a:ext cx="2377440" cy="548640"/>
+            <a:endParaRPr lang="en-US" sz="1300" dirty="0"/>
+          </a:p>
+        </p:txBody>
+      </p:sp>
+      <p:sp>
+        <p:nvSpPr>
+          <p:cNvPr id="6" name="Shape 4"/>
+          <p:cNvSpPr/>
+          <p:nvPr/>
+        </p:nvSpPr>
+        <p:spPr>
+          <a:xfrm>
+            <a:off x="731520" y="4041648"/>
+            <a:ext cx="10698480" cy="1965960"/>
+          </a:xfrm>
+          <a:prstGeom prst="roundRect">
+            <a:avLst>
+              <a:gd name="adj" fmla="val 4651"/>
+            </a:avLst>
+          </a:prstGeom>
+          <a:solidFill>
+            <a:srgbClr val="EEF4EC"/>
+          </a:solidFill>
+          <a:ln w="19050">
+            <a:solidFill>
+              <a:srgbClr val="2E8C46"/>
+            </a:solidFill>
+            <a:prstDash val="solid"/>
+          </a:ln>
+        </p:spPr>
+      </p:sp>
+      <p:sp>
+        <p:nvSpPr>
+          <p:cNvPr id="7" name="Text 5"/>
+          <p:cNvSpPr/>
+          <p:nvPr/>
+        </p:nvSpPr>
+        <p:spPr>
+          <a:xfrm>
+            <a:off x="1005840" y="4224528"/>
+            <a:ext cx="3657600" cy="457200"/>
           </a:xfrm>
           <a:prstGeom prst="rect">
             <a:avLst/>
@@ -3270,7 +3352,7 @@
               <a:buNone/>
             </a:pPr>
             <a:r>
-              <a:rPr lang="en-US" sz="2300" b="1" dirty="0">
+              <a:rPr lang="en-US" sz="1900" b="1" dirty="0">
                 <a:solidFill>
                   <a:srgbClr val="2E8C46"/>
                 </a:solidFill>
@@ -3280,32 +3362,9 @@
               </a:rPr>
               <a:t>Solution</a:t>
             </a:r>
-            <a:endParaRPr lang="en-US" sz="2300" dirty="0"/>
-          </a:p>
-        </p:txBody>
-      </p:sp>
-      <p:sp>
-        <p:nvSpPr>
-          <p:cNvPr id="7" name="Shape 5"/>
-          <p:cNvSpPr/>
-          <p:nvPr/>
-        </p:nvSpPr>
-        <p:spPr>
-          <a:xfrm>
-            <a:off x="3200400" y="4069080"/>
-            <a:ext cx="0" cy="1783080"/>
-          </a:xfrm>
-          <a:prstGeom prst="line">
-            <a:avLst/>
-          </a:prstGeom>
-          <a:noFill/>
-          <a:ln w="31750">
-            <a:solidFill>
-              <a:srgbClr val="2E8C46"/>
-            </a:solidFill>
-            <a:prstDash val="solid"/>
-          </a:ln>
-        </p:spPr>
+            <a:endParaRPr lang="en-US" sz="1900" dirty="0"/>
+          </a:p>
+        </p:txBody>
       </p:sp>
       <p:sp>
         <p:nvSpPr>
@@ -3315,8 +3374,8 @@
         </p:nvSpPr>
         <p:spPr>
           <a:xfrm>
-            <a:off x="3474720" y="4069080"/>
-            <a:ext cx="7955280" cy="1920240"/>
+            <a:off x="1005840" y="4700016"/>
+            <a:ext cx="9966960" cy="1188720"/>
           </a:xfrm>
           <a:prstGeom prst="rect">
             <a:avLst/>
@@ -3330,12 +3389,12 @@
           <a:p>
             <a:pPr indent="0" marL="0">
               <a:lnSpc>
-                <a:spcPct val="112000"/>
+                <a:spcPct val="105000"/>
               </a:lnSpc>
               <a:buNone/>
             </a:pPr>
             <a:r>
-              <a:rPr lang="en-US" sz="1450" dirty="0">
+              <a:rPr lang="en-US" sz="1300" dirty="0">
                 <a:solidFill>
                   <a:srgbClr val="152619"/>
                 </a:solidFill>
@@ -3345,7 +3404,7 @@
               </a:rPr>
               <a:t>Gate emulator credentials on the one truly local signal — the explicit LocalStack endpoint override — and serve the API through API Gateway with the frontend from S3 over HTTPS, around the account blocks. Every fix was re-verified live: a real DynamoDB write and a real 200 through the gateway.</a:t>
             </a:r>
-            <a:endParaRPr lang="en-US" sz="1450" dirty="0"/>
+            <a:endParaRPr lang="en-US" sz="1300" dirty="0"/>
           </a:p>
         </p:txBody>
       </p:sp>

--- a/ppt/GundetiSachinReddy_X23432721_smart-waste-management.pptx
+++ b/ppt/GundetiSachinReddy_X23432721_smart-waste-management.pptx
@@ -1201,14 +1201,9 @@
             </a:avLst>
           </a:prstGeom>
           <a:solidFill>
-            <a:srgbClr val="1B3322"/>
-          </a:solidFill>
-          <a:ln w="15875">
-            <a:solidFill>
-              <a:srgbClr val="D9A62E"/>
-            </a:solidFill>
-            <a:prstDash val="solid"/>
-          </a:ln>
+            <a:srgbClr val="1E6B34"/>
+          </a:solidFill>
+          <a:ln/>
         </p:spPr>
       </p:sp>
       <p:sp>
@@ -1277,7 +1272,7 @@
             <a:r>
               <a:rPr lang="en-US" sz="1500" dirty="0">
                 <a:solidFill>
-                  <a:srgbClr val="5E9A62"/>
+                  <a:srgbClr val="D2E6CE"/>
                 </a:solidFill>
                 <a:latin typeface="Calibri" pitchFamily="34" charset="0"/>
                 <a:ea typeface="Calibri" pitchFamily="34" charset="-122"/>
@@ -1291,41 +1286,14 @@
       </p:sp>
       <p:sp>
         <p:nvSpPr>
-          <p:cNvPr id="6" name="Shape 4"/>
+          <p:cNvPr id="6" name="Text 4"/>
           <p:cNvSpPr/>
           <p:nvPr/>
         </p:nvSpPr>
         <p:spPr>
           <a:xfrm>
             <a:off x="1097280" y="4709160"/>
-            <a:ext cx="2651760" cy="566928"/>
-          </a:xfrm>
-          <a:prstGeom prst="roundRect">
-            <a:avLst>
-              <a:gd name="adj" fmla="val 50000"/>
-            </a:avLst>
-          </a:prstGeom>
-          <a:solidFill>
-            <a:srgbClr val="1B3322"/>
-          </a:solidFill>
-          <a:ln w="12700">
-            <a:solidFill>
-              <a:srgbClr val="D9A62E"/>
-            </a:solidFill>
-            <a:prstDash val="solid"/>
-          </a:ln>
-        </p:spPr>
-      </p:sp>
-      <p:sp>
-        <p:nvSpPr>
-          <p:cNvPr id="7" name="Text 5"/>
-          <p:cNvSpPr/>
-          <p:nvPr/>
-        </p:nvSpPr>
-        <p:spPr>
-          <a:xfrm>
-            <a:off x="1097280" y="4709160"/>
-            <a:ext cx="2651760" cy="566928"/>
+            <a:ext cx="10972800" cy="457200"/>
           </a:xfrm>
           <a:prstGeom prst="rect">
             <a:avLst/>
@@ -1337,11 +1305,11 @@
           <a:bodyPr wrap="square" lIns="0" tIns="0" rIns="0" bIns="0" rtlCol="0" anchor="ctr"/>
           <a:lstStyle/>
           <a:p>
-            <a:pPr algn="ctr" indent="0" marL="0">
+            <a:pPr indent="0" marL="0">
               <a:buNone/>
             </a:pPr>
             <a:r>
-              <a:rPr lang="en-US" sz="1350" b="1" dirty="0">
+              <a:rPr lang="en-US" sz="1550" b="1" dirty="0">
                 <a:solidFill>
                   <a:srgbClr val="D9A62E"/>
                 </a:solidFill>
@@ -1349,147 +1317,15 @@
                 <a:ea typeface="Calibri" pitchFamily="34" charset="-122"/>
                 <a:cs typeface="Calibri" pitchFamily="34" charset="-120"/>
               </a:rPr>
-              <a:t>Overflow fill &gt; 85%</a:t>
-            </a:r>
-            <a:endParaRPr lang="en-US" sz="1350" dirty="0"/>
-          </a:p>
-        </p:txBody>
-      </p:sp>
-      <p:sp>
-        <p:nvSpPr>
-          <p:cNvPr id="8" name="Shape 6"/>
-          <p:cNvSpPr/>
-          <p:nvPr/>
-        </p:nvSpPr>
-        <p:spPr>
-          <a:xfrm>
-            <a:off x="3977640" y="4709160"/>
-            <a:ext cx="2651760" cy="566928"/>
-          </a:xfrm>
-          <a:prstGeom prst="roundRect">
-            <a:avLst>
-              <a:gd name="adj" fmla="val 50000"/>
-            </a:avLst>
-          </a:prstGeom>
-          <a:solidFill>
-            <a:srgbClr val="1B3322"/>
-          </a:solidFill>
-          <a:ln w="12700">
-            <a:solidFill>
-              <a:srgbClr val="D9A62E"/>
-            </a:solidFill>
-            <a:prstDash val="solid"/>
-          </a:ln>
-        </p:spPr>
-      </p:sp>
-      <p:sp>
-        <p:nvSpPr>
-          <p:cNvPr id="9" name="Text 7"/>
-          <p:cNvSpPr/>
-          <p:nvPr/>
-        </p:nvSpPr>
-        <p:spPr>
-          <a:xfrm>
-            <a:off x="3977640" y="4709160"/>
-            <a:ext cx="2651760" cy="566928"/>
-          </a:xfrm>
-          <a:prstGeom prst="rect">
-            <a:avLst/>
-          </a:prstGeom>
-          <a:noFill/>
-          <a:ln/>
-        </p:spPr>
-        <p:txBody>
-          <a:bodyPr wrap="square" lIns="0" tIns="0" rIns="0" bIns="0" rtlCol="0" anchor="ctr"/>
-          <a:lstStyle/>
-          <a:p>
-            <a:pPr algn="ctr" indent="0" marL="0">
-              <a:buNone/>
-            </a:pPr>
-            <a:r>
-              <a:rPr lang="en-US" sz="1350" b="1" dirty="0">
-                <a:solidFill>
-                  <a:srgbClr val="D9A62E"/>
-                </a:solidFill>
-                <a:latin typeface="Calibri" pitchFamily="34" charset="0"/>
-                <a:ea typeface="Calibri" pitchFamily="34" charset="-122"/>
-                <a:cs typeface="Calibri" pitchFamily="34" charset="-120"/>
-              </a:rPr>
-              <a:t>Fire temp &gt; 55 °C</a:t>
-            </a:r>
-            <a:endParaRPr lang="en-US" sz="1350" dirty="0"/>
-          </a:p>
-        </p:txBody>
-      </p:sp>
-      <p:sp>
-        <p:nvSpPr>
-          <p:cNvPr id="10" name="Shape 8"/>
-          <p:cNvSpPr/>
-          <p:nvPr/>
-        </p:nvSpPr>
-        <p:spPr>
-          <a:xfrm>
-            <a:off x="6858000" y="4709160"/>
-            <a:ext cx="2651760" cy="566928"/>
-          </a:xfrm>
-          <a:prstGeom prst="roundRect">
-            <a:avLst>
-              <a:gd name="adj" fmla="val 50000"/>
-            </a:avLst>
-          </a:prstGeom>
-          <a:solidFill>
-            <a:srgbClr val="1B3322"/>
-          </a:solidFill>
-          <a:ln w="12700">
-            <a:solidFill>
-              <a:srgbClr val="D9A62E"/>
-            </a:solidFill>
-            <a:prstDash val="solid"/>
-          </a:ln>
-        </p:spPr>
-      </p:sp>
-      <p:sp>
-        <p:nvSpPr>
-          <p:cNvPr id="11" name="Text 9"/>
-          <p:cNvSpPr/>
-          <p:nvPr/>
-        </p:nvSpPr>
-        <p:spPr>
-          <a:xfrm>
-            <a:off x="6858000" y="4709160"/>
-            <a:ext cx="2651760" cy="566928"/>
-          </a:xfrm>
-          <a:prstGeom prst="rect">
-            <a:avLst/>
-          </a:prstGeom>
-          <a:noFill/>
-          <a:ln/>
-        </p:spPr>
-        <p:txBody>
-          <a:bodyPr wrap="square" lIns="0" tIns="0" rIns="0" bIns="0" rtlCol="0" anchor="ctr"/>
-          <a:lstStyle/>
-          <a:p>
-            <a:pPr algn="ctr" indent="0" marL="0">
-              <a:buNone/>
-            </a:pPr>
-            <a:r>
-              <a:rPr lang="en-US" sz="1350" b="1" dirty="0">
-                <a:solidFill>
-                  <a:srgbClr val="D9A62E"/>
-                </a:solidFill>
-                <a:latin typeface="Calibri" pitchFamily="34" charset="0"/>
-                <a:ea typeface="Calibri" pitchFamily="34" charset="-122"/>
-                <a:cs typeface="Calibri" pitchFamily="34" charset="-120"/>
-              </a:rPr>
-              <a:t>Gas &gt; 400 ppm</a:t>
-            </a:r>
-            <a:endParaRPr lang="en-US" sz="1350" dirty="0"/>
-          </a:p>
-        </p:txBody>
-      </p:sp>
-      <p:sp>
-        <p:nvSpPr>
-          <p:cNvPr id="12" name="Text 10"/>
+              <a:t>Overflow fill &gt; 85%      ·      Fire temp &gt; 55 °C      ·      Gas &gt; 400 ppm</a:t>
+            </a:r>
+            <a:endParaRPr lang="en-US" sz="1550" dirty="0"/>
+          </a:p>
+        </p:txBody>
+      </p:sp>
+      <p:sp>
+        <p:nvSpPr>
+          <p:cNvPr id="7" name="Text 5"/>
           <p:cNvSpPr/>
           <p:nvPr/>
         </p:nvSpPr>
@@ -1511,17 +1347,6 @@
             <a:pPr indent="0" marL="0">
               <a:buNone/>
             </a:pPr>
-            <a:r>
-              <a:rPr lang="en-US" sz="1250" dirty="0">
-                <a:solidFill>
-                  <a:srgbClr val="5C6E58"/>
-                </a:solidFill>
-                <a:latin typeface="Calibri" pitchFamily="34" charset="0"/>
-                <a:ea typeface="Calibri" pitchFamily="34" charset="-122"/>
-                <a:cs typeface="Calibri" pitchFamily="34" charset="-120"/>
-              </a:rPr>
-              <a:t>Fog &amp; Edge Computing (H9FECC)   ·   deployed live on AWS</a:t>
-            </a:r>
             <a:endParaRPr lang="en-US" sz="1250" dirty="0"/>
           </a:p>
         </p:txBody>

--- a/ppt/GundetiSachinReddy_X23432721_smart-waste-management.pptx
+++ b/ppt/GundetiSachinReddy_X23432721_smart-waste-management.pptx
@@ -1124,7 +1124,7 @@
     <p:bg>
       <p:bgPr>
         <a:solidFill>
-          <a:srgbClr val="14261A"/>
+          <a:srgbClr val="1C2022"/>
         </a:solidFill>
       </p:bgPr>
     </p:bg>
@@ -1150,8 +1150,89 @@
         </p:nvSpPr>
         <p:spPr>
           <a:xfrm>
-            <a:off x="658368" y="777240"/>
-            <a:ext cx="10607040" cy="1280160"/>
+            <a:off x="9082735" y="-548640"/>
+            <a:ext cx="3108960" cy="3108960"/>
+          </a:xfrm>
+          <a:prstGeom prst="rect">
+            <a:avLst/>
+          </a:prstGeom>
+          <a:noFill/>
+          <a:ln/>
+        </p:spPr>
+        <p:txBody>
+          <a:bodyPr wrap="square" lIns="0" tIns="0" rIns="0" bIns="0" rtlCol="0" anchor="ctr"/>
+          <a:lstStyle/>
+          <a:p>
+            <a:pPr algn="r" indent="0" marL="0">
+              <a:buNone/>
+            </a:pPr>
+            <a:r>
+              <a:rPr lang="en-US" sz="20000" b="1" dirty="0">
+                <a:solidFill>
+                  <a:srgbClr val="007A6C"/>
+                </a:solidFill>
+                <a:latin typeface="Cambria" pitchFamily="34" charset="0"/>
+                <a:ea typeface="Cambria" pitchFamily="34" charset="-122"/>
+                <a:cs typeface="Cambria" pitchFamily="34" charset="-120"/>
+              </a:rPr>
+              <a:t>“</a:t>
+            </a:r>
+            <a:endParaRPr lang="en-US" sz="20000" dirty="0"/>
+          </a:p>
+        </p:txBody>
+      </p:sp>
+      <p:sp>
+        <p:nvSpPr>
+          <p:cNvPr id="3" name="Text 1"/>
+          <p:cNvSpPr/>
+          <p:nvPr/>
+        </p:nvSpPr>
+        <p:spPr>
+          <a:xfrm>
+            <a:off x="758952" y="1645920"/>
+            <a:ext cx="10637215" cy="1645920"/>
+          </a:xfrm>
+          <a:prstGeom prst="rect">
+            <a:avLst/>
+          </a:prstGeom>
+          <a:noFill/>
+          <a:ln/>
+        </p:spPr>
+        <p:txBody>
+          <a:bodyPr wrap="square" rtlCol="0" anchor="t"/>
+          <a:lstStyle/>
+          <a:p>
+            <a:pPr indent="0" marL="0">
+              <a:lnSpc>
+                <a:spcPct val="98000"/>
+              </a:lnSpc>
+              <a:buNone/>
+            </a:pPr>
+            <a:r>
+              <a:rPr lang="en-US" sz="3800" b="1" dirty="0">
+                <a:solidFill>
+                  <a:srgbClr val="EEF4F2"/>
+                </a:solidFill>
+                <a:latin typeface="Cambria" pitchFamily="34" charset="0"/>
+                <a:ea typeface="Cambria" pitchFamily="34" charset="-122"/>
+                <a:cs typeface="Cambria" pitchFamily="34" charset="-120"/>
+              </a:rPr>
+              <a:t>Smart Waste Management</a:t>
+            </a:r>
+            <a:endParaRPr lang="en-US" sz="3800" dirty="0"/>
+          </a:p>
+        </p:txBody>
+      </p:sp>
+      <p:sp>
+        <p:nvSpPr>
+          <p:cNvPr id="4" name="Text 2"/>
+          <p:cNvSpPr/>
+          <p:nvPr/>
+        </p:nvSpPr>
+        <p:spPr>
+          <a:xfrm>
+            <a:off x="777240" y="3337560"/>
+            <a:ext cx="10637215" cy="365760"/>
           </a:xfrm>
           <a:prstGeom prst="rect">
             <a:avLst/>
@@ -1164,58 +1245,33 @@
           <a:lstStyle/>
           <a:p>
             <a:pPr indent="0" marL="0">
-              <a:lnSpc>
-                <a:spcPct val="108000"/>
-              </a:lnSpc>
-              <a:buNone/>
-            </a:pPr>
-            <a:r>
-              <a:rPr lang="en-US" sz="1800" dirty="0">
-                <a:solidFill>
-                  <a:srgbClr val="D2E6CE"/>
+              <a:buNone/>
+            </a:pPr>
+            <a:r>
+              <a:rPr lang="en-US" sz="1450" dirty="0">
+                <a:solidFill>
+                  <a:srgbClr val="8B98A6"/>
                 </a:solidFill>
                 <a:latin typeface="Calibri" pitchFamily="34" charset="0"/>
                 <a:ea typeface="Calibri" pitchFamily="34" charset="-122"/>
                 <a:cs typeface="Calibri" pitchFamily="34" charset="-120"/>
               </a:rPr>
-              <a:t>Municipal collection runs on a fixed calendar, not on what is inside each bin — trucks roll to bins that are not yet full, while overflow, fire or gas build-up stays invisible until the next visit.</a:t>
-            </a:r>
-            <a:endParaRPr lang="en-US" sz="1800" dirty="0"/>
-          </a:p>
-        </p:txBody>
-      </p:sp>
-      <p:sp>
-        <p:nvSpPr>
-          <p:cNvPr id="3" name="Shape 1"/>
-          <p:cNvSpPr/>
-          <p:nvPr/>
-        </p:nvSpPr>
-        <p:spPr>
-          <a:xfrm>
-            <a:off x="1097280" y="2377440"/>
-            <a:ext cx="9966960" cy="2011680"/>
-          </a:xfrm>
-          <a:prstGeom prst="roundRect">
-            <a:avLst>
-              <a:gd name="adj" fmla="val 5455"/>
-            </a:avLst>
-          </a:prstGeom>
-          <a:solidFill>
-            <a:srgbClr val="1E6B34"/>
-          </a:solidFill>
-          <a:ln/>
-        </p:spPr>
-      </p:sp>
-      <p:sp>
-        <p:nvSpPr>
-          <p:cNvPr id="4" name="Text 2"/>
-          <p:cNvSpPr/>
-          <p:nvPr/>
-        </p:nvSpPr>
-        <p:spPr>
-          <a:xfrm>
-            <a:off x="1463040" y="2651760"/>
-            <a:ext cx="9235440" cy="1005840"/>
+              <a:t>Gundeti Sachin Reddy   ·   X23432721</a:t>
+            </a:r>
+            <a:endParaRPr lang="en-US" sz="1450" dirty="0"/>
+          </a:p>
+        </p:txBody>
+      </p:sp>
+      <p:sp>
+        <p:nvSpPr>
+          <p:cNvPr id="5" name="Text 3"/>
+          <p:cNvSpPr/>
+          <p:nvPr/>
+        </p:nvSpPr>
+        <p:spPr>
+          <a:xfrm>
+            <a:off x="777240" y="3931920"/>
+            <a:ext cx="8138160" cy="1325880"/>
           </a:xfrm>
           <a:prstGeom prst="rect">
             <a:avLst/>
@@ -1228,126 +1284,23 @@
           <a:lstStyle/>
           <a:p>
             <a:pPr indent="0" marL="0">
-              <a:buNone/>
-            </a:pPr>
-            <a:r>
-              <a:rPr lang="en-US" sz="3600" b="1" dirty="0">
-                <a:solidFill>
-                  <a:srgbClr val="FFFFFF"/>
-                </a:solidFill>
-                <a:latin typeface="Century Schoolbook" pitchFamily="34" charset="0"/>
-                <a:ea typeface="Century Schoolbook" pitchFamily="34" charset="-122"/>
-                <a:cs typeface="Century Schoolbook" pitchFamily="34" charset="-120"/>
-              </a:rPr>
-              <a:t>Smart Waste Management</a:t>
-            </a:r>
-            <a:endParaRPr lang="en-US" sz="3600" dirty="0"/>
-          </a:p>
-        </p:txBody>
-      </p:sp>
-      <p:sp>
-        <p:nvSpPr>
-          <p:cNvPr id="5" name="Text 3"/>
-          <p:cNvSpPr/>
-          <p:nvPr/>
-        </p:nvSpPr>
-        <p:spPr>
-          <a:xfrm>
-            <a:off x="1481328" y="3703320"/>
-            <a:ext cx="9144000" cy="457200"/>
-          </a:xfrm>
-          <a:prstGeom prst="rect">
-            <a:avLst/>
-          </a:prstGeom>
-          <a:noFill/>
-          <a:ln/>
-        </p:spPr>
-        <p:txBody>
-          <a:bodyPr wrap="square" rtlCol="0" anchor="ctr"/>
-          <a:lstStyle/>
-          <a:p>
-            <a:pPr indent="0" marL="0">
-              <a:buNone/>
-            </a:pPr>
-            <a:r>
-              <a:rPr lang="en-US" sz="1500" dirty="0">
-                <a:solidFill>
-                  <a:srgbClr val="D2E6CE"/>
+              <a:lnSpc>
+                <a:spcPct val="130000"/>
+              </a:lnSpc>
+              <a:buNone/>
+            </a:pPr>
+            <a:r>
+              <a:rPr lang="en-US" sz="1400" dirty="0">
+                <a:solidFill>
+                  <a:srgbClr val="EEF4F2"/>
                 </a:solidFill>
                 <a:latin typeface="Calibri" pitchFamily="34" charset="0"/>
                 <a:ea typeface="Calibri" pitchFamily="34" charset="-122"/>
                 <a:cs typeface="Calibri" pitchFamily="34" charset="-120"/>
               </a:rPr>
-              <a:t>Gundeti Sachin Reddy   ·   X23432721</a:t>
-            </a:r>
-            <a:endParaRPr lang="en-US" sz="1500" dirty="0"/>
-          </a:p>
-        </p:txBody>
-      </p:sp>
-      <p:sp>
-        <p:nvSpPr>
-          <p:cNvPr id="6" name="Text 4"/>
-          <p:cNvSpPr/>
-          <p:nvPr/>
-        </p:nvSpPr>
-        <p:spPr>
-          <a:xfrm>
-            <a:off x="1097280" y="4709160"/>
-            <a:ext cx="10972800" cy="457200"/>
-          </a:xfrm>
-          <a:prstGeom prst="rect">
-            <a:avLst/>
-          </a:prstGeom>
-          <a:noFill/>
-          <a:ln/>
-        </p:spPr>
-        <p:txBody>
-          <a:bodyPr wrap="square" lIns="0" tIns="0" rIns="0" bIns="0" rtlCol="0" anchor="ctr"/>
-          <a:lstStyle/>
-          <a:p>
-            <a:pPr indent="0" marL="0">
-              <a:buNone/>
-            </a:pPr>
-            <a:r>
-              <a:rPr lang="en-US" sz="1550" b="1" dirty="0">
-                <a:solidFill>
-                  <a:srgbClr val="D9A62E"/>
-                </a:solidFill>
-                <a:latin typeface="Calibri" pitchFamily="34" charset="0"/>
-                <a:ea typeface="Calibri" pitchFamily="34" charset="-122"/>
-                <a:cs typeface="Calibri" pitchFamily="34" charset="-120"/>
-              </a:rPr>
-              <a:t>Overflow fill &gt; 85%      ·      Fire temp &gt; 55 °C      ·      Gas &gt; 400 ppm</a:t>
-            </a:r>
-            <a:endParaRPr lang="en-US" sz="1550" dirty="0"/>
-          </a:p>
-        </p:txBody>
-      </p:sp>
-      <p:sp>
-        <p:nvSpPr>
-          <p:cNvPr id="7" name="Text 5"/>
-          <p:cNvSpPr/>
-          <p:nvPr/>
-        </p:nvSpPr>
-        <p:spPr>
-          <a:xfrm>
-            <a:off x="658368" y="6355080"/>
-            <a:ext cx="10972800" cy="320040"/>
-          </a:xfrm>
-          <a:prstGeom prst="rect">
-            <a:avLst/>
-          </a:prstGeom>
-          <a:noFill/>
-          <a:ln/>
-        </p:spPr>
-        <p:txBody>
-          <a:bodyPr wrap="square" rtlCol="0" anchor="ctr"/>
-          <a:lstStyle/>
-          <a:p>
-            <a:pPr indent="0" marL="0">
-              <a:buNone/>
-            </a:pPr>
-            <a:endParaRPr lang="en-US" sz="1250" dirty="0"/>
+              <a:t>Municipal collection runs on a fixed calendar, not on what is inside each bin — trucks roll to bins that are not yet full, while overflow, fire or gas build-up stays invisible until the next visit.</a:t>
+            </a:r>
+            <a:endParaRPr lang="en-US" sz="1400" dirty="0"/>
           </a:p>
         </p:txBody>
       </p:sp>
@@ -1365,7 +1318,7 @@
     <p:bg>
       <p:bgPr>
         <a:solidFill>
-          <a:srgbClr val="FFFFFF"/>
+          <a:srgbClr val="1C2022"/>
         </a:solidFill>
       </p:bgPr>
     </p:bg>
@@ -1391,17 +1344,17 @@
         </p:nvSpPr>
         <p:spPr>
           <a:xfrm>
-            <a:off x="640080" y="457200"/>
-            <a:ext cx="10972800" cy="640080"/>
-          </a:xfrm>
-          <a:prstGeom prst="rect">
-            <a:avLst/>
-          </a:prstGeom>
-          <a:noFill/>
-          <a:ln/>
-        </p:spPr>
-        <p:txBody>
-          <a:bodyPr wrap="square" rtlCol="0" anchor="ctr"/>
+            <a:off x="777240" y="731520"/>
+            <a:ext cx="914400" cy="640080"/>
+          </a:xfrm>
+          <a:prstGeom prst="rect">
+            <a:avLst/>
+          </a:prstGeom>
+          <a:noFill/>
+          <a:ln/>
+        </p:spPr>
+        <p:txBody>
+          <a:bodyPr wrap="square" lIns="0" tIns="0" rIns="0" bIns="0" rtlCol="0" anchor="ctr"/>
           <a:lstStyle/>
           <a:p>
             <a:pPr indent="0" marL="0">
@@ -1410,40 +1363,118 @@
             <a:r>
               <a:rPr lang="en-US" sz="3000" b="1" dirty="0">
                 <a:solidFill>
-                  <a:srgbClr val="152619"/>
-                </a:solidFill>
-                <a:latin typeface="Century Schoolbook" pitchFamily="34" charset="0"/>
-                <a:ea typeface="Century Schoolbook" pitchFamily="34" charset="-122"/>
-                <a:cs typeface="Century Schoolbook" pitchFamily="34" charset="-120"/>
+                  <a:srgbClr val="22A294"/>
+                </a:solidFill>
+                <a:latin typeface="Cambria" pitchFamily="34" charset="0"/>
+                <a:ea typeface="Cambria" pitchFamily="34" charset="-122"/>
+                <a:cs typeface="Cambria" pitchFamily="34" charset="-120"/>
+              </a:rPr>
+              <a:t>01</a:t>
+            </a:r>
+            <a:endParaRPr lang="en-US" sz="3000" dirty="0"/>
+          </a:p>
+        </p:txBody>
+      </p:sp>
+      <p:sp>
+        <p:nvSpPr>
+          <p:cNvPr id="3" name="Text 1"/>
+          <p:cNvSpPr/>
+          <p:nvPr/>
+        </p:nvSpPr>
+        <p:spPr>
+          <a:xfrm>
+            <a:off x="1645920" y="905256"/>
+            <a:ext cx="9768535" cy="274320"/>
+          </a:xfrm>
+          <a:prstGeom prst="rect">
+            <a:avLst/>
+          </a:prstGeom>
+          <a:noFill/>
+          <a:ln/>
+        </p:spPr>
+        <p:txBody>
+          <a:bodyPr wrap="square" lIns="0" tIns="0" rIns="0" bIns="0" rtlCol="0" anchor="ctr"/>
+          <a:lstStyle/>
+          <a:p>
+            <a:pPr indent="0" marL="0">
+              <a:buNone/>
+            </a:pPr>
+            <a:r>
+              <a:rPr lang="en-US" sz="1100" b="1" spc="200" kern="0" dirty="0">
+                <a:solidFill>
+                  <a:srgbClr val="8B98A6"/>
+                </a:solidFill>
+                <a:latin typeface="Calibri" pitchFamily="34" charset="0"/>
+                <a:ea typeface="Calibri" pitchFamily="34" charset="-122"/>
+                <a:cs typeface="Calibri" pitchFamily="34" charset="-120"/>
+              </a:rPr>
+              <a:t>ARCHITECTURE</a:t>
+            </a:r>
+            <a:endParaRPr lang="en-US" sz="1100" dirty="0"/>
+          </a:p>
+        </p:txBody>
+      </p:sp>
+      <p:sp>
+        <p:nvSpPr>
+          <p:cNvPr id="4" name="Text 2"/>
+          <p:cNvSpPr/>
+          <p:nvPr/>
+        </p:nvSpPr>
+        <p:spPr>
+          <a:xfrm>
+            <a:off x="777240" y="1380744"/>
+            <a:ext cx="10637215" cy="640080"/>
+          </a:xfrm>
+          <a:prstGeom prst="rect">
+            <a:avLst/>
+          </a:prstGeom>
+          <a:noFill/>
+          <a:ln/>
+        </p:spPr>
+        <p:txBody>
+          <a:bodyPr wrap="square" lIns="0" tIns="0" rIns="0" bIns="0" rtlCol="0" anchor="ctr"/>
+          <a:lstStyle/>
+          <a:p>
+            <a:pPr indent="0" marL="0">
+              <a:buNone/>
+            </a:pPr>
+            <a:r>
+              <a:rPr lang="en-US" sz="2300" b="1" dirty="0">
+                <a:solidFill>
+                  <a:srgbClr val="EEF4F2"/>
+                </a:solidFill>
+                <a:latin typeface="Cambria" pitchFamily="34" charset="0"/>
+                <a:ea typeface="Cambria" pitchFamily="34" charset="-122"/>
+                <a:cs typeface="Cambria" pitchFamily="34" charset="-120"/>
               </a:rPr>
               <a:t>What I Built — Edge to Cloud</a:t>
             </a:r>
-            <a:endParaRPr lang="en-US" sz="3000" dirty="0"/>
-          </a:p>
-        </p:txBody>
-      </p:sp>
-      <p:sp>
-        <p:nvSpPr>
-          <p:cNvPr id="3" name="Shape 1"/>
-          <p:cNvSpPr/>
-          <p:nvPr/>
-        </p:nvSpPr>
-        <p:spPr>
-          <a:xfrm>
-            <a:off x="640080" y="1874520"/>
-            <a:ext cx="2286000" cy="1280160"/>
+            <a:endParaRPr lang="en-US" sz="2300" dirty="0"/>
+          </a:p>
+        </p:txBody>
+      </p:sp>
+      <p:sp>
+        <p:nvSpPr>
+          <p:cNvPr id="5" name="Shape 3"/>
+          <p:cNvSpPr/>
+          <p:nvPr/>
+        </p:nvSpPr>
+        <p:spPr>
+          <a:xfrm>
+            <a:off x="777240" y="2971800"/>
+            <a:ext cx="1391869" cy="1965960"/>
           </a:xfrm>
           <a:prstGeom prst="roundRect">
             <a:avLst>
-              <a:gd name="adj" fmla="val 7143"/>
+              <a:gd name="adj" fmla="val 2628"/>
             </a:avLst>
           </a:prstGeom>
           <a:solidFill>
-            <a:srgbClr val="EEF4EC"/>
+            <a:srgbClr val="22A294"/>
           </a:solidFill>
-          <a:ln w="19050">
+          <a:ln w="12700">
             <a:solidFill>
-              <a:srgbClr val="5E9A62"/>
+              <a:srgbClr val="22A294"/>
             </a:solidFill>
             <a:prstDash val="solid"/>
           </a:ln>
@@ -1451,34 +1482,14 @@
       </p:sp>
       <p:sp>
         <p:nvSpPr>
-          <p:cNvPr id="4" name="Shape 2"/>
-          <p:cNvSpPr/>
-          <p:nvPr/>
-        </p:nvSpPr>
-        <p:spPr>
-          <a:xfrm>
-            <a:off x="1691640" y="2039112"/>
-            <a:ext cx="182880" cy="182880"/>
-          </a:xfrm>
-          <a:prstGeom prst="ellipse">
-            <a:avLst/>
-          </a:prstGeom>
-          <a:solidFill>
-            <a:srgbClr val="5E9A62"/>
-          </a:solidFill>
-          <a:ln/>
-        </p:spPr>
-      </p:sp>
-      <p:sp>
-        <p:nvSpPr>
-          <p:cNvPr id="5" name="Text 3"/>
-          <p:cNvSpPr/>
-          <p:nvPr/>
-        </p:nvSpPr>
-        <p:spPr>
-          <a:xfrm>
-            <a:off x="612648" y="2258568"/>
-            <a:ext cx="2340864" cy="365760"/>
+          <p:cNvPr id="6" name="Text 4"/>
+          <p:cNvSpPr/>
+          <p:nvPr/>
+        </p:nvSpPr>
+        <p:spPr>
+          <a:xfrm>
+            <a:off x="923544" y="3154680"/>
+            <a:ext cx="1099261" cy="320040"/>
           </a:xfrm>
           <a:prstGeom prst="rect">
             <a:avLst/>
@@ -1490,34 +1501,201 @@
           <a:bodyPr wrap="square" lIns="0" tIns="0" rIns="0" bIns="0" rtlCol="0" anchor="ctr"/>
           <a:lstStyle/>
           <a:p>
-            <a:pPr algn="ctr" indent="0" marL="0">
-              <a:buNone/>
-            </a:pPr>
-            <a:r>
-              <a:rPr lang="en-US" sz="1450" b="1" dirty="0">
-                <a:solidFill>
-                  <a:srgbClr val="152619"/>
+            <a:pPr indent="0" marL="0">
+              <a:buNone/>
+            </a:pPr>
+            <a:r>
+              <a:rPr lang="en-US" sz="1100" dirty="0">
+                <a:solidFill>
+                  <a:srgbClr val="FFFFFF"/>
+                </a:solidFill>
+                <a:latin typeface="Consolas" pitchFamily="34" charset="0"/>
+                <a:ea typeface="Consolas" pitchFamily="34" charset="-122"/>
+                <a:cs typeface="Consolas" pitchFamily="34" charset="-120"/>
+              </a:rPr>
+              <a:t>01</a:t>
+            </a:r>
+            <a:endParaRPr lang="en-US" sz="1100" dirty="0"/>
+          </a:p>
+        </p:txBody>
+      </p:sp>
+      <p:sp>
+        <p:nvSpPr>
+          <p:cNvPr id="7" name="Text 5"/>
+          <p:cNvSpPr/>
+          <p:nvPr/>
+        </p:nvSpPr>
+        <p:spPr>
+          <a:xfrm>
+            <a:off x="923544" y="3593592"/>
+            <a:ext cx="1099261" cy="868680"/>
+          </a:xfrm>
+          <a:prstGeom prst="rect">
+            <a:avLst/>
+          </a:prstGeom>
+          <a:noFill/>
+          <a:ln/>
+        </p:spPr>
+        <p:txBody>
+          <a:bodyPr wrap="square" lIns="0" tIns="0" rIns="0" bIns="0" rtlCol="0" anchor="t"/>
+          <a:lstStyle/>
+          <a:p>
+            <a:pPr indent="0" marL="0">
+              <a:lnSpc>
+                <a:spcPct val="96000"/>
+              </a:lnSpc>
+              <a:buNone/>
+            </a:pPr>
+            <a:r>
+              <a:rPr lang="en-US" sz="1300" b="1" dirty="0">
+                <a:solidFill>
+                  <a:srgbClr val="FFFFFF"/>
+                </a:solidFill>
+                <a:latin typeface="Cambria" pitchFamily="34" charset="0"/>
+                <a:ea typeface="Cambria" pitchFamily="34" charset="-122"/>
+                <a:cs typeface="Cambria" pitchFamily="34" charset="-120"/>
+              </a:rPr>
+              <a:t>Bin sensors</a:t>
+            </a:r>
+            <a:endParaRPr lang="en-US" sz="1300" dirty="0"/>
+          </a:p>
+        </p:txBody>
+      </p:sp>
+      <p:sp>
+        <p:nvSpPr>
+          <p:cNvPr id="8" name="Text 6"/>
+          <p:cNvSpPr/>
+          <p:nvPr/>
+        </p:nvSpPr>
+        <p:spPr>
+          <a:xfrm>
+            <a:off x="923544" y="4453128"/>
+            <a:ext cx="1099261" cy="365760"/>
+          </a:xfrm>
+          <a:prstGeom prst="rect">
+            <a:avLst/>
+          </a:prstGeom>
+          <a:noFill/>
+          <a:ln/>
+        </p:spPr>
+        <p:txBody>
+          <a:bodyPr wrap="square" lIns="0" tIns="0" rIns="0" bIns="0" rtlCol="0" anchor="ctr"/>
+          <a:lstStyle/>
+          <a:p>
+            <a:pPr indent="0" marL="0">
+              <a:buNone/>
+            </a:pPr>
+            <a:r>
+              <a:rPr lang="en-US" sz="900" dirty="0">
+                <a:solidFill>
+                  <a:srgbClr val="FFFFFF"/>
                 </a:solidFill>
                 <a:latin typeface="Calibri" pitchFamily="34" charset="0"/>
                 <a:ea typeface="Calibri" pitchFamily="34" charset="-122"/>
                 <a:cs typeface="Calibri" pitchFamily="34" charset="-120"/>
               </a:rPr>
-              <a:t>Bin sensors</a:t>
-            </a:r>
-            <a:endParaRPr lang="en-US" sz="1450" dirty="0"/>
-          </a:p>
-        </p:txBody>
-      </p:sp>
-      <p:sp>
-        <p:nvSpPr>
-          <p:cNvPr id="6" name="Text 4"/>
-          <p:cNvSpPr/>
-          <p:nvPr/>
-        </p:nvSpPr>
-        <p:spPr>
-          <a:xfrm>
-            <a:off x="640080" y="2606040"/>
-            <a:ext cx="2286000" cy="411480"/>
+              <a:t>10 · 5 types · 2 districts</a:t>
+            </a:r>
+            <a:endParaRPr lang="en-US" sz="900" dirty="0"/>
+          </a:p>
+        </p:txBody>
+      </p:sp>
+      <p:sp>
+        <p:nvSpPr>
+          <p:cNvPr id="9" name="Shape 7"/>
+          <p:cNvSpPr/>
+          <p:nvPr/>
+        </p:nvSpPr>
+        <p:spPr>
+          <a:xfrm>
+            <a:off x="2242261" y="3845052"/>
+            <a:ext cx="310896" cy="219456"/>
+          </a:xfrm>
+          <a:prstGeom prst="rightArrow">
+            <a:avLst/>
+          </a:prstGeom>
+          <a:solidFill>
+            <a:srgbClr val="8B98A6"/>
+          </a:solidFill>
+          <a:ln/>
+        </p:spPr>
+      </p:sp>
+      <p:sp>
+        <p:nvSpPr>
+          <p:cNvPr id="10" name="Shape 8"/>
+          <p:cNvSpPr/>
+          <p:nvPr/>
+        </p:nvSpPr>
+        <p:spPr>
+          <a:xfrm>
+            <a:off x="2626309" y="2971800"/>
+            <a:ext cx="1391869" cy="1965960"/>
+          </a:xfrm>
+          <a:prstGeom prst="roundRect">
+            <a:avLst>
+              <a:gd name="adj" fmla="val 2628"/>
+            </a:avLst>
+          </a:prstGeom>
+          <a:solidFill>
+            <a:srgbClr val="22A294"/>
+          </a:solidFill>
+          <a:ln w="12700">
+            <a:solidFill>
+              <a:srgbClr val="22A294"/>
+            </a:solidFill>
+            <a:prstDash val="solid"/>
+          </a:ln>
+        </p:spPr>
+      </p:sp>
+      <p:sp>
+        <p:nvSpPr>
+          <p:cNvPr id="11" name="Text 9"/>
+          <p:cNvSpPr/>
+          <p:nvPr/>
+        </p:nvSpPr>
+        <p:spPr>
+          <a:xfrm>
+            <a:off x="2772613" y="3154680"/>
+            <a:ext cx="1099261" cy="320040"/>
+          </a:xfrm>
+          <a:prstGeom prst="rect">
+            <a:avLst/>
+          </a:prstGeom>
+          <a:noFill/>
+          <a:ln/>
+        </p:spPr>
+        <p:txBody>
+          <a:bodyPr wrap="square" lIns="0" tIns="0" rIns="0" bIns="0" rtlCol="0" anchor="ctr"/>
+          <a:lstStyle/>
+          <a:p>
+            <a:pPr indent="0" marL="0">
+              <a:buNone/>
+            </a:pPr>
+            <a:r>
+              <a:rPr lang="en-US" sz="1100" dirty="0">
+                <a:solidFill>
+                  <a:srgbClr val="FFFFFF"/>
+                </a:solidFill>
+                <a:latin typeface="Consolas" pitchFamily="34" charset="0"/>
+                <a:ea typeface="Consolas" pitchFamily="34" charset="-122"/>
+                <a:cs typeface="Consolas" pitchFamily="34" charset="-120"/>
+              </a:rPr>
+              <a:t>02</a:t>
+            </a:r>
+            <a:endParaRPr lang="en-US" sz="1100" dirty="0"/>
+          </a:p>
+        </p:txBody>
+      </p:sp>
+      <p:sp>
+        <p:nvSpPr>
+          <p:cNvPr id="12" name="Text 10"/>
+          <p:cNvSpPr/>
+          <p:nvPr/>
+        </p:nvSpPr>
+        <p:spPr>
+          <a:xfrm>
+            <a:off x="2772613" y="3593592"/>
+            <a:ext cx="1099261" cy="868680"/>
           </a:xfrm>
           <a:prstGeom prst="rect">
             <a:avLst/>
@@ -1529,71 +1707,108 @@
           <a:bodyPr wrap="square" lIns="0" tIns="0" rIns="0" bIns="0" rtlCol="0" anchor="t"/>
           <a:lstStyle/>
           <a:p>
-            <a:pPr algn="ctr" indent="0" marL="0">
-              <a:buNone/>
-            </a:pPr>
-            <a:r>
-              <a:rPr lang="en-US" sz="1050" dirty="0">
-                <a:solidFill>
-                  <a:srgbClr val="5C6E58"/>
+            <a:pPr indent="0" marL="0">
+              <a:lnSpc>
+                <a:spcPct val="96000"/>
+              </a:lnSpc>
+              <a:buNone/>
+            </a:pPr>
+            <a:r>
+              <a:rPr lang="en-US" sz="1300" b="1" dirty="0">
+                <a:solidFill>
+                  <a:srgbClr val="FFFFFF"/>
+                </a:solidFill>
+                <a:latin typeface="Cambria" pitchFamily="34" charset="0"/>
+                <a:ea typeface="Cambria" pitchFamily="34" charset="-122"/>
+                <a:cs typeface="Cambria" pitchFamily="34" charset="-120"/>
+              </a:rPr>
+              <a:t>Fog node (EC2)</a:t>
+            </a:r>
+            <a:endParaRPr lang="en-US" sz="1300" dirty="0"/>
+          </a:p>
+        </p:txBody>
+      </p:sp>
+      <p:sp>
+        <p:nvSpPr>
+          <p:cNvPr id="13" name="Text 11"/>
+          <p:cNvSpPr/>
+          <p:nvPr/>
+        </p:nvSpPr>
+        <p:spPr>
+          <a:xfrm>
+            <a:off x="2772613" y="4453128"/>
+            <a:ext cx="1099261" cy="365760"/>
+          </a:xfrm>
+          <a:prstGeom prst="rect">
+            <a:avLst/>
+          </a:prstGeom>
+          <a:noFill/>
+          <a:ln/>
+        </p:spPr>
+        <p:txBody>
+          <a:bodyPr wrap="square" lIns="0" tIns="0" rIns="0" bIns="0" rtlCol="0" anchor="ctr"/>
+          <a:lstStyle/>
+          <a:p>
+            <a:pPr indent="0" marL="0">
+              <a:buNone/>
+            </a:pPr>
+            <a:r>
+              <a:rPr lang="en-US" sz="900" dirty="0">
+                <a:solidFill>
+                  <a:srgbClr val="FFFFFF"/>
                 </a:solidFill>
                 <a:latin typeface="Calibri" pitchFamily="34" charset="0"/>
                 <a:ea typeface="Calibri" pitchFamily="34" charset="-122"/>
                 <a:cs typeface="Calibri" pitchFamily="34" charset="-120"/>
               </a:rPr>
-              <a:t>10 · 5 types · 2 districts</a:t>
-            </a:r>
-            <a:endParaRPr lang="en-US" sz="1050" dirty="0"/>
-          </a:p>
-        </p:txBody>
-      </p:sp>
-      <p:sp>
-        <p:nvSpPr>
-          <p:cNvPr id="7" name="Shape 5"/>
-          <p:cNvSpPr/>
-          <p:nvPr/>
-        </p:nvSpPr>
-        <p:spPr>
-          <a:xfrm>
-            <a:off x="2944368" y="2514600"/>
-            <a:ext cx="1975104" cy="0"/>
-          </a:xfrm>
-          <a:prstGeom prst="line">
-            <a:avLst/>
-          </a:prstGeom>
-          <a:noFill/>
-          <a:ln w="25400">
-            <a:solidFill>
-              <a:srgbClr val="5E9A62"/>
-            </a:solidFill>
-            <a:prstDash val="solid"/>
-            <a:headEnd type="none"/>
-            <a:tailEnd type="triangle"/>
-          </a:ln>
-        </p:spPr>
-      </p:sp>
-      <p:sp>
-        <p:nvSpPr>
-          <p:cNvPr id="8" name="Shape 6"/>
-          <p:cNvSpPr/>
-          <p:nvPr/>
-        </p:nvSpPr>
-        <p:spPr>
-          <a:xfrm>
-            <a:off x="4937760" y="1874520"/>
-            <a:ext cx="2286000" cy="1280160"/>
+              <a:t>windows · hazard alerts</a:t>
+            </a:r>
+            <a:endParaRPr lang="en-US" sz="900" dirty="0"/>
+          </a:p>
+        </p:txBody>
+      </p:sp>
+      <p:sp>
+        <p:nvSpPr>
+          <p:cNvPr id="14" name="Shape 12"/>
+          <p:cNvSpPr/>
+          <p:nvPr/>
+        </p:nvSpPr>
+        <p:spPr>
+          <a:xfrm>
+            <a:off x="4091330" y="3845052"/>
+            <a:ext cx="310896" cy="219456"/>
+          </a:xfrm>
+          <a:prstGeom prst="rightArrow">
+            <a:avLst/>
+          </a:prstGeom>
+          <a:solidFill>
+            <a:srgbClr val="8B98A6"/>
+          </a:solidFill>
+          <a:ln/>
+        </p:spPr>
+      </p:sp>
+      <p:sp>
+        <p:nvSpPr>
+          <p:cNvPr id="15" name="Shape 13"/>
+          <p:cNvSpPr/>
+          <p:nvPr/>
+        </p:nvSpPr>
+        <p:spPr>
+          <a:xfrm>
+            <a:off x="4475378" y="2971800"/>
+            <a:ext cx="1391869" cy="1965960"/>
           </a:xfrm>
           <a:prstGeom prst="roundRect">
             <a:avLst>
-              <a:gd name="adj" fmla="val 7143"/>
+              <a:gd name="adj" fmla="val 2628"/>
             </a:avLst>
           </a:prstGeom>
           <a:solidFill>
-            <a:srgbClr val="EEF4EC"/>
+            <a:srgbClr val="262B2E"/>
           </a:solidFill>
-          <a:ln w="19050">
+          <a:ln w="12700">
             <a:solidFill>
-              <a:srgbClr val="5E9A62"/>
+              <a:srgbClr val="3A3F42"/>
             </a:solidFill>
             <a:prstDash val="solid"/>
           </a:ln>
@@ -1601,34 +1816,14 @@
       </p:sp>
       <p:sp>
         <p:nvSpPr>
-          <p:cNvPr id="9" name="Shape 7"/>
-          <p:cNvSpPr/>
-          <p:nvPr/>
-        </p:nvSpPr>
-        <p:spPr>
-          <a:xfrm>
-            <a:off x="5989320" y="2039112"/>
-            <a:ext cx="182880" cy="182880"/>
-          </a:xfrm>
-          <a:prstGeom prst="ellipse">
-            <a:avLst/>
-          </a:prstGeom>
-          <a:solidFill>
-            <a:srgbClr val="5E9A62"/>
-          </a:solidFill>
-          <a:ln/>
-        </p:spPr>
-      </p:sp>
-      <p:sp>
-        <p:nvSpPr>
-          <p:cNvPr id="10" name="Text 8"/>
-          <p:cNvSpPr/>
-          <p:nvPr/>
-        </p:nvSpPr>
-        <p:spPr>
-          <a:xfrm>
-            <a:off x="4910328" y="2258568"/>
-            <a:ext cx="2340864" cy="365760"/>
+          <p:cNvPr id="16" name="Text 14"/>
+          <p:cNvSpPr/>
+          <p:nvPr/>
+        </p:nvSpPr>
+        <p:spPr>
+          <a:xfrm>
+            <a:off x="4621682" y="3154680"/>
+            <a:ext cx="1099261" cy="320040"/>
           </a:xfrm>
           <a:prstGeom prst="rect">
             <a:avLst/>
@@ -1640,34 +1835,201 @@
           <a:bodyPr wrap="square" lIns="0" tIns="0" rIns="0" bIns="0" rtlCol="0" anchor="ctr"/>
           <a:lstStyle/>
           <a:p>
-            <a:pPr algn="ctr" indent="0" marL="0">
-              <a:buNone/>
-            </a:pPr>
-            <a:r>
-              <a:rPr lang="en-US" sz="1450" b="1" dirty="0">
-                <a:solidFill>
-                  <a:srgbClr val="152619"/>
+            <a:pPr indent="0" marL="0">
+              <a:buNone/>
+            </a:pPr>
+            <a:r>
+              <a:rPr lang="en-US" sz="1100" dirty="0">
+                <a:solidFill>
+                  <a:srgbClr val="22A294"/>
+                </a:solidFill>
+                <a:latin typeface="Consolas" pitchFamily="34" charset="0"/>
+                <a:ea typeface="Consolas" pitchFamily="34" charset="-122"/>
+                <a:cs typeface="Consolas" pitchFamily="34" charset="-120"/>
+              </a:rPr>
+              <a:t>03</a:t>
+            </a:r>
+            <a:endParaRPr lang="en-US" sz="1100" dirty="0"/>
+          </a:p>
+        </p:txBody>
+      </p:sp>
+      <p:sp>
+        <p:nvSpPr>
+          <p:cNvPr id="17" name="Text 15"/>
+          <p:cNvSpPr/>
+          <p:nvPr/>
+        </p:nvSpPr>
+        <p:spPr>
+          <a:xfrm>
+            <a:off x="4621682" y="3593592"/>
+            <a:ext cx="1099261" cy="868680"/>
+          </a:xfrm>
+          <a:prstGeom prst="rect">
+            <a:avLst/>
+          </a:prstGeom>
+          <a:noFill/>
+          <a:ln/>
+        </p:spPr>
+        <p:txBody>
+          <a:bodyPr wrap="square" lIns="0" tIns="0" rIns="0" bIns="0" rtlCol="0" anchor="t"/>
+          <a:lstStyle/>
+          <a:p>
+            <a:pPr indent="0" marL="0">
+              <a:lnSpc>
+                <a:spcPct val="96000"/>
+              </a:lnSpc>
+              <a:buNone/>
+            </a:pPr>
+            <a:r>
+              <a:rPr lang="en-US" sz="1300" b="1" dirty="0">
+                <a:solidFill>
+                  <a:srgbClr val="EEF4F2"/>
+                </a:solidFill>
+                <a:latin typeface="Cambria" pitchFamily="34" charset="0"/>
+                <a:ea typeface="Cambria" pitchFamily="34" charset="-122"/>
+                <a:cs typeface="Cambria" pitchFamily="34" charset="-120"/>
+              </a:rPr>
+              <a:t>Amazon SQS</a:t>
+            </a:r>
+            <a:endParaRPr lang="en-US" sz="1300" dirty="0"/>
+          </a:p>
+        </p:txBody>
+      </p:sp>
+      <p:sp>
+        <p:nvSpPr>
+          <p:cNvPr id="18" name="Text 16"/>
+          <p:cNvSpPr/>
+          <p:nvPr/>
+        </p:nvSpPr>
+        <p:spPr>
+          <a:xfrm>
+            <a:off x="4621682" y="4453128"/>
+            <a:ext cx="1099261" cy="365760"/>
+          </a:xfrm>
+          <a:prstGeom prst="rect">
+            <a:avLst/>
+          </a:prstGeom>
+          <a:noFill/>
+          <a:ln/>
+        </p:spPr>
+        <p:txBody>
+          <a:bodyPr wrap="square" lIns="0" tIns="0" rIns="0" bIns="0" rtlCol="0" anchor="ctr"/>
+          <a:lstStyle/>
+          <a:p>
+            <a:pPr indent="0" marL="0">
+              <a:buNone/>
+            </a:pPr>
+            <a:r>
+              <a:rPr lang="en-US" sz="900" dirty="0">
+                <a:solidFill>
+                  <a:srgbClr val="8B98A6"/>
                 </a:solidFill>
                 <a:latin typeface="Calibri" pitchFamily="34" charset="0"/>
                 <a:ea typeface="Calibri" pitchFamily="34" charset="-122"/>
                 <a:cs typeface="Calibri" pitchFamily="34" charset="-120"/>
               </a:rPr>
-              <a:t>Fog node (EC2)</a:t>
-            </a:r>
-            <a:endParaRPr lang="en-US" sz="1450" dirty="0"/>
-          </a:p>
-        </p:txBody>
-      </p:sp>
-      <p:sp>
-        <p:nvSpPr>
-          <p:cNvPr id="11" name="Text 9"/>
-          <p:cNvSpPr/>
-          <p:nvPr/>
-        </p:nvSpPr>
-        <p:spPr>
-          <a:xfrm>
-            <a:off x="4937760" y="2606040"/>
-            <a:ext cx="2286000" cy="411480"/>
+              <a:t>1 summary / window</a:t>
+            </a:r>
+            <a:endParaRPr lang="en-US" sz="900" dirty="0"/>
+          </a:p>
+        </p:txBody>
+      </p:sp>
+      <p:sp>
+        <p:nvSpPr>
+          <p:cNvPr id="19" name="Shape 17"/>
+          <p:cNvSpPr/>
+          <p:nvPr/>
+        </p:nvSpPr>
+        <p:spPr>
+          <a:xfrm>
+            <a:off x="5940400" y="3845052"/>
+            <a:ext cx="310896" cy="219456"/>
+          </a:xfrm>
+          <a:prstGeom prst="rightArrow">
+            <a:avLst/>
+          </a:prstGeom>
+          <a:solidFill>
+            <a:srgbClr val="8B98A6"/>
+          </a:solidFill>
+          <a:ln/>
+        </p:spPr>
+      </p:sp>
+      <p:sp>
+        <p:nvSpPr>
+          <p:cNvPr id="20" name="Shape 18"/>
+          <p:cNvSpPr/>
+          <p:nvPr/>
+        </p:nvSpPr>
+        <p:spPr>
+          <a:xfrm>
+            <a:off x="6324448" y="2971800"/>
+            <a:ext cx="1391869" cy="1965960"/>
+          </a:xfrm>
+          <a:prstGeom prst="roundRect">
+            <a:avLst>
+              <a:gd name="adj" fmla="val 2628"/>
+            </a:avLst>
+          </a:prstGeom>
+          <a:solidFill>
+            <a:srgbClr val="262B2E"/>
+          </a:solidFill>
+          <a:ln w="12700">
+            <a:solidFill>
+              <a:srgbClr val="3A3F42"/>
+            </a:solidFill>
+            <a:prstDash val="solid"/>
+          </a:ln>
+        </p:spPr>
+      </p:sp>
+      <p:sp>
+        <p:nvSpPr>
+          <p:cNvPr id="21" name="Text 19"/>
+          <p:cNvSpPr/>
+          <p:nvPr/>
+        </p:nvSpPr>
+        <p:spPr>
+          <a:xfrm>
+            <a:off x="6470752" y="3154680"/>
+            <a:ext cx="1099261" cy="320040"/>
+          </a:xfrm>
+          <a:prstGeom prst="rect">
+            <a:avLst/>
+          </a:prstGeom>
+          <a:noFill/>
+          <a:ln/>
+        </p:spPr>
+        <p:txBody>
+          <a:bodyPr wrap="square" lIns="0" tIns="0" rIns="0" bIns="0" rtlCol="0" anchor="ctr"/>
+          <a:lstStyle/>
+          <a:p>
+            <a:pPr indent="0" marL="0">
+              <a:buNone/>
+            </a:pPr>
+            <a:r>
+              <a:rPr lang="en-US" sz="1100" dirty="0">
+                <a:solidFill>
+                  <a:srgbClr val="22A294"/>
+                </a:solidFill>
+                <a:latin typeface="Consolas" pitchFamily="34" charset="0"/>
+                <a:ea typeface="Consolas" pitchFamily="34" charset="-122"/>
+                <a:cs typeface="Consolas" pitchFamily="34" charset="-120"/>
+              </a:rPr>
+              <a:t>04</a:t>
+            </a:r>
+            <a:endParaRPr lang="en-US" sz="1100" dirty="0"/>
+          </a:p>
+        </p:txBody>
+      </p:sp>
+      <p:sp>
+        <p:nvSpPr>
+          <p:cNvPr id="22" name="Text 20"/>
+          <p:cNvSpPr/>
+          <p:nvPr/>
+        </p:nvSpPr>
+        <p:spPr>
+          <a:xfrm>
+            <a:off x="6470752" y="3593592"/>
+            <a:ext cx="1099261" cy="868680"/>
           </a:xfrm>
           <a:prstGeom prst="rect">
             <a:avLst/>
@@ -1679,71 +2041,108 @@
           <a:bodyPr wrap="square" lIns="0" tIns="0" rIns="0" bIns="0" rtlCol="0" anchor="t"/>
           <a:lstStyle/>
           <a:p>
-            <a:pPr algn="ctr" indent="0" marL="0">
-              <a:buNone/>
-            </a:pPr>
-            <a:r>
-              <a:rPr lang="en-US" sz="1050" dirty="0">
-                <a:solidFill>
-                  <a:srgbClr val="5C6E58"/>
+            <a:pPr indent="0" marL="0">
+              <a:lnSpc>
+                <a:spcPct val="96000"/>
+              </a:lnSpc>
+              <a:buNone/>
+            </a:pPr>
+            <a:r>
+              <a:rPr lang="en-US" sz="1300" b="1" dirty="0">
+                <a:solidFill>
+                  <a:srgbClr val="EEF4F2"/>
+                </a:solidFill>
+                <a:latin typeface="Cambria" pitchFamily="34" charset="0"/>
+                <a:ea typeface="Cambria" pitchFamily="34" charset="-122"/>
+                <a:cs typeface="Cambria" pitchFamily="34" charset="-120"/>
+              </a:rPr>
+              <a:t>AWS Lambda</a:t>
+            </a:r>
+            <a:endParaRPr lang="en-US" sz="1300" dirty="0"/>
+          </a:p>
+        </p:txBody>
+      </p:sp>
+      <p:sp>
+        <p:nvSpPr>
+          <p:cNvPr id="23" name="Text 21"/>
+          <p:cNvSpPr/>
+          <p:nvPr/>
+        </p:nvSpPr>
+        <p:spPr>
+          <a:xfrm>
+            <a:off x="6470752" y="4453128"/>
+            <a:ext cx="1099261" cy="365760"/>
+          </a:xfrm>
+          <a:prstGeom prst="rect">
+            <a:avLst/>
+          </a:prstGeom>
+          <a:noFill/>
+          <a:ln/>
+        </p:spPr>
+        <p:txBody>
+          <a:bodyPr wrap="square" lIns="0" tIns="0" rIns="0" bIns="0" rtlCol="0" anchor="ctr"/>
+          <a:lstStyle/>
+          <a:p>
+            <a:pPr indent="0" marL="0">
+              <a:buNone/>
+            </a:pPr>
+            <a:r>
+              <a:rPr lang="en-US" sz="900" dirty="0">
+                <a:solidFill>
+                  <a:srgbClr val="8B98A6"/>
                 </a:solidFill>
                 <a:latin typeface="Calibri" pitchFamily="34" charset="0"/>
                 <a:ea typeface="Calibri" pitchFamily="34" charset="-122"/>
                 <a:cs typeface="Calibri" pitchFamily="34" charset="-120"/>
               </a:rPr>
-              <a:t>windows · hazard alerts</a:t>
-            </a:r>
-            <a:endParaRPr lang="en-US" sz="1050" dirty="0"/>
-          </a:p>
-        </p:txBody>
-      </p:sp>
-      <p:sp>
-        <p:nvSpPr>
-          <p:cNvPr id="12" name="Shape 10"/>
-          <p:cNvSpPr/>
-          <p:nvPr/>
-        </p:nvSpPr>
-        <p:spPr>
-          <a:xfrm>
-            <a:off x="7242048" y="2514600"/>
-            <a:ext cx="1975104" cy="0"/>
-          </a:xfrm>
-          <a:prstGeom prst="line">
-            <a:avLst/>
-          </a:prstGeom>
-          <a:noFill/>
-          <a:ln w="25400">
-            <a:solidFill>
-              <a:srgbClr val="5E9A62"/>
-            </a:solidFill>
-            <a:prstDash val="solid"/>
-            <a:headEnd type="none"/>
-            <a:tailEnd type="triangle"/>
-          </a:ln>
-        </p:spPr>
-      </p:sp>
-      <p:sp>
-        <p:nvSpPr>
-          <p:cNvPr id="13" name="Shape 11"/>
-          <p:cNvSpPr/>
-          <p:nvPr/>
-        </p:nvSpPr>
-        <p:spPr>
-          <a:xfrm>
-            <a:off x="9235440" y="1874520"/>
-            <a:ext cx="2286000" cy="1280160"/>
+              <a:t>java17 ingest</a:t>
+            </a:r>
+            <a:endParaRPr lang="en-US" sz="900" dirty="0"/>
+          </a:p>
+        </p:txBody>
+      </p:sp>
+      <p:sp>
+        <p:nvSpPr>
+          <p:cNvPr id="24" name="Shape 22"/>
+          <p:cNvSpPr/>
+          <p:nvPr/>
+        </p:nvSpPr>
+        <p:spPr>
+          <a:xfrm>
+            <a:off x="7789469" y="3845052"/>
+            <a:ext cx="310896" cy="219456"/>
+          </a:xfrm>
+          <a:prstGeom prst="rightArrow">
+            <a:avLst/>
+          </a:prstGeom>
+          <a:solidFill>
+            <a:srgbClr val="8B98A6"/>
+          </a:solidFill>
+          <a:ln/>
+        </p:spPr>
+      </p:sp>
+      <p:sp>
+        <p:nvSpPr>
+          <p:cNvPr id="25" name="Shape 23"/>
+          <p:cNvSpPr/>
+          <p:nvPr/>
+        </p:nvSpPr>
+        <p:spPr>
+          <a:xfrm>
+            <a:off x="8173517" y="2971800"/>
+            <a:ext cx="1391869" cy="1965960"/>
           </a:xfrm>
           <a:prstGeom prst="roundRect">
             <a:avLst>
-              <a:gd name="adj" fmla="val 7143"/>
+              <a:gd name="adj" fmla="val 2628"/>
             </a:avLst>
           </a:prstGeom>
           <a:solidFill>
-            <a:srgbClr val="EEF4EC"/>
+            <a:srgbClr val="262B2E"/>
           </a:solidFill>
-          <a:ln w="19050">
+          <a:ln w="12700">
             <a:solidFill>
-              <a:srgbClr val="1E6B34"/>
+              <a:srgbClr val="3A3F42"/>
             </a:solidFill>
             <a:prstDash val="solid"/>
           </a:ln>
@@ -1751,34 +2150,14 @@
       </p:sp>
       <p:sp>
         <p:nvSpPr>
-          <p:cNvPr id="14" name="Shape 12"/>
-          <p:cNvSpPr/>
-          <p:nvPr/>
-        </p:nvSpPr>
-        <p:spPr>
-          <a:xfrm>
-            <a:off x="10287000" y="2039112"/>
-            <a:ext cx="182880" cy="182880"/>
-          </a:xfrm>
-          <a:prstGeom prst="ellipse">
-            <a:avLst/>
-          </a:prstGeom>
-          <a:solidFill>
-            <a:srgbClr val="1E6B34"/>
-          </a:solidFill>
-          <a:ln/>
-        </p:spPr>
-      </p:sp>
-      <p:sp>
-        <p:nvSpPr>
-          <p:cNvPr id="15" name="Text 13"/>
-          <p:cNvSpPr/>
-          <p:nvPr/>
-        </p:nvSpPr>
-        <p:spPr>
-          <a:xfrm>
-            <a:off x="9208008" y="2258568"/>
-            <a:ext cx="2340864" cy="365760"/>
+          <p:cNvPr id="26" name="Text 24"/>
+          <p:cNvSpPr/>
+          <p:nvPr/>
+        </p:nvSpPr>
+        <p:spPr>
+          <a:xfrm>
+            <a:off x="8319821" y="3154680"/>
+            <a:ext cx="1099261" cy="320040"/>
           </a:xfrm>
           <a:prstGeom prst="rect">
             <a:avLst/>
@@ -1790,34 +2169,201 @@
           <a:bodyPr wrap="square" lIns="0" tIns="0" rIns="0" bIns="0" rtlCol="0" anchor="ctr"/>
           <a:lstStyle/>
           <a:p>
-            <a:pPr algn="ctr" indent="0" marL="0">
-              <a:buNone/>
-            </a:pPr>
-            <a:r>
-              <a:rPr lang="en-US" sz="1450" b="1" dirty="0">
-                <a:solidFill>
-                  <a:srgbClr val="152619"/>
+            <a:pPr indent="0" marL="0">
+              <a:buNone/>
+            </a:pPr>
+            <a:r>
+              <a:rPr lang="en-US" sz="1100" dirty="0">
+                <a:solidFill>
+                  <a:srgbClr val="22A294"/>
+                </a:solidFill>
+                <a:latin typeface="Consolas" pitchFamily="34" charset="0"/>
+                <a:ea typeface="Consolas" pitchFamily="34" charset="-122"/>
+                <a:cs typeface="Consolas" pitchFamily="34" charset="-120"/>
+              </a:rPr>
+              <a:t>05</a:t>
+            </a:r>
+            <a:endParaRPr lang="en-US" sz="1100" dirty="0"/>
+          </a:p>
+        </p:txBody>
+      </p:sp>
+      <p:sp>
+        <p:nvSpPr>
+          <p:cNvPr id="27" name="Text 25"/>
+          <p:cNvSpPr/>
+          <p:nvPr/>
+        </p:nvSpPr>
+        <p:spPr>
+          <a:xfrm>
+            <a:off x="8319821" y="3593592"/>
+            <a:ext cx="1099261" cy="868680"/>
+          </a:xfrm>
+          <a:prstGeom prst="rect">
+            <a:avLst/>
+          </a:prstGeom>
+          <a:noFill/>
+          <a:ln/>
+        </p:spPr>
+        <p:txBody>
+          <a:bodyPr wrap="square" lIns="0" tIns="0" rIns="0" bIns="0" rtlCol="0" anchor="t"/>
+          <a:lstStyle/>
+          <a:p>
+            <a:pPr indent="0" marL="0">
+              <a:lnSpc>
+                <a:spcPct val="96000"/>
+              </a:lnSpc>
+              <a:buNone/>
+            </a:pPr>
+            <a:r>
+              <a:rPr lang="en-US" sz="1300" b="1" dirty="0">
+                <a:solidFill>
+                  <a:srgbClr val="EEF4F2"/>
+                </a:solidFill>
+                <a:latin typeface="Cambria" pitchFamily="34" charset="0"/>
+                <a:ea typeface="Cambria" pitchFamily="34" charset="-122"/>
+                <a:cs typeface="Cambria" pitchFamily="34" charset="-120"/>
+              </a:rPr>
+              <a:t>DynamoDB</a:t>
+            </a:r>
+            <a:endParaRPr lang="en-US" sz="1300" dirty="0"/>
+          </a:p>
+        </p:txBody>
+      </p:sp>
+      <p:sp>
+        <p:nvSpPr>
+          <p:cNvPr id="28" name="Text 26"/>
+          <p:cNvSpPr/>
+          <p:nvPr/>
+        </p:nvSpPr>
+        <p:spPr>
+          <a:xfrm>
+            <a:off x="8319821" y="4453128"/>
+            <a:ext cx="1099261" cy="365760"/>
+          </a:xfrm>
+          <a:prstGeom prst="rect">
+            <a:avLst/>
+          </a:prstGeom>
+          <a:noFill/>
+          <a:ln/>
+        </p:spPr>
+        <p:txBody>
+          <a:bodyPr wrap="square" lIns="0" tIns="0" rIns="0" bIns="0" rtlCol="0" anchor="ctr"/>
+          <a:lstStyle/>
+          <a:p>
+            <a:pPr indent="0" marL="0">
+              <a:buNone/>
+            </a:pPr>
+            <a:r>
+              <a:rPr lang="en-US" sz="900" dirty="0">
+                <a:solidFill>
+                  <a:srgbClr val="8B98A6"/>
                 </a:solidFill>
                 <a:latin typeface="Calibri" pitchFamily="34" charset="0"/>
                 <a:ea typeface="Calibri" pitchFamily="34" charset="-122"/>
                 <a:cs typeface="Calibri" pitchFamily="34" charset="-120"/>
               </a:rPr>
-              <a:t>Amazon SQS</a:t>
-            </a:r>
-            <a:endParaRPr lang="en-US" sz="1450" dirty="0"/>
-          </a:p>
-        </p:txBody>
-      </p:sp>
-      <p:sp>
-        <p:nvSpPr>
-          <p:cNvPr id="16" name="Text 14"/>
-          <p:cNvSpPr/>
-          <p:nvPr/>
-        </p:nvSpPr>
-        <p:spPr>
-          <a:xfrm>
-            <a:off x="9235440" y="2606040"/>
-            <a:ext cx="2286000" cy="411480"/>
+              <a:t>by type · time · district</a:t>
+            </a:r>
+            <a:endParaRPr lang="en-US" sz="900" dirty="0"/>
+          </a:p>
+        </p:txBody>
+      </p:sp>
+      <p:sp>
+        <p:nvSpPr>
+          <p:cNvPr id="29" name="Shape 27"/>
+          <p:cNvSpPr/>
+          <p:nvPr/>
+        </p:nvSpPr>
+        <p:spPr>
+          <a:xfrm>
+            <a:off x="9638538" y="3845052"/>
+            <a:ext cx="310896" cy="219456"/>
+          </a:xfrm>
+          <a:prstGeom prst="rightArrow">
+            <a:avLst/>
+          </a:prstGeom>
+          <a:solidFill>
+            <a:srgbClr val="8B98A6"/>
+          </a:solidFill>
+          <a:ln/>
+        </p:spPr>
+      </p:sp>
+      <p:sp>
+        <p:nvSpPr>
+          <p:cNvPr id="30" name="Shape 28"/>
+          <p:cNvSpPr/>
+          <p:nvPr/>
+        </p:nvSpPr>
+        <p:spPr>
+          <a:xfrm>
+            <a:off x="10022586" y="2971800"/>
+            <a:ext cx="1391869" cy="1965960"/>
+          </a:xfrm>
+          <a:prstGeom prst="roundRect">
+            <a:avLst>
+              <a:gd name="adj" fmla="val 2628"/>
+            </a:avLst>
+          </a:prstGeom>
+          <a:solidFill>
+            <a:srgbClr val="262B2E"/>
+          </a:solidFill>
+          <a:ln w="12700">
+            <a:solidFill>
+              <a:srgbClr val="3A3F42"/>
+            </a:solidFill>
+            <a:prstDash val="solid"/>
+          </a:ln>
+        </p:spPr>
+      </p:sp>
+      <p:sp>
+        <p:nvSpPr>
+          <p:cNvPr id="31" name="Text 29"/>
+          <p:cNvSpPr/>
+          <p:nvPr/>
+        </p:nvSpPr>
+        <p:spPr>
+          <a:xfrm>
+            <a:off x="10168890" y="3154680"/>
+            <a:ext cx="1099261" cy="320040"/>
+          </a:xfrm>
+          <a:prstGeom prst="rect">
+            <a:avLst/>
+          </a:prstGeom>
+          <a:noFill/>
+          <a:ln/>
+        </p:spPr>
+        <p:txBody>
+          <a:bodyPr wrap="square" lIns="0" tIns="0" rIns="0" bIns="0" rtlCol="0" anchor="ctr"/>
+          <a:lstStyle/>
+          <a:p>
+            <a:pPr indent="0" marL="0">
+              <a:buNone/>
+            </a:pPr>
+            <a:r>
+              <a:rPr lang="en-US" sz="1100" dirty="0">
+                <a:solidFill>
+                  <a:srgbClr val="22A294"/>
+                </a:solidFill>
+                <a:latin typeface="Consolas" pitchFamily="34" charset="0"/>
+                <a:ea typeface="Consolas" pitchFamily="34" charset="-122"/>
+                <a:cs typeface="Consolas" pitchFamily="34" charset="-120"/>
+              </a:rPr>
+              <a:t>06</a:t>
+            </a:r>
+            <a:endParaRPr lang="en-US" sz="1100" dirty="0"/>
+          </a:p>
+        </p:txBody>
+      </p:sp>
+      <p:sp>
+        <p:nvSpPr>
+          <p:cNvPr id="32" name="Text 30"/>
+          <p:cNvSpPr/>
+          <p:nvPr/>
+        </p:nvSpPr>
+        <p:spPr>
+          <a:xfrm>
+            <a:off x="10168890" y="3593592"/>
+            <a:ext cx="1099261" cy="868680"/>
           </a:xfrm>
           <a:prstGeom prst="rect">
             <a:avLst/>
@@ -1829,509 +2375,63 @@
           <a:bodyPr wrap="square" lIns="0" tIns="0" rIns="0" bIns="0" rtlCol="0" anchor="t"/>
           <a:lstStyle/>
           <a:p>
-            <a:pPr algn="ctr" indent="0" marL="0">
-              <a:buNone/>
-            </a:pPr>
-            <a:r>
-              <a:rPr lang="en-US" sz="1050" dirty="0">
-                <a:solidFill>
-                  <a:srgbClr val="5C6E58"/>
+            <a:pPr indent="0" marL="0">
+              <a:lnSpc>
+                <a:spcPct val="96000"/>
+              </a:lnSpc>
+              <a:buNone/>
+            </a:pPr>
+            <a:r>
+              <a:rPr lang="en-US" sz="1300" b="1" dirty="0">
+                <a:solidFill>
+                  <a:srgbClr val="EEF4F2"/>
+                </a:solidFill>
+                <a:latin typeface="Cambria" pitchFamily="34" charset="0"/>
+                <a:ea typeface="Cambria" pitchFamily="34" charset="-122"/>
+                <a:cs typeface="Cambria" pitchFamily="34" charset="-120"/>
+              </a:rPr>
+              <a:t>API GW + S3</a:t>
+            </a:r>
+            <a:endParaRPr lang="en-US" sz="1300" dirty="0"/>
+          </a:p>
+        </p:txBody>
+      </p:sp>
+      <p:sp>
+        <p:nvSpPr>
+          <p:cNvPr id="33" name="Text 31"/>
+          <p:cNvSpPr/>
+          <p:nvPr/>
+        </p:nvSpPr>
+        <p:spPr>
+          <a:xfrm>
+            <a:off x="10168890" y="4453128"/>
+            <a:ext cx="1099261" cy="365760"/>
+          </a:xfrm>
+          <a:prstGeom prst="rect">
+            <a:avLst/>
+          </a:prstGeom>
+          <a:noFill/>
+          <a:ln/>
+        </p:spPr>
+        <p:txBody>
+          <a:bodyPr wrap="square" lIns="0" tIns="0" rIns="0" bIns="0" rtlCol="0" anchor="ctr"/>
+          <a:lstStyle/>
+          <a:p>
+            <a:pPr indent="0" marL="0">
+              <a:buNone/>
+            </a:pPr>
+            <a:r>
+              <a:rPr lang="en-US" sz="900" dirty="0">
+                <a:solidFill>
+                  <a:srgbClr val="8B98A6"/>
                 </a:solidFill>
                 <a:latin typeface="Calibri" pitchFamily="34" charset="0"/>
                 <a:ea typeface="Calibri" pitchFamily="34" charset="-122"/>
                 <a:cs typeface="Calibri" pitchFamily="34" charset="-120"/>
               </a:rPr>
-              <a:t>1 summary / window</a:t>
-            </a:r>
-            <a:endParaRPr lang="en-US" sz="1050" dirty="0"/>
-          </a:p>
-        </p:txBody>
-      </p:sp>
-      <p:sp>
-        <p:nvSpPr>
-          <p:cNvPr id="17" name="Shape 15"/>
-          <p:cNvSpPr/>
-          <p:nvPr/>
-        </p:nvSpPr>
-        <p:spPr>
-          <a:xfrm>
-            <a:off x="9235440" y="3520440"/>
-            <a:ext cx="2286000" cy="1280160"/>
-          </a:xfrm>
-          <a:prstGeom prst="roundRect">
-            <a:avLst>
-              <a:gd name="adj" fmla="val 7143"/>
-            </a:avLst>
-          </a:prstGeom>
-          <a:solidFill>
-            <a:srgbClr val="EEF4EC"/>
-          </a:solidFill>
-          <a:ln w="19050">
-            <a:solidFill>
-              <a:srgbClr val="1E6B34"/>
-            </a:solidFill>
-            <a:prstDash val="solid"/>
-          </a:ln>
-        </p:spPr>
-      </p:sp>
-      <p:sp>
-        <p:nvSpPr>
-          <p:cNvPr id="18" name="Shape 16"/>
-          <p:cNvSpPr/>
-          <p:nvPr/>
-        </p:nvSpPr>
-        <p:spPr>
-          <a:xfrm>
-            <a:off x="10287000" y="3685032"/>
-            <a:ext cx="182880" cy="182880"/>
-          </a:xfrm>
-          <a:prstGeom prst="ellipse">
-            <a:avLst/>
-          </a:prstGeom>
-          <a:solidFill>
-            <a:srgbClr val="1E6B34"/>
-          </a:solidFill>
-          <a:ln/>
-        </p:spPr>
-      </p:sp>
-      <p:sp>
-        <p:nvSpPr>
-          <p:cNvPr id="19" name="Text 17"/>
-          <p:cNvSpPr/>
-          <p:nvPr/>
-        </p:nvSpPr>
-        <p:spPr>
-          <a:xfrm>
-            <a:off x="9208008" y="3904488"/>
-            <a:ext cx="2340864" cy="365760"/>
-          </a:xfrm>
-          <a:prstGeom prst="rect">
-            <a:avLst/>
-          </a:prstGeom>
-          <a:noFill/>
-          <a:ln/>
-        </p:spPr>
-        <p:txBody>
-          <a:bodyPr wrap="square" lIns="0" tIns="0" rIns="0" bIns="0" rtlCol="0" anchor="ctr"/>
-          <a:lstStyle/>
-          <a:p>
-            <a:pPr algn="ctr" indent="0" marL="0">
-              <a:buNone/>
-            </a:pPr>
-            <a:r>
-              <a:rPr lang="en-US" sz="1450" b="1" dirty="0">
-                <a:solidFill>
-                  <a:srgbClr val="152619"/>
-                </a:solidFill>
-                <a:latin typeface="Calibri" pitchFamily="34" charset="0"/>
-                <a:ea typeface="Calibri" pitchFamily="34" charset="-122"/>
-                <a:cs typeface="Calibri" pitchFamily="34" charset="-120"/>
-              </a:rPr>
-              <a:t>AWS Lambda</a:t>
-            </a:r>
-            <a:endParaRPr lang="en-US" sz="1450" dirty="0"/>
-          </a:p>
-        </p:txBody>
-      </p:sp>
-      <p:sp>
-        <p:nvSpPr>
-          <p:cNvPr id="20" name="Text 18"/>
-          <p:cNvSpPr/>
-          <p:nvPr/>
-        </p:nvSpPr>
-        <p:spPr>
-          <a:xfrm>
-            <a:off x="9235440" y="4251960"/>
-            <a:ext cx="2286000" cy="411480"/>
-          </a:xfrm>
-          <a:prstGeom prst="rect">
-            <a:avLst/>
-          </a:prstGeom>
-          <a:noFill/>
-          <a:ln/>
-        </p:spPr>
-        <p:txBody>
-          <a:bodyPr wrap="square" lIns="0" tIns="0" rIns="0" bIns="0" rtlCol="0" anchor="t"/>
-          <a:lstStyle/>
-          <a:p>
-            <a:pPr algn="ctr" indent="0" marL="0">
-              <a:buNone/>
-            </a:pPr>
-            <a:r>
-              <a:rPr lang="en-US" sz="1050" dirty="0">
-                <a:solidFill>
-                  <a:srgbClr val="5C6E58"/>
-                </a:solidFill>
-                <a:latin typeface="Calibri" pitchFamily="34" charset="0"/>
-                <a:ea typeface="Calibri" pitchFamily="34" charset="-122"/>
-                <a:cs typeface="Calibri" pitchFamily="34" charset="-120"/>
-              </a:rPr>
-              <a:t>java17 ingest</a:t>
-            </a:r>
-            <a:endParaRPr lang="en-US" sz="1050" dirty="0"/>
-          </a:p>
-        </p:txBody>
-      </p:sp>
-      <p:sp>
-        <p:nvSpPr>
-          <p:cNvPr id="21" name="Shape 19"/>
-          <p:cNvSpPr/>
-          <p:nvPr/>
-        </p:nvSpPr>
-        <p:spPr>
-          <a:xfrm>
-            <a:off x="7242048" y="4160520"/>
-            <a:ext cx="1975104" cy="0"/>
-          </a:xfrm>
-          <a:prstGeom prst="line">
-            <a:avLst/>
-          </a:prstGeom>
-          <a:noFill/>
-          <a:ln w="25400">
-            <a:solidFill>
-              <a:srgbClr val="5E9A62"/>
-            </a:solidFill>
-            <a:prstDash val="solid"/>
-            <a:headEnd type="triangle"/>
-            <a:tailEnd type="oval"/>
-          </a:ln>
-        </p:spPr>
-      </p:sp>
-      <p:sp>
-        <p:nvSpPr>
-          <p:cNvPr id="22" name="Shape 20"/>
-          <p:cNvSpPr/>
-          <p:nvPr/>
-        </p:nvSpPr>
-        <p:spPr>
-          <a:xfrm>
-            <a:off x="4937760" y="3520440"/>
-            <a:ext cx="2286000" cy="1280160"/>
-          </a:xfrm>
-          <a:prstGeom prst="roundRect">
-            <a:avLst>
-              <a:gd name="adj" fmla="val 7143"/>
-            </a:avLst>
-          </a:prstGeom>
-          <a:solidFill>
-            <a:srgbClr val="EEF4EC"/>
-          </a:solidFill>
-          <a:ln w="19050">
-            <a:solidFill>
-              <a:srgbClr val="1E6B34"/>
-            </a:solidFill>
-            <a:prstDash val="solid"/>
-          </a:ln>
-        </p:spPr>
-      </p:sp>
-      <p:sp>
-        <p:nvSpPr>
-          <p:cNvPr id="23" name="Shape 21"/>
-          <p:cNvSpPr/>
-          <p:nvPr/>
-        </p:nvSpPr>
-        <p:spPr>
-          <a:xfrm>
-            <a:off x="5989320" y="3685032"/>
-            <a:ext cx="182880" cy="182880"/>
-          </a:xfrm>
-          <a:prstGeom prst="ellipse">
-            <a:avLst/>
-          </a:prstGeom>
-          <a:solidFill>
-            <a:srgbClr val="1E6B34"/>
-          </a:solidFill>
-          <a:ln/>
-        </p:spPr>
-      </p:sp>
-      <p:sp>
-        <p:nvSpPr>
-          <p:cNvPr id="24" name="Text 22"/>
-          <p:cNvSpPr/>
-          <p:nvPr/>
-        </p:nvSpPr>
-        <p:spPr>
-          <a:xfrm>
-            <a:off x="4910328" y="3904488"/>
-            <a:ext cx="2340864" cy="365760"/>
-          </a:xfrm>
-          <a:prstGeom prst="rect">
-            <a:avLst/>
-          </a:prstGeom>
-          <a:noFill/>
-          <a:ln/>
-        </p:spPr>
-        <p:txBody>
-          <a:bodyPr wrap="square" lIns="0" tIns="0" rIns="0" bIns="0" rtlCol="0" anchor="ctr"/>
-          <a:lstStyle/>
-          <a:p>
-            <a:pPr algn="ctr" indent="0" marL="0">
-              <a:buNone/>
-            </a:pPr>
-            <a:r>
-              <a:rPr lang="en-US" sz="1450" b="1" dirty="0">
-                <a:solidFill>
-                  <a:srgbClr val="152619"/>
-                </a:solidFill>
-                <a:latin typeface="Calibri" pitchFamily="34" charset="0"/>
-                <a:ea typeface="Calibri" pitchFamily="34" charset="-122"/>
-                <a:cs typeface="Calibri" pitchFamily="34" charset="-120"/>
-              </a:rPr>
-              <a:t>DynamoDB</a:t>
-            </a:r>
-            <a:endParaRPr lang="en-US" sz="1450" dirty="0"/>
-          </a:p>
-        </p:txBody>
-      </p:sp>
-      <p:sp>
-        <p:nvSpPr>
-          <p:cNvPr id="25" name="Text 23"/>
-          <p:cNvSpPr/>
-          <p:nvPr/>
-        </p:nvSpPr>
-        <p:spPr>
-          <a:xfrm>
-            <a:off x="4937760" y="4251960"/>
-            <a:ext cx="2286000" cy="411480"/>
-          </a:xfrm>
-          <a:prstGeom prst="rect">
-            <a:avLst/>
-          </a:prstGeom>
-          <a:noFill/>
-          <a:ln/>
-        </p:spPr>
-        <p:txBody>
-          <a:bodyPr wrap="square" lIns="0" tIns="0" rIns="0" bIns="0" rtlCol="0" anchor="t"/>
-          <a:lstStyle/>
-          <a:p>
-            <a:pPr algn="ctr" indent="0" marL="0">
-              <a:buNone/>
-            </a:pPr>
-            <a:r>
-              <a:rPr lang="en-US" sz="1050" dirty="0">
-                <a:solidFill>
-                  <a:srgbClr val="5C6E58"/>
-                </a:solidFill>
-                <a:latin typeface="Calibri" pitchFamily="34" charset="0"/>
-                <a:ea typeface="Calibri" pitchFamily="34" charset="-122"/>
-                <a:cs typeface="Calibri" pitchFamily="34" charset="-120"/>
-              </a:rPr>
-              <a:t>by type · time · district</a:t>
-            </a:r>
-            <a:endParaRPr lang="en-US" sz="1050" dirty="0"/>
-          </a:p>
-        </p:txBody>
-      </p:sp>
-      <p:sp>
-        <p:nvSpPr>
-          <p:cNvPr id="26" name="Shape 24"/>
-          <p:cNvSpPr/>
-          <p:nvPr/>
-        </p:nvSpPr>
-        <p:spPr>
-          <a:xfrm>
-            <a:off x="2944368" y="4160520"/>
-            <a:ext cx="1975104" cy="0"/>
-          </a:xfrm>
-          <a:prstGeom prst="line">
-            <a:avLst/>
-          </a:prstGeom>
-          <a:noFill/>
-          <a:ln w="25400">
-            <a:solidFill>
-              <a:srgbClr val="5E9A62"/>
-            </a:solidFill>
-            <a:prstDash val="solid"/>
-            <a:headEnd type="triangle"/>
-            <a:tailEnd type="oval"/>
-          </a:ln>
-        </p:spPr>
-      </p:sp>
-      <p:sp>
-        <p:nvSpPr>
-          <p:cNvPr id="27" name="Shape 25"/>
-          <p:cNvSpPr/>
-          <p:nvPr/>
-        </p:nvSpPr>
-        <p:spPr>
-          <a:xfrm>
-            <a:off x="640080" y="3520440"/>
-            <a:ext cx="2286000" cy="1280160"/>
-          </a:xfrm>
-          <a:prstGeom prst="roundRect">
-            <a:avLst>
-              <a:gd name="adj" fmla="val 7143"/>
-            </a:avLst>
-          </a:prstGeom>
-          <a:solidFill>
-            <a:srgbClr val="EEF4EC"/>
-          </a:solidFill>
-          <a:ln w="19050">
-            <a:solidFill>
-              <a:srgbClr val="2E8C46"/>
-            </a:solidFill>
-            <a:prstDash val="solid"/>
-          </a:ln>
-        </p:spPr>
-      </p:sp>
-      <p:sp>
-        <p:nvSpPr>
-          <p:cNvPr id="28" name="Shape 26"/>
-          <p:cNvSpPr/>
-          <p:nvPr/>
-        </p:nvSpPr>
-        <p:spPr>
-          <a:xfrm>
-            <a:off x="1691640" y="3685032"/>
-            <a:ext cx="182880" cy="182880"/>
-          </a:xfrm>
-          <a:prstGeom prst="ellipse">
-            <a:avLst/>
-          </a:prstGeom>
-          <a:solidFill>
-            <a:srgbClr val="2E8C46"/>
-          </a:solidFill>
-          <a:ln/>
-        </p:spPr>
-      </p:sp>
-      <p:sp>
-        <p:nvSpPr>
-          <p:cNvPr id="29" name="Text 27"/>
-          <p:cNvSpPr/>
-          <p:nvPr/>
-        </p:nvSpPr>
-        <p:spPr>
-          <a:xfrm>
-            <a:off x="612648" y="3904488"/>
-            <a:ext cx="2340864" cy="365760"/>
-          </a:xfrm>
-          <a:prstGeom prst="rect">
-            <a:avLst/>
-          </a:prstGeom>
-          <a:noFill/>
-          <a:ln/>
-        </p:spPr>
-        <p:txBody>
-          <a:bodyPr wrap="square" lIns="0" tIns="0" rIns="0" bIns="0" rtlCol="0" anchor="ctr"/>
-          <a:lstStyle/>
-          <a:p>
-            <a:pPr algn="ctr" indent="0" marL="0">
-              <a:buNone/>
-            </a:pPr>
-            <a:r>
-              <a:rPr lang="en-US" sz="1450" b="1" dirty="0">
-                <a:solidFill>
-                  <a:srgbClr val="152619"/>
-                </a:solidFill>
-                <a:latin typeface="Calibri" pitchFamily="34" charset="0"/>
-                <a:ea typeface="Calibri" pitchFamily="34" charset="-122"/>
-                <a:cs typeface="Calibri" pitchFamily="34" charset="-120"/>
-              </a:rPr>
-              <a:t>API GW + S3</a:t>
-            </a:r>
-            <a:endParaRPr lang="en-US" sz="1450" dirty="0"/>
-          </a:p>
-        </p:txBody>
-      </p:sp>
-      <p:sp>
-        <p:nvSpPr>
-          <p:cNvPr id="30" name="Text 28"/>
-          <p:cNvSpPr/>
-          <p:nvPr/>
-        </p:nvSpPr>
-        <p:spPr>
-          <a:xfrm>
-            <a:off x="640080" y="4251960"/>
-            <a:ext cx="2286000" cy="411480"/>
-          </a:xfrm>
-          <a:prstGeom prst="rect">
-            <a:avLst/>
-          </a:prstGeom>
-          <a:noFill/>
-          <a:ln/>
-        </p:spPr>
-        <p:txBody>
-          <a:bodyPr wrap="square" lIns="0" tIns="0" rIns="0" bIns="0" rtlCol="0" anchor="t"/>
-          <a:lstStyle/>
-          <a:p>
-            <a:pPr algn="ctr" indent="0" marL="0">
-              <a:buNone/>
-            </a:pPr>
-            <a:r>
-              <a:rPr lang="en-US" sz="1050" dirty="0">
-                <a:solidFill>
-                  <a:srgbClr val="5C6E58"/>
-                </a:solidFill>
-                <a:latin typeface="Calibri" pitchFamily="34" charset="0"/>
-                <a:ea typeface="Calibri" pitchFamily="34" charset="-122"/>
-                <a:cs typeface="Calibri" pitchFamily="34" charset="-120"/>
-              </a:rPr>
               <a:t>live dashboard</a:t>
             </a:r>
-            <a:endParaRPr lang="en-US" sz="1050" dirty="0"/>
-          </a:p>
-        </p:txBody>
-      </p:sp>
-      <p:sp>
-        <p:nvSpPr>
-          <p:cNvPr id="31" name="Shape 29"/>
-          <p:cNvSpPr/>
-          <p:nvPr/>
-        </p:nvSpPr>
-        <p:spPr>
-          <a:xfrm>
-            <a:off x="10378440" y="3154680"/>
-            <a:ext cx="0" cy="365760"/>
-          </a:xfrm>
-          <a:prstGeom prst="line">
-            <a:avLst/>
-          </a:prstGeom>
-          <a:noFill/>
-          <a:ln w="25400">
-            <a:solidFill>
-              <a:srgbClr val="5E9A62"/>
-            </a:solidFill>
-            <a:prstDash val="solid"/>
-            <a:tailEnd type="triangle"/>
-          </a:ln>
-        </p:spPr>
-      </p:sp>
-      <p:sp>
-        <p:nvSpPr>
-          <p:cNvPr id="32" name="Text 30"/>
-          <p:cNvSpPr/>
-          <p:nvPr/>
-        </p:nvSpPr>
-        <p:spPr>
-          <a:xfrm>
-            <a:off x="640080" y="5257800"/>
-            <a:ext cx="10972800" cy="731520"/>
-          </a:xfrm>
-          <a:prstGeom prst="rect">
-            <a:avLst/>
-          </a:prstGeom>
-          <a:noFill/>
-          <a:ln/>
-        </p:spPr>
-        <p:txBody>
-          <a:bodyPr wrap="square" rtlCol="0" anchor="ctr"/>
-          <a:lstStyle/>
-          <a:p>
-            <a:pPr algn="ctr" indent="0" marL="0">
-              <a:buNone/>
-            </a:pPr>
-            <a:r>
-              <a:rPr lang="en-US" sz="1500" i="1" dirty="0">
-                <a:solidFill>
-                  <a:srgbClr val="1E6B34"/>
-                </a:solidFill>
-                <a:latin typeface="Calibri" pitchFamily="34" charset="0"/>
-                <a:ea typeface="Calibri" pitchFamily="34" charset="-122"/>
-                <a:cs typeface="Calibri" pitchFamily="34" charset="-120"/>
-              </a:rPr>
-              <a:t>Only compact window summaries ever cross into the cloud; raw readings stay at the edge, and the busiest bin is always collected first.</a:t>
-            </a:r>
-            <a:endParaRPr lang="en-US" sz="1500" dirty="0"/>
+            <a:endParaRPr lang="en-US" sz="900" dirty="0"/>
           </a:p>
         </p:txBody>
       </p:sp>
@@ -2349,7 +2449,7 @@
     <p:bg>
       <p:bgPr>
         <a:solidFill>
-          <a:srgbClr val="FFFFFF"/>
+          <a:srgbClr val="1C2022"/>
         </a:solidFill>
       </p:bgPr>
     </p:bg>
@@ -2375,8 +2475,125 @@
         </p:nvSpPr>
         <p:spPr>
           <a:xfrm>
-            <a:off x="640080" y="457200"/>
-            <a:ext cx="7315200" cy="640080"/>
+            <a:off x="777240" y="731520"/>
+            <a:ext cx="914400" cy="640080"/>
+          </a:xfrm>
+          <a:prstGeom prst="rect">
+            <a:avLst/>
+          </a:prstGeom>
+          <a:noFill/>
+          <a:ln/>
+        </p:spPr>
+        <p:txBody>
+          <a:bodyPr wrap="square" lIns="0" tIns="0" rIns="0" bIns="0" rtlCol="0" anchor="ctr"/>
+          <a:lstStyle/>
+          <a:p>
+            <a:pPr indent="0" marL="0">
+              <a:buNone/>
+            </a:pPr>
+            <a:r>
+              <a:rPr lang="en-US" sz="3000" b="1" dirty="0">
+                <a:solidFill>
+                  <a:srgbClr val="22A294"/>
+                </a:solidFill>
+                <a:latin typeface="Cambria" pitchFamily="34" charset="0"/>
+                <a:ea typeface="Cambria" pitchFamily="34" charset="-122"/>
+                <a:cs typeface="Cambria" pitchFamily="34" charset="-120"/>
+              </a:rPr>
+              <a:t>02</a:t>
+            </a:r>
+            <a:endParaRPr lang="en-US" sz="3000" dirty="0"/>
+          </a:p>
+        </p:txBody>
+      </p:sp>
+      <p:sp>
+        <p:nvSpPr>
+          <p:cNvPr id="3" name="Text 1"/>
+          <p:cNvSpPr/>
+          <p:nvPr/>
+        </p:nvSpPr>
+        <p:spPr>
+          <a:xfrm>
+            <a:off x="1645920" y="905256"/>
+            <a:ext cx="9768535" cy="274320"/>
+          </a:xfrm>
+          <a:prstGeom prst="rect">
+            <a:avLst/>
+          </a:prstGeom>
+          <a:noFill/>
+          <a:ln/>
+        </p:spPr>
+        <p:txBody>
+          <a:bodyPr wrap="square" lIns="0" tIns="0" rIns="0" bIns="0" rtlCol="0" anchor="ctr"/>
+          <a:lstStyle/>
+          <a:p>
+            <a:pPr indent="0" marL="0">
+              <a:buNone/>
+            </a:pPr>
+            <a:r>
+              <a:rPr lang="en-US" sz="1100" b="1" spc="200" kern="0" dirty="0">
+                <a:solidFill>
+                  <a:srgbClr val="8B98A6"/>
+                </a:solidFill>
+                <a:latin typeface="Calibri" pitchFamily="34" charset="0"/>
+                <a:ea typeface="Calibri" pitchFamily="34" charset="-122"/>
+                <a:cs typeface="Calibri" pitchFamily="34" charset="-120"/>
+              </a:rPr>
+              <a:t>LIVE DEMO</a:t>
+            </a:r>
+            <a:endParaRPr lang="en-US" sz="1100" dirty="0"/>
+          </a:p>
+        </p:txBody>
+      </p:sp>
+      <p:sp>
+        <p:nvSpPr>
+          <p:cNvPr id="4" name="Text 2"/>
+          <p:cNvSpPr/>
+          <p:nvPr/>
+        </p:nvSpPr>
+        <p:spPr>
+          <a:xfrm>
+            <a:off x="777240" y="1380744"/>
+            <a:ext cx="10637215" cy="640080"/>
+          </a:xfrm>
+          <a:prstGeom prst="rect">
+            <a:avLst/>
+          </a:prstGeom>
+          <a:noFill/>
+          <a:ln/>
+        </p:spPr>
+        <p:txBody>
+          <a:bodyPr wrap="square" lIns="0" tIns="0" rIns="0" bIns="0" rtlCol="0" anchor="ctr"/>
+          <a:lstStyle/>
+          <a:p>
+            <a:pPr indent="0" marL="0">
+              <a:buNone/>
+            </a:pPr>
+            <a:r>
+              <a:rPr lang="en-US" sz="2300" b="1" dirty="0">
+                <a:solidFill>
+                  <a:srgbClr val="EEF4F2"/>
+                </a:solidFill>
+                <a:latin typeface="Cambria" pitchFamily="34" charset="0"/>
+                <a:ea typeface="Cambria" pitchFamily="34" charset="-122"/>
+                <a:cs typeface="Cambria" pitchFamily="34" charset="-120"/>
+              </a:rPr>
+              <a:t>See it running on AWS</a:t>
+            </a:r>
+            <a:endParaRPr lang="en-US" sz="2300" dirty="0"/>
+          </a:p>
+        </p:txBody>
+      </p:sp>
+      <p:sp>
+        <p:nvSpPr>
+          <p:cNvPr id="5" name="Text 3"/>
+          <p:cNvSpPr/>
+          <p:nvPr/>
+        </p:nvSpPr>
+        <p:spPr>
+          <a:xfrm>
+            <a:off x="777240" y="1901952"/>
+            <a:ext cx="10637215" cy="274320"/>
           </a:xfrm>
           <a:prstGeom prst="rect">
             <a:avLst/>
@@ -2392,48 +2609,9 @@
               <a:buNone/>
             </a:pPr>
             <a:r>
-              <a:rPr lang="en-US" sz="3000" b="1" dirty="0">
-                <a:solidFill>
-                  <a:srgbClr val="152619"/>
-                </a:solidFill>
-                <a:latin typeface="Century Schoolbook" pitchFamily="34" charset="0"/>
-                <a:ea typeface="Century Schoolbook" pitchFamily="34" charset="-122"/>
-                <a:cs typeface="Century Schoolbook" pitchFamily="34" charset="-120"/>
-              </a:rPr>
-              <a:t>Live Demo</a:t>
-            </a:r>
-            <a:endParaRPr lang="en-US" sz="3000" dirty="0"/>
-          </a:p>
-        </p:txBody>
-      </p:sp>
-      <p:sp>
-        <p:nvSpPr>
-          <p:cNvPr id="3" name="Text 1"/>
-          <p:cNvSpPr/>
-          <p:nvPr/>
-        </p:nvSpPr>
-        <p:spPr>
-          <a:xfrm>
-            <a:off x="658368" y="1143000"/>
-            <a:ext cx="10972800" cy="365760"/>
-          </a:xfrm>
-          <a:prstGeom prst="rect">
-            <a:avLst/>
-          </a:prstGeom>
-          <a:noFill/>
-          <a:ln/>
-        </p:spPr>
-        <p:txBody>
-          <a:bodyPr wrap="square" rtlCol="0" anchor="ctr"/>
-          <a:lstStyle/>
-          <a:p>
-            <a:pPr indent="0" marL="0">
-              <a:buNone/>
-            </a:pPr>
-            <a:r>
-              <a:rPr lang="en-US" sz="1400" dirty="0">
-                <a:solidFill>
-                  <a:srgbClr val="2E8C46"/>
+              <a:rPr lang="en-US" sz="1100" dirty="0">
+                <a:solidFill>
+                  <a:srgbClr val="22A294"/>
                 </a:solidFill>
                 <a:latin typeface="Consolas" pitchFamily="34" charset="0"/>
                 <a:ea typeface="Consolas" pitchFamily="34" charset="-122"/>
@@ -2441,32 +2619,32 @@
               </a:rPr>
               <a:t>swm-frontend-548539235319.s3.us-east-1.amazonaws.com</a:t>
             </a:r>
-            <a:endParaRPr lang="en-US" sz="1400" dirty="0"/>
-          </a:p>
-        </p:txBody>
-      </p:sp>
-      <p:sp>
-        <p:nvSpPr>
-          <p:cNvPr id="4" name="Shape 2"/>
-          <p:cNvSpPr/>
-          <p:nvPr/>
-        </p:nvSpPr>
-        <p:spPr>
-          <a:xfrm>
-            <a:off x="640080" y="1874520"/>
-            <a:ext cx="3502152" cy="3977640"/>
+            <a:endParaRPr lang="en-US" sz="1100" dirty="0"/>
+          </a:p>
+        </p:txBody>
+      </p:sp>
+      <p:sp>
+        <p:nvSpPr>
+          <p:cNvPr id="6" name="Shape 4"/>
+          <p:cNvSpPr/>
+          <p:nvPr/>
+        </p:nvSpPr>
+        <p:spPr>
+          <a:xfrm>
+            <a:off x="777240" y="2514600"/>
+            <a:ext cx="3301898" cy="3566160"/>
           </a:xfrm>
           <a:prstGeom prst="roundRect">
             <a:avLst>
-              <a:gd name="adj" fmla="val 2611"/>
+              <a:gd name="adj" fmla="val 1108"/>
             </a:avLst>
           </a:prstGeom>
           <a:solidFill>
-            <a:srgbClr val="EEF4EC"/>
+            <a:srgbClr val="262B2E"/>
           </a:solidFill>
-          <a:ln w="15240">
+          <a:ln w="12700">
             <a:solidFill>
-              <a:srgbClr val="2E8C46"/>
+              <a:srgbClr val="3A3F42"/>
             </a:solidFill>
             <a:prstDash val="solid"/>
           </a:ln>
@@ -2474,34 +2652,14 @@
       </p:sp>
       <p:sp>
         <p:nvSpPr>
-          <p:cNvPr id="5" name="Shape 3"/>
-          <p:cNvSpPr/>
-          <p:nvPr/>
-        </p:nvSpPr>
-        <p:spPr>
-          <a:xfrm>
-            <a:off x="914400" y="2148840"/>
-            <a:ext cx="603504" cy="603504"/>
-          </a:xfrm>
-          <a:prstGeom prst="ellipse">
-            <a:avLst/>
-          </a:prstGeom>
-          <a:solidFill>
-            <a:srgbClr val="1E6B34"/>
-          </a:solidFill>
-          <a:ln/>
-        </p:spPr>
-      </p:sp>
-      <p:sp>
-        <p:nvSpPr>
-          <p:cNvPr id="6" name="Text 4"/>
-          <p:cNvSpPr/>
-          <p:nvPr/>
-        </p:nvSpPr>
-        <p:spPr>
-          <a:xfrm>
-            <a:off x="914400" y="2148840"/>
-            <a:ext cx="603504" cy="603504"/>
+          <p:cNvPr id="7" name="Text 5"/>
+          <p:cNvSpPr/>
+          <p:nvPr/>
+        </p:nvSpPr>
+        <p:spPr>
+          <a:xfrm>
+            <a:off x="1051560" y="2752344"/>
+            <a:ext cx="1828800" cy="777240"/>
           </a:xfrm>
           <a:prstGeom prst="rect">
             <a:avLst/>
@@ -2513,34 +2671,76 @@
           <a:bodyPr wrap="square" lIns="0" tIns="0" rIns="0" bIns="0" rtlCol="0" anchor="ctr"/>
           <a:lstStyle/>
           <a:p>
-            <a:pPr algn="ctr" indent="0" marL="0">
-              <a:buNone/>
-            </a:pPr>
-            <a:r>
-              <a:rPr lang="en-US" sz="2200" b="1" dirty="0">
-                <a:solidFill>
-                  <a:srgbClr val="FFFFFF"/>
-                </a:solidFill>
-                <a:latin typeface="Century Schoolbook" pitchFamily="34" charset="0"/>
-                <a:ea typeface="Century Schoolbook" pitchFamily="34" charset="-122"/>
-                <a:cs typeface="Century Schoolbook" pitchFamily="34" charset="-120"/>
-              </a:rPr>
-              <a:t>1</a:t>
-            </a:r>
-            <a:endParaRPr lang="en-US" sz="2200" dirty="0"/>
-          </a:p>
-        </p:txBody>
-      </p:sp>
-      <p:sp>
-        <p:nvSpPr>
-          <p:cNvPr id="7" name="Text 5"/>
-          <p:cNvSpPr/>
-          <p:nvPr/>
-        </p:nvSpPr>
-        <p:spPr>
-          <a:xfrm>
-            <a:off x="914400" y="2898648"/>
-            <a:ext cx="2953512" cy="777240"/>
+            <a:pPr indent="0" marL="0">
+              <a:buNone/>
+            </a:pPr>
+            <a:r>
+              <a:rPr lang="en-US" sz="3800" b="1" dirty="0">
+                <a:solidFill>
+                  <a:srgbClr val="22A294"/>
+                </a:solidFill>
+                <a:latin typeface="Cambria" pitchFamily="34" charset="0"/>
+                <a:ea typeface="Cambria" pitchFamily="34" charset="-122"/>
+                <a:cs typeface="Cambria" pitchFamily="34" charset="-120"/>
+              </a:rPr>
+              <a:t>01</a:t>
+            </a:r>
+            <a:endParaRPr lang="en-US" sz="3800" dirty="0"/>
+          </a:p>
+        </p:txBody>
+      </p:sp>
+      <p:sp>
+        <p:nvSpPr>
+          <p:cNvPr id="8" name="Text 6"/>
+          <p:cNvSpPr/>
+          <p:nvPr/>
+        </p:nvSpPr>
+        <p:spPr>
+          <a:xfrm>
+            <a:off x="1069848" y="3566160"/>
+            <a:ext cx="2753258" cy="868680"/>
+          </a:xfrm>
+          <a:prstGeom prst="rect">
+            <a:avLst/>
+          </a:prstGeom>
+          <a:noFill/>
+          <a:ln/>
+        </p:spPr>
+        <p:txBody>
+          <a:bodyPr wrap="square" lIns="0" tIns="0" rIns="0" bIns="0" rtlCol="0" anchor="t"/>
+          <a:lstStyle/>
+          <a:p>
+            <a:pPr indent="0" marL="0">
+              <a:lnSpc>
+                <a:spcPct val="100000"/>
+              </a:lnSpc>
+              <a:buNone/>
+            </a:pPr>
+            <a:r>
+              <a:rPr lang="en-US" sz="1550" b="1" dirty="0">
+                <a:solidFill>
+                  <a:srgbClr val="EEF4F2"/>
+                </a:solidFill>
+                <a:latin typeface="Cambria" pitchFamily="34" charset="0"/>
+                <a:ea typeface="Cambria" pitchFamily="34" charset="-122"/>
+                <a:cs typeface="Cambria" pitchFamily="34" charset="-120"/>
+              </a:rPr>
+              <a:t>Two districts, four hazard signals</a:t>
+            </a:r>
+            <a:endParaRPr lang="en-US" sz="1550" dirty="0"/>
+          </a:p>
+        </p:txBody>
+      </p:sp>
+      <p:sp>
+        <p:nvSpPr>
+          <p:cNvPr id="9" name="Text 7"/>
+          <p:cNvSpPr/>
+          <p:nvPr/>
+        </p:nvSpPr>
+        <p:spPr>
+          <a:xfrm>
+            <a:off x="1069848" y="4434840"/>
+            <a:ext cx="2753258" cy="1463040"/>
           </a:xfrm>
           <a:prstGeom prst="rect">
             <a:avLst/>
@@ -2553,33 +2753,63 @@
           <a:lstStyle/>
           <a:p>
             <a:pPr indent="0" marL="0">
-              <a:buNone/>
-            </a:pPr>
-            <a:r>
-              <a:rPr lang="en-US" sz="1600" b="1" dirty="0">
-                <a:solidFill>
-                  <a:srgbClr val="152619"/>
+              <a:lnSpc>
+                <a:spcPct val="120000"/>
+              </a:lnSpc>
+              <a:buNone/>
+            </a:pPr>
+            <a:r>
+              <a:rPr lang="en-US" sz="1200" dirty="0">
+                <a:solidFill>
+                  <a:srgbClr val="8B98A6"/>
                 </a:solidFill>
                 <a:latin typeface="Calibri" pitchFamily="34" charset="0"/>
                 <a:ea typeface="Calibri" pitchFamily="34" charset="-122"/>
                 <a:cs typeface="Calibri" pitchFamily="34" charset="-120"/>
               </a:rPr>
-              <a:t>Two districts, four hazard signals</a:t>
-            </a:r>
-            <a:endParaRPr lang="en-US" sz="1600" dirty="0"/>
-          </a:p>
-        </p:txBody>
-      </p:sp>
-      <p:sp>
-        <p:nvSpPr>
-          <p:cNvPr id="8" name="Text 6"/>
-          <p:cNvSpPr/>
-          <p:nvPr/>
-        </p:nvSpPr>
-        <p:spPr>
-          <a:xfrm>
-            <a:off x="914400" y="3657600"/>
-            <a:ext cx="2953512" cy="2011680"/>
+              <a:t>Fill level, internal temperature, gas and lid activity live per bin, so the busiest bin is always surfaced first.</a:t>
+            </a:r>
+            <a:endParaRPr lang="en-US" sz="1200" dirty="0"/>
+          </a:p>
+        </p:txBody>
+      </p:sp>
+      <p:sp>
+        <p:nvSpPr>
+          <p:cNvPr id="10" name="Shape 8"/>
+          <p:cNvSpPr/>
+          <p:nvPr/>
+        </p:nvSpPr>
+        <p:spPr>
+          <a:xfrm>
+            <a:off x="4444898" y="2514600"/>
+            <a:ext cx="3301898" cy="3566160"/>
+          </a:xfrm>
+          <a:prstGeom prst="roundRect">
+            <a:avLst>
+              <a:gd name="adj" fmla="val 1108"/>
+            </a:avLst>
+          </a:prstGeom>
+          <a:solidFill>
+            <a:srgbClr val="262B2E"/>
+          </a:solidFill>
+          <a:ln w="12700">
+            <a:solidFill>
+              <a:srgbClr val="3A3F42"/>
+            </a:solidFill>
+            <a:prstDash val="solid"/>
+          </a:ln>
+        </p:spPr>
+      </p:sp>
+      <p:sp>
+        <p:nvSpPr>
+          <p:cNvPr id="11" name="Text 9"/>
+          <p:cNvSpPr/>
+          <p:nvPr/>
+        </p:nvSpPr>
+        <p:spPr>
+          <a:xfrm>
+            <a:off x="4719218" y="2752344"/>
+            <a:ext cx="1828800" cy="777240"/>
           </a:xfrm>
           <a:prstGeom prst="rect">
             <a:avLst/>
@@ -2592,48 +2822,129 @@
           <a:lstStyle/>
           <a:p>
             <a:pPr indent="0" marL="0">
+              <a:buNone/>
+            </a:pPr>
+            <a:r>
+              <a:rPr lang="en-US" sz="3800" b="1" dirty="0">
+                <a:solidFill>
+                  <a:srgbClr val="22A294"/>
+                </a:solidFill>
+                <a:latin typeface="Cambria" pitchFamily="34" charset="0"/>
+                <a:ea typeface="Cambria" pitchFamily="34" charset="-122"/>
+                <a:cs typeface="Cambria" pitchFamily="34" charset="-120"/>
+              </a:rPr>
+              <a:t>02</a:t>
+            </a:r>
+            <a:endParaRPr lang="en-US" sz="3800" dirty="0"/>
+          </a:p>
+        </p:txBody>
+      </p:sp>
+      <p:sp>
+        <p:nvSpPr>
+          <p:cNvPr id="12" name="Text 10"/>
+          <p:cNvSpPr/>
+          <p:nvPr/>
+        </p:nvSpPr>
+        <p:spPr>
+          <a:xfrm>
+            <a:off x="4737506" y="3566160"/>
+            <a:ext cx="2753258" cy="868680"/>
+          </a:xfrm>
+          <a:prstGeom prst="rect">
+            <a:avLst/>
+          </a:prstGeom>
+          <a:noFill/>
+          <a:ln/>
+        </p:spPr>
+        <p:txBody>
+          <a:bodyPr wrap="square" lIns="0" tIns="0" rIns="0" bIns="0" rtlCol="0" anchor="t"/>
+          <a:lstStyle/>
+          <a:p>
+            <a:pPr indent="0" marL="0">
               <a:lnSpc>
-                <a:spcPct val="106000"/>
+                <a:spcPct val="100000"/>
               </a:lnSpc>
               <a:buNone/>
             </a:pPr>
             <a:r>
-              <a:rPr lang="en-US" sz="1250" dirty="0">
-                <a:solidFill>
-                  <a:srgbClr val="5C6E58"/>
+              <a:rPr lang="en-US" sz="1550" b="1" dirty="0">
+                <a:solidFill>
+                  <a:srgbClr val="EEF4F2"/>
+                </a:solidFill>
+                <a:latin typeface="Cambria" pitchFamily="34" charset="0"/>
+                <a:ea typeface="Cambria" pitchFamily="34" charset="-122"/>
+                <a:cs typeface="Cambria" pitchFamily="34" charset="-120"/>
+              </a:rPr>
+              <a:t>Four hazard rules firing live</a:t>
+            </a:r>
+            <a:endParaRPr lang="en-US" sz="1550" dirty="0"/>
+          </a:p>
+        </p:txBody>
+      </p:sp>
+      <p:sp>
+        <p:nvSpPr>
+          <p:cNvPr id="13" name="Text 11"/>
+          <p:cNvSpPr/>
+          <p:nvPr/>
+        </p:nvSpPr>
+        <p:spPr>
+          <a:xfrm>
+            <a:off x="4737506" y="4434840"/>
+            <a:ext cx="2753258" cy="1463040"/>
+          </a:xfrm>
+          <a:prstGeom prst="rect">
+            <a:avLst/>
+          </a:prstGeom>
+          <a:noFill/>
+          <a:ln/>
+        </p:spPr>
+        <p:txBody>
+          <a:bodyPr wrap="square" lIns="0" tIns="0" rIns="0" bIns="0" rtlCol="0" anchor="ctr"/>
+          <a:lstStyle/>
+          <a:p>
+            <a:pPr indent="0" marL="0">
+              <a:lnSpc>
+                <a:spcPct val="120000"/>
+              </a:lnSpc>
+              <a:buNone/>
+            </a:pPr>
+            <a:r>
+              <a:rPr lang="en-US" sz="1200" dirty="0">
+                <a:solidFill>
+                  <a:srgbClr val="8B98A6"/>
                 </a:solidFill>
                 <a:latin typeface="Calibri" pitchFamily="34" charset="0"/>
                 <a:ea typeface="Calibri" pitchFamily="34" charset="-122"/>
                 <a:cs typeface="Calibri" pitchFamily="34" charset="-120"/>
               </a:rPr>
-              <a:t>Fill level, internal temperature, gas and lid activity live per bin, so the busiest bin is always surfaced first.</a:t>
-            </a:r>
-            <a:endParaRPr lang="en-US" sz="1250" dirty="0"/>
-          </a:p>
-        </p:txBody>
-      </p:sp>
-      <p:sp>
-        <p:nvSpPr>
-          <p:cNvPr id="9" name="Shape 7"/>
-          <p:cNvSpPr/>
-          <p:nvPr/>
-        </p:nvSpPr>
-        <p:spPr>
-          <a:xfrm>
-            <a:off x="4416552" y="1874520"/>
-            <a:ext cx="3502152" cy="3977640"/>
+              <a:t>Overflow above 85% fill, fire risk above 55 C, gas above 400 ppm and tampering each raise on the window they appear.</a:t>
+            </a:r>
+            <a:endParaRPr lang="en-US" sz="1200" dirty="0"/>
+          </a:p>
+        </p:txBody>
+      </p:sp>
+      <p:sp>
+        <p:nvSpPr>
+          <p:cNvPr id="14" name="Shape 12"/>
+          <p:cNvSpPr/>
+          <p:nvPr/>
+        </p:nvSpPr>
+        <p:spPr>
+          <a:xfrm>
+            <a:off x="8112557" y="2514600"/>
+            <a:ext cx="3301898" cy="3566160"/>
           </a:xfrm>
           <a:prstGeom prst="roundRect">
             <a:avLst>
-              <a:gd name="adj" fmla="val 2611"/>
+              <a:gd name="adj" fmla="val 1108"/>
             </a:avLst>
           </a:prstGeom>
           <a:solidFill>
-            <a:srgbClr val="EEF4EC"/>
+            <a:srgbClr val="262B2E"/>
           </a:solidFill>
-          <a:ln w="15240">
+          <a:ln w="12700">
             <a:solidFill>
-              <a:srgbClr val="2E8C46"/>
+              <a:srgbClr val="3A3F42"/>
             </a:solidFill>
             <a:prstDash val="solid"/>
           </a:ln>
@@ -2641,34 +2952,14 @@
       </p:sp>
       <p:sp>
         <p:nvSpPr>
-          <p:cNvPr id="10" name="Shape 8"/>
-          <p:cNvSpPr/>
-          <p:nvPr/>
-        </p:nvSpPr>
-        <p:spPr>
-          <a:xfrm>
-            <a:off x="4690872" y="2148840"/>
-            <a:ext cx="603504" cy="603504"/>
-          </a:xfrm>
-          <a:prstGeom prst="ellipse">
-            <a:avLst/>
-          </a:prstGeom>
-          <a:solidFill>
-            <a:srgbClr val="1E6B34"/>
-          </a:solidFill>
-          <a:ln/>
-        </p:spPr>
-      </p:sp>
-      <p:sp>
-        <p:nvSpPr>
-          <p:cNvPr id="11" name="Text 9"/>
-          <p:cNvSpPr/>
-          <p:nvPr/>
-        </p:nvSpPr>
-        <p:spPr>
-          <a:xfrm>
-            <a:off x="4690872" y="2148840"/>
-            <a:ext cx="603504" cy="603504"/>
+          <p:cNvPr id="15" name="Text 13"/>
+          <p:cNvSpPr/>
+          <p:nvPr/>
+        </p:nvSpPr>
+        <p:spPr>
+          <a:xfrm>
+            <a:off x="8386877" y="2752344"/>
+            <a:ext cx="1828800" cy="777240"/>
           </a:xfrm>
           <a:prstGeom prst="rect">
             <a:avLst/>
@@ -2680,34 +2971,76 @@
           <a:bodyPr wrap="square" lIns="0" tIns="0" rIns="0" bIns="0" rtlCol="0" anchor="ctr"/>
           <a:lstStyle/>
           <a:p>
-            <a:pPr algn="ctr" indent="0" marL="0">
-              <a:buNone/>
-            </a:pPr>
-            <a:r>
-              <a:rPr lang="en-US" sz="2200" b="1" dirty="0">
-                <a:solidFill>
-                  <a:srgbClr val="FFFFFF"/>
-                </a:solidFill>
-                <a:latin typeface="Century Schoolbook" pitchFamily="34" charset="0"/>
-                <a:ea typeface="Century Schoolbook" pitchFamily="34" charset="-122"/>
-                <a:cs typeface="Century Schoolbook" pitchFamily="34" charset="-120"/>
-              </a:rPr>
-              <a:t>2</a:t>
-            </a:r>
-            <a:endParaRPr lang="en-US" sz="2200" dirty="0"/>
-          </a:p>
-        </p:txBody>
-      </p:sp>
-      <p:sp>
-        <p:nvSpPr>
-          <p:cNvPr id="12" name="Text 10"/>
-          <p:cNvSpPr/>
-          <p:nvPr/>
-        </p:nvSpPr>
-        <p:spPr>
-          <a:xfrm>
-            <a:off x="4690872" y="2898648"/>
-            <a:ext cx="2953512" cy="777240"/>
+            <a:pPr indent="0" marL="0">
+              <a:buNone/>
+            </a:pPr>
+            <a:r>
+              <a:rPr lang="en-US" sz="3800" b="1" dirty="0">
+                <a:solidFill>
+                  <a:srgbClr val="22A294"/>
+                </a:solidFill>
+                <a:latin typeface="Cambria" pitchFamily="34" charset="0"/>
+                <a:ea typeface="Cambria" pitchFamily="34" charset="-122"/>
+                <a:cs typeface="Cambria" pitchFamily="34" charset="-120"/>
+              </a:rPr>
+              <a:t>03</a:t>
+            </a:r>
+            <a:endParaRPr lang="en-US" sz="3800" dirty="0"/>
+          </a:p>
+        </p:txBody>
+      </p:sp>
+      <p:sp>
+        <p:nvSpPr>
+          <p:cNvPr id="16" name="Text 14"/>
+          <p:cNvSpPr/>
+          <p:nvPr/>
+        </p:nvSpPr>
+        <p:spPr>
+          <a:xfrm>
+            <a:off x="8405165" y="3566160"/>
+            <a:ext cx="2753258" cy="868680"/>
+          </a:xfrm>
+          <a:prstGeom prst="rect">
+            <a:avLst/>
+          </a:prstGeom>
+          <a:noFill/>
+          <a:ln/>
+        </p:spPr>
+        <p:txBody>
+          <a:bodyPr wrap="square" lIns="0" tIns="0" rIns="0" bIns="0" rtlCol="0" anchor="t"/>
+          <a:lstStyle/>
+          <a:p>
+            <a:pPr indent="0" marL="0">
+              <a:lnSpc>
+                <a:spcPct val="100000"/>
+              </a:lnSpc>
+              <a:buNone/>
+            </a:pPr>
+            <a:r>
+              <a:rPr lang="en-US" sz="1550" b="1" dirty="0">
+                <a:solidFill>
+                  <a:srgbClr val="EEF4F2"/>
+                </a:solidFill>
+                <a:latin typeface="Cambria" pitchFamily="34" charset="0"/>
+                <a:ea typeface="Cambria" pitchFamily="34" charset="-122"/>
+                <a:cs typeface="Cambria" pitchFamily="34" charset="-120"/>
+              </a:rPr>
+              <a:t>Genuinely live, not a cache</a:t>
+            </a:r>
+            <a:endParaRPr lang="en-US" sz="1550" dirty="0"/>
+          </a:p>
+        </p:txBody>
+      </p:sp>
+      <p:sp>
+        <p:nvSpPr>
+          <p:cNvPr id="17" name="Text 15"/>
+          <p:cNvSpPr/>
+          <p:nvPr/>
+        </p:nvSpPr>
+        <p:spPr>
+          <a:xfrm>
+            <a:off x="8405165" y="4434840"/>
+            <a:ext cx="2753258" cy="1463040"/>
           </a:xfrm>
           <a:prstGeom prst="rect">
             <a:avLst/>
@@ -2720,229 +3053,23 @@
           <a:lstStyle/>
           <a:p>
             <a:pPr indent="0" marL="0">
-              <a:buNone/>
-            </a:pPr>
-            <a:r>
-              <a:rPr lang="en-US" sz="1600" b="1" dirty="0">
-                <a:solidFill>
-                  <a:srgbClr val="152619"/>
+              <a:lnSpc>
+                <a:spcPct val="120000"/>
+              </a:lnSpc>
+              <a:buNone/>
+            </a:pPr>
+            <a:r>
+              <a:rPr lang="en-US" sz="1200" dirty="0">
+                <a:solidFill>
+                  <a:srgbClr val="8B98A6"/>
                 </a:solidFill>
                 <a:latin typeface="Calibri" pitchFamily="34" charset="0"/>
                 <a:ea typeface="Calibri" pitchFamily="34" charset="-122"/>
                 <a:cs typeface="Calibri" pitchFamily="34" charset="-120"/>
               </a:rPr>
-              <a:t>Four hazard rules firing live</a:t>
-            </a:r>
-            <a:endParaRPr lang="en-US" sz="1600" dirty="0"/>
-          </a:p>
-        </p:txBody>
-      </p:sp>
-      <p:sp>
-        <p:nvSpPr>
-          <p:cNvPr id="13" name="Text 11"/>
-          <p:cNvSpPr/>
-          <p:nvPr/>
-        </p:nvSpPr>
-        <p:spPr>
-          <a:xfrm>
-            <a:off x="4690872" y="3657600"/>
-            <a:ext cx="2953512" cy="2011680"/>
-          </a:xfrm>
-          <a:prstGeom prst="rect">
-            <a:avLst/>
-          </a:prstGeom>
-          <a:noFill/>
-          <a:ln/>
-        </p:spPr>
-        <p:txBody>
-          <a:bodyPr wrap="square" lIns="0" tIns="0" rIns="0" bIns="0" rtlCol="0" anchor="ctr"/>
-          <a:lstStyle/>
-          <a:p>
-            <a:pPr indent="0" marL="0">
-              <a:lnSpc>
-                <a:spcPct val="106000"/>
-              </a:lnSpc>
-              <a:buNone/>
-            </a:pPr>
-            <a:r>
-              <a:rPr lang="en-US" sz="1250" dirty="0">
-                <a:solidFill>
-                  <a:srgbClr val="5C6E58"/>
-                </a:solidFill>
-                <a:latin typeface="Calibri" pitchFamily="34" charset="0"/>
-                <a:ea typeface="Calibri" pitchFamily="34" charset="-122"/>
-                <a:cs typeface="Calibri" pitchFamily="34" charset="-120"/>
-              </a:rPr>
-              <a:t>Overflow above 85% fill, fire risk above 55 C, gas above 400 ppm and tampering each raise on the window they appear.</a:t>
-            </a:r>
-            <a:endParaRPr lang="en-US" sz="1250" dirty="0"/>
-          </a:p>
-        </p:txBody>
-      </p:sp>
-      <p:sp>
-        <p:nvSpPr>
-          <p:cNvPr id="14" name="Shape 12"/>
-          <p:cNvSpPr/>
-          <p:nvPr/>
-        </p:nvSpPr>
-        <p:spPr>
-          <a:xfrm>
-            <a:off x="8193024" y="1874520"/>
-            <a:ext cx="3502152" cy="3977640"/>
-          </a:xfrm>
-          <a:prstGeom prst="roundRect">
-            <a:avLst>
-              <a:gd name="adj" fmla="val 2611"/>
-            </a:avLst>
-          </a:prstGeom>
-          <a:solidFill>
-            <a:srgbClr val="EEF4EC"/>
-          </a:solidFill>
-          <a:ln w="15240">
-            <a:solidFill>
-              <a:srgbClr val="2E8C46"/>
-            </a:solidFill>
-            <a:prstDash val="solid"/>
-          </a:ln>
-        </p:spPr>
-      </p:sp>
-      <p:sp>
-        <p:nvSpPr>
-          <p:cNvPr id="15" name="Shape 13"/>
-          <p:cNvSpPr/>
-          <p:nvPr/>
-        </p:nvSpPr>
-        <p:spPr>
-          <a:xfrm>
-            <a:off x="8467344" y="2148840"/>
-            <a:ext cx="603504" cy="603504"/>
-          </a:xfrm>
-          <a:prstGeom prst="ellipse">
-            <a:avLst/>
-          </a:prstGeom>
-          <a:solidFill>
-            <a:srgbClr val="1E6B34"/>
-          </a:solidFill>
-          <a:ln/>
-        </p:spPr>
-      </p:sp>
-      <p:sp>
-        <p:nvSpPr>
-          <p:cNvPr id="16" name="Text 14"/>
-          <p:cNvSpPr/>
-          <p:nvPr/>
-        </p:nvSpPr>
-        <p:spPr>
-          <a:xfrm>
-            <a:off x="8467344" y="2148840"/>
-            <a:ext cx="603504" cy="603504"/>
-          </a:xfrm>
-          <a:prstGeom prst="rect">
-            <a:avLst/>
-          </a:prstGeom>
-          <a:noFill/>
-          <a:ln/>
-        </p:spPr>
-        <p:txBody>
-          <a:bodyPr wrap="square" lIns="0" tIns="0" rIns="0" bIns="0" rtlCol="0" anchor="ctr"/>
-          <a:lstStyle/>
-          <a:p>
-            <a:pPr algn="ctr" indent="0" marL="0">
-              <a:buNone/>
-            </a:pPr>
-            <a:r>
-              <a:rPr lang="en-US" sz="2200" b="1" dirty="0">
-                <a:solidFill>
-                  <a:srgbClr val="FFFFFF"/>
-                </a:solidFill>
-                <a:latin typeface="Century Schoolbook" pitchFamily="34" charset="0"/>
-                <a:ea typeface="Century Schoolbook" pitchFamily="34" charset="-122"/>
-                <a:cs typeface="Century Schoolbook" pitchFamily="34" charset="-120"/>
-              </a:rPr>
-              <a:t>3</a:t>
-            </a:r>
-            <a:endParaRPr lang="en-US" sz="2200" dirty="0"/>
-          </a:p>
-        </p:txBody>
-      </p:sp>
-      <p:sp>
-        <p:nvSpPr>
-          <p:cNvPr id="17" name="Text 15"/>
-          <p:cNvSpPr/>
-          <p:nvPr/>
-        </p:nvSpPr>
-        <p:spPr>
-          <a:xfrm>
-            <a:off x="8467344" y="2898648"/>
-            <a:ext cx="2953512" cy="777240"/>
-          </a:xfrm>
-          <a:prstGeom prst="rect">
-            <a:avLst/>
-          </a:prstGeom>
-          <a:noFill/>
-          <a:ln/>
-        </p:spPr>
-        <p:txBody>
-          <a:bodyPr wrap="square" lIns="0" tIns="0" rIns="0" bIns="0" rtlCol="0" anchor="ctr"/>
-          <a:lstStyle/>
-          <a:p>
-            <a:pPr indent="0" marL="0">
-              <a:buNone/>
-            </a:pPr>
-            <a:r>
-              <a:rPr lang="en-US" sz="1600" b="1" dirty="0">
-                <a:solidFill>
-                  <a:srgbClr val="152619"/>
-                </a:solidFill>
-                <a:latin typeface="Calibri" pitchFamily="34" charset="0"/>
-                <a:ea typeface="Calibri" pitchFamily="34" charset="-122"/>
-                <a:cs typeface="Calibri" pitchFamily="34" charset="-120"/>
-              </a:rPr>
-              <a:t>Genuinely live, not a cache</a:t>
-            </a:r>
-            <a:endParaRPr lang="en-US" sz="1600" dirty="0"/>
-          </a:p>
-        </p:txBody>
-      </p:sp>
-      <p:sp>
-        <p:nvSpPr>
-          <p:cNvPr id="18" name="Text 16"/>
-          <p:cNvSpPr/>
-          <p:nvPr/>
-        </p:nvSpPr>
-        <p:spPr>
-          <a:xfrm>
-            <a:off x="8467344" y="3657600"/>
-            <a:ext cx="2953512" cy="2011680"/>
-          </a:xfrm>
-          <a:prstGeom prst="rect">
-            <a:avLst/>
-          </a:prstGeom>
-          <a:noFill/>
-          <a:ln/>
-        </p:spPr>
-        <p:txBody>
-          <a:bodyPr wrap="square" lIns="0" tIns="0" rIns="0" bIns="0" rtlCol="0" anchor="ctr"/>
-          <a:lstStyle/>
-          <a:p>
-            <a:pPr indent="0" marL="0">
-              <a:lnSpc>
-                <a:spcPct val="106000"/>
-              </a:lnSpc>
-              <a:buNone/>
-            </a:pPr>
-            <a:r>
-              <a:rPr lang="en-US" sz="1250" dirty="0">
-                <a:solidFill>
-                  <a:srgbClr val="5C6E58"/>
-                </a:solidFill>
-                <a:latin typeface="Calibri" pitchFamily="34" charset="0"/>
-                <a:ea typeface="Calibri" pitchFamily="34" charset="-122"/>
-                <a:cs typeface="Calibri" pitchFamily="34" charset="-120"/>
-              </a:rPr>
               <a:t>Two health polls fifteen seconds apart show the stored count climbing 4,083 to 4,093 — live data.</a:t>
             </a:r>
-            <a:endParaRPr lang="en-US" sz="1250" dirty="0"/>
+            <a:endParaRPr lang="en-US" sz="1200" dirty="0"/>
           </a:p>
         </p:txBody>
       </p:sp>
@@ -2960,7 +3087,7 @@
     <p:bg>
       <p:bgPr>
         <a:solidFill>
-          <a:srgbClr val="FFFFFF"/>
+          <a:srgbClr val="1C2022"/>
         </a:solidFill>
       </p:bgPr>
     </p:bg>
@@ -2986,59 +3113,137 @@
         </p:nvSpPr>
         <p:spPr>
           <a:xfrm>
-            <a:off x="640080" y="502920"/>
-            <a:ext cx="10972800" cy="822960"/>
-          </a:xfrm>
-          <a:prstGeom prst="rect">
-            <a:avLst/>
-          </a:prstGeom>
-          <a:noFill/>
-          <a:ln/>
-        </p:spPr>
-        <p:txBody>
-          <a:bodyPr wrap="square" rtlCol="0" anchor="t"/>
-          <a:lstStyle/>
-          <a:p>
-            <a:pPr indent="0" marL="0">
-              <a:buNone/>
-            </a:pPr>
-            <a:r>
-              <a:rPr lang="en-US" sz="2800" b="1" dirty="0">
-                <a:solidFill>
-                  <a:srgbClr val="152619"/>
-                </a:solidFill>
-                <a:latin typeface="Century Schoolbook" pitchFamily="34" charset="0"/>
-                <a:ea typeface="Century Schoolbook" pitchFamily="34" charset="-122"/>
-                <a:cs typeface="Century Schoolbook" pitchFamily="34" charset="-120"/>
-              </a:rPr>
-              <a:t>Hardest Part — what only the real cloud revealed</a:t>
-            </a:r>
-            <a:endParaRPr lang="en-US" sz="2800" dirty="0"/>
-          </a:p>
-        </p:txBody>
-      </p:sp>
-      <p:sp>
-        <p:nvSpPr>
-          <p:cNvPr id="3" name="Shape 1"/>
-          <p:cNvSpPr/>
-          <p:nvPr/>
-        </p:nvSpPr>
-        <p:spPr>
-          <a:xfrm>
-            <a:off x="731520" y="1920240"/>
-            <a:ext cx="10698480" cy="1965960"/>
+            <a:off x="777240" y="731520"/>
+            <a:ext cx="914400" cy="640080"/>
+          </a:xfrm>
+          <a:prstGeom prst="rect">
+            <a:avLst/>
+          </a:prstGeom>
+          <a:noFill/>
+          <a:ln/>
+        </p:spPr>
+        <p:txBody>
+          <a:bodyPr wrap="square" lIns="0" tIns="0" rIns="0" bIns="0" rtlCol="0" anchor="ctr"/>
+          <a:lstStyle/>
+          <a:p>
+            <a:pPr indent="0" marL="0">
+              <a:buNone/>
+            </a:pPr>
+            <a:r>
+              <a:rPr lang="en-US" sz="3000" b="1" dirty="0">
+                <a:solidFill>
+                  <a:srgbClr val="22A294"/>
+                </a:solidFill>
+                <a:latin typeface="Cambria" pitchFamily="34" charset="0"/>
+                <a:ea typeface="Cambria" pitchFamily="34" charset="-122"/>
+                <a:cs typeface="Cambria" pitchFamily="34" charset="-120"/>
+              </a:rPr>
+              <a:t>03</a:t>
+            </a:r>
+            <a:endParaRPr lang="en-US" sz="3000" dirty="0"/>
+          </a:p>
+        </p:txBody>
+      </p:sp>
+      <p:sp>
+        <p:nvSpPr>
+          <p:cNvPr id="3" name="Text 1"/>
+          <p:cNvSpPr/>
+          <p:nvPr/>
+        </p:nvSpPr>
+        <p:spPr>
+          <a:xfrm>
+            <a:off x="1645920" y="905256"/>
+            <a:ext cx="9768535" cy="274320"/>
+          </a:xfrm>
+          <a:prstGeom prst="rect">
+            <a:avLst/>
+          </a:prstGeom>
+          <a:noFill/>
+          <a:ln/>
+        </p:spPr>
+        <p:txBody>
+          <a:bodyPr wrap="square" lIns="0" tIns="0" rIns="0" bIns="0" rtlCol="0" anchor="ctr"/>
+          <a:lstStyle/>
+          <a:p>
+            <a:pPr indent="0" marL="0">
+              <a:buNone/>
+            </a:pPr>
+            <a:r>
+              <a:rPr lang="en-US" sz="1100" b="1" spc="200" kern="0" dirty="0">
+                <a:solidFill>
+                  <a:srgbClr val="8B98A6"/>
+                </a:solidFill>
+                <a:latin typeface="Calibri" pitchFamily="34" charset="0"/>
+                <a:ea typeface="Calibri" pitchFamily="34" charset="-122"/>
+                <a:cs typeface="Calibri" pitchFamily="34" charset="-120"/>
+              </a:rPr>
+              <a:t>CHALLENGE</a:t>
+            </a:r>
+            <a:endParaRPr lang="en-US" sz="1100" dirty="0"/>
+          </a:p>
+        </p:txBody>
+      </p:sp>
+      <p:sp>
+        <p:nvSpPr>
+          <p:cNvPr id="4" name="Text 2"/>
+          <p:cNvSpPr/>
+          <p:nvPr/>
+        </p:nvSpPr>
+        <p:spPr>
+          <a:xfrm>
+            <a:off x="777240" y="1380744"/>
+            <a:ext cx="10637215" cy="640080"/>
+          </a:xfrm>
+          <a:prstGeom prst="rect">
+            <a:avLst/>
+          </a:prstGeom>
+          <a:noFill/>
+          <a:ln/>
+        </p:spPr>
+        <p:txBody>
+          <a:bodyPr wrap="square" lIns="0" tIns="0" rIns="0" bIns="0" rtlCol="0" anchor="ctr"/>
+          <a:lstStyle/>
+          <a:p>
+            <a:pPr indent="0" marL="0">
+              <a:buNone/>
+            </a:pPr>
+            <a:r>
+              <a:rPr lang="en-US" sz="2300" b="1" dirty="0">
+                <a:solidFill>
+                  <a:srgbClr val="EEF4F2"/>
+                </a:solidFill>
+                <a:latin typeface="Cambria" pitchFamily="34" charset="0"/>
+                <a:ea typeface="Cambria" pitchFamily="34" charset="-122"/>
+                <a:cs typeface="Cambria" pitchFamily="34" charset="-120"/>
+              </a:rPr>
+              <a:t>taking the dashboard off the server</a:t>
+            </a:r>
+            <a:endParaRPr lang="en-US" sz="2300" dirty="0"/>
+          </a:p>
+        </p:txBody>
+      </p:sp>
+      <p:sp>
+        <p:nvSpPr>
+          <p:cNvPr id="5" name="Shape 3"/>
+          <p:cNvSpPr/>
+          <p:nvPr/>
+        </p:nvSpPr>
+        <p:spPr>
+          <a:xfrm>
+            <a:off x="777240" y="2423160"/>
+            <a:ext cx="5090008" cy="3657600"/>
           </a:xfrm>
           <a:prstGeom prst="roundRect">
             <a:avLst>
-              <a:gd name="adj" fmla="val 4651"/>
+              <a:gd name="adj" fmla="val 1000"/>
             </a:avLst>
           </a:prstGeom>
           <a:solidFill>
-            <a:srgbClr val="EEF4EC"/>
+            <a:srgbClr val="262B2E"/>
           </a:solidFill>
-          <a:ln w="19050">
+          <a:ln w="12700">
             <a:solidFill>
-              <a:srgbClr val="D9A62E"/>
+              <a:srgbClr val="3A3F42"/>
             </a:solidFill>
             <a:prstDash val="solid"/>
           </a:ln>
@@ -3046,14 +3251,14 @@
       </p:sp>
       <p:sp>
         <p:nvSpPr>
-          <p:cNvPr id="4" name="Text 2"/>
-          <p:cNvSpPr/>
-          <p:nvPr/>
-        </p:nvSpPr>
-        <p:spPr>
-          <a:xfrm>
-            <a:off x="1005840" y="2103120"/>
-            <a:ext cx="3657600" cy="457200"/>
+          <p:cNvPr id="6" name="Text 4"/>
+          <p:cNvSpPr/>
+          <p:nvPr/>
+        </p:nvSpPr>
+        <p:spPr>
+          <a:xfrm>
+            <a:off x="1097280" y="2697480"/>
+            <a:ext cx="4449928" cy="320040"/>
           </a:xfrm>
           <a:prstGeom prst="rect">
             <a:avLst/>
@@ -3069,84 +3274,38 @@
               <a:buNone/>
             </a:pPr>
             <a:r>
-              <a:rPr lang="en-US" sz="1900" b="1" dirty="0">
-                <a:solidFill>
-                  <a:srgbClr val="D9A62E"/>
-                </a:solidFill>
-                <a:latin typeface="Century Schoolbook" pitchFamily="34" charset="0"/>
-                <a:ea typeface="Century Schoolbook" pitchFamily="34" charset="-122"/>
-                <a:cs typeface="Century Schoolbook" pitchFamily="34" charset="-120"/>
-              </a:rPr>
-              <a:t>Problem</a:t>
-            </a:r>
-            <a:endParaRPr lang="en-US" sz="1900" dirty="0"/>
-          </a:p>
-        </p:txBody>
-      </p:sp>
-      <p:sp>
-        <p:nvSpPr>
-          <p:cNvPr id="5" name="Text 3"/>
-          <p:cNvSpPr/>
-          <p:nvPr/>
-        </p:nvSpPr>
-        <p:spPr>
-          <a:xfrm>
-            <a:off x="1005840" y="2578608"/>
-            <a:ext cx="9966960" cy="1188720"/>
-          </a:xfrm>
-          <a:prstGeom prst="rect">
-            <a:avLst/>
-          </a:prstGeom>
-          <a:noFill/>
-          <a:ln/>
-        </p:spPr>
-        <p:txBody>
-          <a:bodyPr wrap="square" lIns="0" tIns="0" rIns="0" bIns="0" rtlCol="0" anchor="ctr"/>
-          <a:lstStyle/>
-          <a:p>
-            <a:pPr indent="0" marL="0">
-              <a:lnSpc>
-                <a:spcPct val="105000"/>
-              </a:lnSpc>
-              <a:buNone/>
-            </a:pPr>
-            <a:r>
-              <a:rPr lang="en-US" sz="1300" dirty="0">
-                <a:solidFill>
-                  <a:srgbClr val="152619"/>
+              <a:rPr lang="en-US" sz="1200" b="1" spc="200" kern="0" dirty="0">
+                <a:solidFill>
+                  <a:srgbClr val="D1584E"/>
                 </a:solidFill>
                 <a:latin typeface="Calibri" pitchFamily="34" charset="0"/>
                 <a:ea typeface="Calibri" pitchFamily="34" charset="-122"/>
                 <a:cs typeface="Calibri" pitchFamily="34" charset="-120"/>
               </a:rPr>
-              <a:t>On the first real deployment, every DynamoDB and SQS call failed authentication across fog, processor and dashboard, while CloudFront and public Lambda Function URLs were blocked outright in the academy account. All 115 tests and the full emulator run passed cleanly, so nothing pointed at the code — the client swapped in hardcoded emulator credentials whenever an access-key variable was present, and real AWS always sets that variable.</a:t>
-            </a:r>
-            <a:endParaRPr lang="en-US" sz="1300" dirty="0"/>
-          </a:p>
-        </p:txBody>
-      </p:sp>
-      <p:sp>
-        <p:nvSpPr>
-          <p:cNvPr id="6" name="Shape 4"/>
-          <p:cNvSpPr/>
-          <p:nvPr/>
-        </p:nvSpPr>
-        <p:spPr>
-          <a:xfrm>
-            <a:off x="731520" y="4041648"/>
-            <a:ext cx="10698480" cy="1965960"/>
-          </a:xfrm>
-          <a:prstGeom prst="roundRect">
-            <a:avLst>
-              <a:gd name="adj" fmla="val 4651"/>
-            </a:avLst>
-          </a:prstGeom>
-          <a:solidFill>
-            <a:srgbClr val="EEF4EC"/>
-          </a:solidFill>
+              <a:t>PROBLEM</a:t>
+            </a:r>
+            <a:endParaRPr lang="en-US" sz="1200" dirty="0"/>
+          </a:p>
+        </p:txBody>
+      </p:sp>
+      <p:sp>
+        <p:nvSpPr>
+          <p:cNvPr id="7" name="Shape 5"/>
+          <p:cNvSpPr/>
+          <p:nvPr/>
+        </p:nvSpPr>
+        <p:spPr>
+          <a:xfrm>
+            <a:off x="1097280" y="3081528"/>
+            <a:ext cx="4449928" cy="0"/>
+          </a:xfrm>
+          <a:prstGeom prst="line">
+            <a:avLst/>
+          </a:prstGeom>
+          <a:noFill/>
           <a:ln w="19050">
             <a:solidFill>
-              <a:srgbClr val="2E8C46"/>
+              <a:srgbClr val="D1584E"/>
             </a:solidFill>
             <a:prstDash val="solid"/>
           </a:ln>
@@ -3154,82 +3313,174 @@
       </p:sp>
       <p:sp>
         <p:nvSpPr>
-          <p:cNvPr id="7" name="Text 5"/>
-          <p:cNvSpPr/>
-          <p:nvPr/>
-        </p:nvSpPr>
-        <p:spPr>
-          <a:xfrm>
-            <a:off x="1005840" y="4224528"/>
-            <a:ext cx="3657600" cy="457200"/>
-          </a:xfrm>
-          <a:prstGeom prst="rect">
-            <a:avLst/>
-          </a:prstGeom>
-          <a:noFill/>
-          <a:ln/>
-        </p:spPr>
-        <p:txBody>
-          <a:bodyPr wrap="square" lIns="0" tIns="0" rIns="0" bIns="0" rtlCol="0" anchor="ctr"/>
-          <a:lstStyle/>
-          <a:p>
-            <a:pPr indent="0" marL="0">
-              <a:buNone/>
-            </a:pPr>
-            <a:r>
-              <a:rPr lang="en-US" sz="1900" b="1" dirty="0">
-                <a:solidFill>
-                  <a:srgbClr val="2E8C46"/>
-                </a:solidFill>
-                <a:latin typeface="Century Schoolbook" pitchFamily="34" charset="0"/>
-                <a:ea typeface="Century Schoolbook" pitchFamily="34" charset="-122"/>
-                <a:cs typeface="Century Schoolbook" pitchFamily="34" charset="-120"/>
-              </a:rPr>
-              <a:t>Solution</a:t>
-            </a:r>
-            <a:endParaRPr lang="en-US" sz="1900" dirty="0"/>
-          </a:p>
-        </p:txBody>
-      </p:sp>
-      <p:sp>
-        <p:nvSpPr>
           <p:cNvPr id="8" name="Text 6"/>
           <p:cNvSpPr/>
           <p:nvPr/>
         </p:nvSpPr>
         <p:spPr>
           <a:xfrm>
-            <a:off x="1005840" y="4700016"/>
-            <a:ext cx="9966960" cy="1188720"/>
-          </a:xfrm>
-          <a:prstGeom prst="rect">
-            <a:avLst/>
-          </a:prstGeom>
-          <a:noFill/>
-          <a:ln/>
-        </p:spPr>
-        <p:txBody>
-          <a:bodyPr wrap="square" lIns="0" tIns="0" rIns="0" bIns="0" rtlCol="0" anchor="ctr"/>
+            <a:off x="1097280" y="3246120"/>
+            <a:ext cx="4449928" cy="2651760"/>
+          </a:xfrm>
+          <a:prstGeom prst="rect">
+            <a:avLst/>
+          </a:prstGeom>
+          <a:noFill/>
+          <a:ln/>
+        </p:spPr>
+        <p:txBody>
+          <a:bodyPr wrap="square" lIns="0" tIns="0" rIns="0" bIns="0" rtlCol="0" anchor="t"/>
           <a:lstStyle/>
           <a:p>
             <a:pPr indent="0" marL="0">
               <a:lnSpc>
-                <a:spcPct val="105000"/>
+                <a:spcPct val="128000"/>
               </a:lnSpc>
               <a:buNone/>
             </a:pPr>
             <a:r>
-              <a:rPr lang="en-US" sz="1300" dirty="0">
-                <a:solidFill>
-                  <a:srgbClr val="152619"/>
+              <a:rPr lang="en-US" sz="1350" dirty="0">
+                <a:solidFill>
+                  <a:srgbClr val="EEF4F2"/>
                 </a:solidFill>
                 <a:latin typeface="Calibri" pitchFamily="34" charset="0"/>
                 <a:ea typeface="Calibri" pitchFamily="34" charset="-122"/>
                 <a:cs typeface="Calibri" pitchFamily="34" charset="-120"/>
               </a:rPr>
-              <a:t>Gate emulator credentials on the one truly local signal — the explicit LocalStack endpoint override — and serve the API through API Gateway with the frontend from S3 over HTTPS, around the account blocks. Every fix was re-verified live: a real DynamoDB write and a real 200 through the gateway.</a:t>
-            </a:r>
-            <a:endParaRPr lang="en-US" sz="1300" dirty="0"/>
+              <a:t>The dashboard first ran as a process on the edge host, which meant the whole read path depended on that one instance staying up — a single point of failure for a fleet that is supposed to be always-observable. The account also blocked the obvious serverless front doors, so the usual escape route was closed.</a:t>
+            </a:r>
+            <a:endParaRPr lang="en-US" sz="1350" dirty="0"/>
+          </a:p>
+        </p:txBody>
+      </p:sp>
+      <p:sp>
+        <p:nvSpPr>
+          <p:cNvPr id="9" name="Shape 7"/>
+          <p:cNvSpPr/>
+          <p:nvPr/>
+        </p:nvSpPr>
+        <p:spPr>
+          <a:xfrm>
+            <a:off x="6324448" y="2423160"/>
+            <a:ext cx="5090008" cy="3657600"/>
+          </a:xfrm>
+          <a:prstGeom prst="roundRect">
+            <a:avLst>
+              <a:gd name="adj" fmla="val 1000"/>
+            </a:avLst>
+          </a:prstGeom>
+          <a:solidFill>
+            <a:srgbClr val="262B2E"/>
+          </a:solidFill>
+          <a:ln w="12700">
+            <a:solidFill>
+              <a:srgbClr val="3A3F42"/>
+            </a:solidFill>
+            <a:prstDash val="solid"/>
+          </a:ln>
+        </p:spPr>
+      </p:sp>
+      <p:sp>
+        <p:nvSpPr>
+          <p:cNvPr id="10" name="Text 8"/>
+          <p:cNvSpPr/>
+          <p:nvPr/>
+        </p:nvSpPr>
+        <p:spPr>
+          <a:xfrm>
+            <a:off x="6644488" y="2697480"/>
+            <a:ext cx="4449928" cy="320040"/>
+          </a:xfrm>
+          <a:prstGeom prst="rect">
+            <a:avLst/>
+          </a:prstGeom>
+          <a:noFill/>
+          <a:ln/>
+        </p:spPr>
+        <p:txBody>
+          <a:bodyPr wrap="square" lIns="0" tIns="0" rIns="0" bIns="0" rtlCol="0" anchor="ctr"/>
+          <a:lstStyle/>
+          <a:p>
+            <a:pPr indent="0" marL="0">
+              <a:buNone/>
+            </a:pPr>
+            <a:r>
+              <a:rPr lang="en-US" sz="1200" b="1" spc="200" kern="0" dirty="0">
+                <a:solidFill>
+                  <a:srgbClr val="3FAE94"/>
+                </a:solidFill>
+                <a:latin typeface="Calibri" pitchFamily="34" charset="0"/>
+                <a:ea typeface="Calibri" pitchFamily="34" charset="-122"/>
+                <a:cs typeface="Calibri" pitchFamily="34" charset="-120"/>
+              </a:rPr>
+              <a:t>SOLUTION</a:t>
+            </a:r>
+            <a:endParaRPr lang="en-US" sz="1200" dirty="0"/>
+          </a:p>
+        </p:txBody>
+      </p:sp>
+      <p:sp>
+        <p:nvSpPr>
+          <p:cNvPr id="11" name="Shape 9"/>
+          <p:cNvSpPr/>
+          <p:nvPr/>
+        </p:nvSpPr>
+        <p:spPr>
+          <a:xfrm>
+            <a:off x="6644488" y="3081528"/>
+            <a:ext cx="4449928" cy="0"/>
+          </a:xfrm>
+          <a:prstGeom prst="line">
+            <a:avLst/>
+          </a:prstGeom>
+          <a:noFill/>
+          <a:ln w="19050">
+            <a:solidFill>
+              <a:srgbClr val="3FAE94"/>
+            </a:solidFill>
+            <a:prstDash val="solid"/>
+          </a:ln>
+        </p:spPr>
+      </p:sp>
+      <p:sp>
+        <p:nvSpPr>
+          <p:cNvPr id="12" name="Text 10"/>
+          <p:cNvSpPr/>
+          <p:nvPr/>
+        </p:nvSpPr>
+        <p:spPr>
+          <a:xfrm>
+            <a:off x="6644488" y="3246120"/>
+            <a:ext cx="4449928" cy="2651760"/>
+          </a:xfrm>
+          <a:prstGeom prst="rect">
+            <a:avLst/>
+          </a:prstGeom>
+          <a:noFill/>
+          <a:ln/>
+        </p:spPr>
+        <p:txBody>
+          <a:bodyPr wrap="square" lIns="0" tIns="0" rIns="0" bIns="0" rtlCol="0" anchor="t"/>
+          <a:lstStyle/>
+          <a:p>
+            <a:pPr indent="0" marL="0">
+              <a:lnSpc>
+                <a:spcPct val="128000"/>
+              </a:lnSpc>
+              <a:buNone/>
+            </a:pPr>
+            <a:r>
+              <a:rPr lang="en-US" sz="1350" dirty="0">
+                <a:solidFill>
+                  <a:srgbClr val="EEF4F2"/>
+                </a:solidFill>
+                <a:latin typeface="Calibri" pitchFamily="34" charset="0"/>
+                <a:ea typeface="Calibri" pitchFamily="34" charset="-122"/>
+                <a:cs typeface="Calibri" pitchFamily="34" charset="-120"/>
+              </a:rPr>
+              <a:t>The dashboard was migrated to a fully serverless tier — its logic repackaged behind a function and a real API Gateway, with the static frontend on S3 — so the read path no longer depends on the edge host at all. Only fresh sensor data and one health field still need the edge; the dashboard and its API stay up whether or not the instance is running.</a:t>
+            </a:r>
+            <a:endParaRPr lang="en-US" sz="1350" dirty="0"/>
           </a:p>
         </p:txBody>
       </p:sp>
